--- a/Grupo 3/Fase 1/Evidencias Grupales/Presentación Capstone Zapatillas Duoc.pptx
+++ b/Grupo 3/Fase 1/Evidencias Grupales/Presentación Capstone Zapatillas Duoc.pptx
@@ -23,28 +23,30 @@
     <p:sldId id="268" r:id="rId19"/>
     <p:sldId id="269" r:id="rId20"/>
     <p:sldId id="270" r:id="rId21"/>
+    <p:sldId id="271" r:id="rId22"/>
+    <p:sldId id="272" r:id="rId23"/>
   </p:sldIdLst>
   <p:sldSz cy="6858000" cx="12192000"/>
   <p:notesSz cx="6858000" cy="9144000"/>
   <p:embeddedFontLst>
     <p:embeddedFont>
       <p:font typeface="Plus Jakarta Sans"/>
-      <p:regular r:id="rId22"/>
-      <p:bold r:id="rId23"/>
-      <p:italic r:id="rId24"/>
-      <p:boldItalic r:id="rId25"/>
+      <p:regular r:id="rId24"/>
+      <p:bold r:id="rId25"/>
+      <p:italic r:id="rId26"/>
+      <p:boldItalic r:id="rId27"/>
     </p:embeddedFont>
     <p:embeddedFont>
       <p:font typeface="Plus Jakarta Sans SemiBold"/>
-      <p:regular r:id="rId26"/>
-      <p:bold r:id="rId27"/>
-      <p:italic r:id="rId28"/>
-      <p:boldItalic r:id="rId29"/>
+      <p:regular r:id="rId28"/>
+      <p:bold r:id="rId29"/>
+      <p:italic r:id="rId30"/>
+      <p:boldItalic r:id="rId31"/>
     </p:embeddedFont>
     <p:embeddedFont>
       <p:font typeface="Space Grotesk"/>
-      <p:regular r:id="rId30"/>
-      <p:bold r:id="rId31"/>
+      <p:regular r:id="rId32"/>
+      <p:bold r:id="rId33"/>
     </p:embeddedFont>
   </p:embeddedFontLst>
   <p:defaultTextStyle>
@@ -292,7 +294,7 @@
       </p15:sldGuideLst>
     </p:ext>
     <p:ext uri="GoogleSlidesCustomDataVersion2">
-      <go:slidesCustomData xmlns:go="http://customooxmlschemas.google.com/" r:id="rId32" roundtripDataSignature="AMtx7mho6OvpRljcFYW6yLmhf3O87fAPpg=="/>
+      <go:slidesCustomData xmlns:go="http://customooxmlschemas.google.com/" r:id="rId34" roundtripDataSignature="AMtx7mg4YJgMUr3tzhkRFXkEqB05K0ezmA=="/>
     </p:ext>
   </p:extLst>
 </p:presentation>
@@ -1215,7 +1217,7 @@
   <p:cSld>
     <p:spTree>
       <p:nvGrpSpPr>
-        <p:cNvPr id="276" name="Shape 276"/>
+        <p:cNvPr id="267" name="Shape 267"/>
         <p:cNvGrpSpPr/>
         <p:nvPr/>
       </p:nvGrpSpPr>
@@ -1229,7 +1231,7 @@
       </p:grpSpPr>
       <p:sp>
         <p:nvSpPr>
-          <p:cNvPr id="277" name="Google Shape;277;p12:notes"/>
+          <p:cNvPr id="268" name="Google Shape;268;p12:notes"/>
           <p:cNvSpPr txBox="1"/>
           <p:nvPr>
             <p:ph idx="1" type="body"/>
@@ -1276,7 +1278,7 @@
       </p:sp>
       <p:sp>
         <p:nvSpPr>
-          <p:cNvPr id="278" name="Google Shape;278;p12:notes"/>
+          <p:cNvPr id="269" name="Google Shape;269;p12:notes"/>
           <p:cNvSpPr/>
           <p:nvPr>
             <p:ph idx="2" type="sldImg"/>
@@ -1332,7 +1334,7 @@
   <p:cSld>
     <p:spTree>
       <p:nvGrpSpPr>
-        <p:cNvPr id="288" name="Shape 288"/>
+        <p:cNvPr id="277" name="Shape 277"/>
         <p:cNvGrpSpPr/>
         <p:nvPr/>
       </p:nvGrpSpPr>
@@ -1346,7 +1348,7 @@
       </p:grpSpPr>
       <p:sp>
         <p:nvSpPr>
-          <p:cNvPr id="289" name="Google Shape;289;p13:notes"/>
+          <p:cNvPr id="278" name="Google Shape;278;g3fa48b68155_1_3:notes"/>
           <p:cNvSpPr txBox="1"/>
           <p:nvPr>
             <p:ph idx="1" type="body"/>
@@ -1393,7 +1395,7 @@
       </p:sp>
       <p:sp>
         <p:nvSpPr>
-          <p:cNvPr id="290" name="Google Shape;290;p13:notes"/>
+          <p:cNvPr id="279" name="Google Shape;279;g3fa48b68155_1_3:notes"/>
           <p:cNvSpPr/>
           <p:nvPr>
             <p:ph idx="2" type="sldImg"/>
@@ -1402,7 +1404,7 @@
         <p:spPr>
           <a:xfrm>
             <a:off x="1143225" y="685800"/>
-            <a:ext cx="4572225" cy="3429000"/>
+            <a:ext cx="4572300" cy="3429000"/>
           </a:xfrm>
           <a:custGeom>
             <a:rect b="b" l="l" r="r" t="t"/>
@@ -1449,7 +1451,7 @@
   <p:cSld>
     <p:spTree>
       <p:nvGrpSpPr>
-        <p:cNvPr id="311" name="Shape 311"/>
+        <p:cNvPr id="285" name="Shape 285"/>
         <p:cNvGrpSpPr/>
         <p:nvPr/>
       </p:nvGrpSpPr>
@@ -1463,7 +1465,7 @@
       </p:grpSpPr>
       <p:sp>
         <p:nvSpPr>
-          <p:cNvPr id="312" name="Google Shape;312;p14:notes"/>
+          <p:cNvPr id="286" name="Google Shape;286;p13:notes"/>
           <p:cNvSpPr txBox="1"/>
           <p:nvPr>
             <p:ph idx="1" type="body"/>
@@ -1510,7 +1512,7 @@
       </p:sp>
       <p:sp>
         <p:nvSpPr>
-          <p:cNvPr id="313" name="Google Shape;313;p14:notes"/>
+          <p:cNvPr id="287" name="Google Shape;287;p13:notes"/>
           <p:cNvSpPr/>
           <p:nvPr>
             <p:ph idx="2" type="sldImg"/>
@@ -1566,7 +1568,7 @@
   <p:cSld>
     <p:spTree>
       <p:nvGrpSpPr>
-        <p:cNvPr id="338" name="Shape 338"/>
+        <p:cNvPr id="308" name="Shape 308"/>
         <p:cNvGrpSpPr/>
         <p:nvPr/>
       </p:nvGrpSpPr>
@@ -1580,7 +1582,7 @@
       </p:grpSpPr>
       <p:sp>
         <p:nvSpPr>
-          <p:cNvPr id="339" name="Google Shape;339;p15:notes"/>
+          <p:cNvPr id="309" name="Google Shape;309;p14:notes"/>
           <p:cNvSpPr txBox="1"/>
           <p:nvPr>
             <p:ph idx="1" type="body"/>
@@ -1627,7 +1629,7 @@
       </p:sp>
       <p:sp>
         <p:nvSpPr>
-          <p:cNvPr id="340" name="Google Shape;340;p15:notes"/>
+          <p:cNvPr id="310" name="Google Shape;310;p14:notes"/>
           <p:cNvSpPr/>
           <p:nvPr>
             <p:ph idx="2" type="sldImg"/>
@@ -1637,6 +1639,240 @@
           <a:xfrm>
             <a:off x="1143225" y="685800"/>
             <a:ext cx="4572225" cy="3429000"/>
+          </a:xfrm>
+          <a:custGeom>
+            <a:rect b="b" l="l" r="r" t="t"/>
+            <a:pathLst>
+              <a:path extrusionOk="0" h="120000" w="120000">
+                <a:moveTo>
+                  <a:pt x="0" y="0"/>
+                </a:moveTo>
+                <a:lnTo>
+                  <a:pt x="120000" y="0"/>
+                </a:lnTo>
+                <a:lnTo>
+                  <a:pt x="120000" y="120000"/>
+                </a:lnTo>
+                <a:lnTo>
+                  <a:pt x="0" y="120000"/>
+                </a:lnTo>
+                <a:close/>
+              </a:path>
+            </a:pathLst>
+          </a:custGeom>
+          <a:noFill/>
+          <a:ln cap="flat" cmpd="sng" w="9525">
+            <a:solidFill>
+              <a:srgbClr val="000000"/>
+            </a:solidFill>
+            <a:prstDash val="solid"/>
+            <a:round/>
+            <a:headEnd len="sm" w="sm" type="none"/>
+            <a:tailEnd len="sm" w="sm" type="none"/>
+          </a:ln>
+        </p:spPr>
+      </p:sp>
+    </p:spTree>
+  </p:cSld>
+  <p:clrMapOvr>
+    <a:masterClrMapping/>
+  </p:clrMapOvr>
+</p:notes>
+</file>
+
+<file path=ppt/notesSlides/notesSlide16.xml><?xml version="1.0" encoding="utf-8"?>
+<p:notes xmlns:a="http://schemas.openxmlformats.org/drawingml/2006/main" xmlns:r="http://schemas.openxmlformats.org/officeDocument/2006/relationships" xmlns:mc="http://schemas.openxmlformats.org/markup-compatibility/2006" xmlns:mv="urn:schemas-microsoft-com:mac:vml" xmlns:p="http://schemas.openxmlformats.org/presentationml/2006/main" xmlns:c="http://schemas.openxmlformats.org/drawingml/2006/chart" xmlns:dgm="http://schemas.openxmlformats.org/drawingml/2006/diagram" xmlns:o="urn:schemas-microsoft-com:office:office" xmlns:v="urn:schemas-microsoft-com:vml" xmlns:pvml="urn:schemas-microsoft-com:office:powerpoint" xmlns:com="http://schemas.openxmlformats.org/drawingml/2006/compatibility" xmlns:p14="http://schemas.microsoft.com/office/powerpoint/2010/main" xmlns:p15="http://schemas.microsoft.com/office/powerpoint/2012/main" xmlns:ahyp="http://schemas.microsoft.com/office/drawing/2018/hyperlinkcolor" showMasterPhAnim="0" showMasterSp="0">
+  <p:cSld>
+    <p:spTree>
+      <p:nvGrpSpPr>
+        <p:cNvPr id="335" name="Shape 335"/>
+        <p:cNvGrpSpPr/>
+        <p:nvPr/>
+      </p:nvGrpSpPr>
+      <p:grpSpPr>
+        <a:xfrm>
+          <a:off x="0" y="0"/>
+          <a:ext cx="0" cy="0"/>
+          <a:chOff x="0" y="0"/>
+          <a:chExt cx="0" cy="0"/>
+        </a:xfrm>
+      </p:grpSpPr>
+      <p:sp>
+        <p:nvSpPr>
+          <p:cNvPr id="336" name="Google Shape;336;p15:notes"/>
+          <p:cNvSpPr txBox="1"/>
+          <p:nvPr>
+            <p:ph idx="1" type="body"/>
+          </p:nvPr>
+        </p:nvSpPr>
+        <p:spPr>
+          <a:xfrm>
+            <a:off x="685800" y="4343400"/>
+            <a:ext cx="5486400" cy="4114800"/>
+          </a:xfrm>
+          <a:prstGeom prst="rect">
+            <a:avLst/>
+          </a:prstGeom>
+          <a:noFill/>
+          <a:ln>
+            <a:noFill/>
+          </a:ln>
+        </p:spPr>
+        <p:txBody>
+          <a:bodyPr anchorCtr="0" anchor="t" bIns="91425" lIns="91425" spcFirstLastPara="1" rIns="91425" wrap="square" tIns="91425">
+            <a:noAutofit/>
+          </a:bodyPr>
+          <a:lstStyle/>
+          <a:p>
+            <a:pPr indent="0" lvl="0" marL="0" rtl="0" algn="l">
+              <a:lnSpc>
+                <a:spcPct val="100000"/>
+              </a:lnSpc>
+              <a:spcBef>
+                <a:spcPts val="0"/>
+              </a:spcBef>
+              <a:spcAft>
+                <a:spcPts val="0"/>
+              </a:spcAft>
+              <a:buSzPts val="1100"/>
+              <a:buNone/>
+            </a:pPr>
+            <a:r>
+              <a:t/>
+            </a:r>
+            <a:endParaRPr/>
+          </a:p>
+        </p:txBody>
+      </p:sp>
+      <p:sp>
+        <p:nvSpPr>
+          <p:cNvPr id="337" name="Google Shape;337;p15:notes"/>
+          <p:cNvSpPr/>
+          <p:nvPr>
+            <p:ph idx="2" type="sldImg"/>
+          </p:nvPr>
+        </p:nvSpPr>
+        <p:spPr>
+          <a:xfrm>
+            <a:off x="1143225" y="685800"/>
+            <a:ext cx="4572225" cy="3429000"/>
+          </a:xfrm>
+          <a:custGeom>
+            <a:rect b="b" l="l" r="r" t="t"/>
+            <a:pathLst>
+              <a:path extrusionOk="0" h="120000" w="120000">
+                <a:moveTo>
+                  <a:pt x="0" y="0"/>
+                </a:moveTo>
+                <a:lnTo>
+                  <a:pt x="120000" y="0"/>
+                </a:lnTo>
+                <a:lnTo>
+                  <a:pt x="120000" y="120000"/>
+                </a:lnTo>
+                <a:lnTo>
+                  <a:pt x="0" y="120000"/>
+                </a:lnTo>
+                <a:close/>
+              </a:path>
+            </a:pathLst>
+          </a:custGeom>
+          <a:noFill/>
+          <a:ln cap="flat" cmpd="sng" w="9525">
+            <a:solidFill>
+              <a:srgbClr val="000000"/>
+            </a:solidFill>
+            <a:prstDash val="solid"/>
+            <a:round/>
+            <a:headEnd len="sm" w="sm" type="none"/>
+            <a:tailEnd len="sm" w="sm" type="none"/>
+          </a:ln>
+        </p:spPr>
+      </p:sp>
+    </p:spTree>
+  </p:cSld>
+  <p:clrMapOvr>
+    <a:masterClrMapping/>
+  </p:clrMapOvr>
+</p:notes>
+</file>
+
+<file path=ppt/notesSlides/notesSlide17.xml><?xml version="1.0" encoding="utf-8"?>
+<p:notes xmlns:a="http://schemas.openxmlformats.org/drawingml/2006/main" xmlns:r="http://schemas.openxmlformats.org/officeDocument/2006/relationships" xmlns:mc="http://schemas.openxmlformats.org/markup-compatibility/2006" xmlns:mv="urn:schemas-microsoft-com:mac:vml" xmlns:p="http://schemas.openxmlformats.org/presentationml/2006/main" xmlns:c="http://schemas.openxmlformats.org/drawingml/2006/chart" xmlns:dgm="http://schemas.openxmlformats.org/drawingml/2006/diagram" xmlns:o="urn:schemas-microsoft-com:office:office" xmlns:v="urn:schemas-microsoft-com:vml" xmlns:pvml="urn:schemas-microsoft-com:office:powerpoint" xmlns:com="http://schemas.openxmlformats.org/drawingml/2006/compatibility" xmlns:p14="http://schemas.microsoft.com/office/powerpoint/2010/main" xmlns:p15="http://schemas.microsoft.com/office/powerpoint/2012/main" xmlns:ahyp="http://schemas.microsoft.com/office/drawing/2018/hyperlinkcolor" showMasterPhAnim="0" showMasterSp="0">
+  <p:cSld>
+    <p:spTree>
+      <p:nvGrpSpPr>
+        <p:cNvPr id="348" name="Shape 348"/>
+        <p:cNvGrpSpPr/>
+        <p:nvPr/>
+      </p:nvGrpSpPr>
+      <p:grpSpPr>
+        <a:xfrm>
+          <a:off x="0" y="0"/>
+          <a:ext cx="0" cy="0"/>
+          <a:chOff x="0" y="0"/>
+          <a:chExt cx="0" cy="0"/>
+        </a:xfrm>
+      </p:grpSpPr>
+      <p:sp>
+        <p:nvSpPr>
+          <p:cNvPr id="349" name="Google Shape;349;g3fa4490e163_0_3:notes"/>
+          <p:cNvSpPr txBox="1"/>
+          <p:nvPr>
+            <p:ph idx="1" type="body"/>
+          </p:nvPr>
+        </p:nvSpPr>
+        <p:spPr>
+          <a:xfrm>
+            <a:off x="685800" y="4343400"/>
+            <a:ext cx="5486400" cy="4114800"/>
+          </a:xfrm>
+          <a:prstGeom prst="rect">
+            <a:avLst/>
+          </a:prstGeom>
+          <a:noFill/>
+          <a:ln>
+            <a:noFill/>
+          </a:ln>
+        </p:spPr>
+        <p:txBody>
+          <a:bodyPr anchorCtr="0" anchor="t" bIns="91425" lIns="91425" spcFirstLastPara="1" rIns="91425" wrap="square" tIns="91425">
+            <a:noAutofit/>
+          </a:bodyPr>
+          <a:lstStyle/>
+          <a:p>
+            <a:pPr indent="0" lvl="0" marL="0" rtl="0" algn="l">
+              <a:lnSpc>
+                <a:spcPct val="100000"/>
+              </a:lnSpc>
+              <a:spcBef>
+                <a:spcPts val="0"/>
+              </a:spcBef>
+              <a:spcAft>
+                <a:spcPts val="0"/>
+              </a:spcAft>
+              <a:buSzPts val="1100"/>
+              <a:buNone/>
+            </a:pPr>
+            <a:r>
+              <a:t/>
+            </a:r>
+            <a:endParaRPr/>
+          </a:p>
+        </p:txBody>
+      </p:sp>
+      <p:sp>
+        <p:nvSpPr>
+          <p:cNvPr id="350" name="Google Shape;350;g3fa4490e163_0_3:notes"/>
+          <p:cNvSpPr/>
+          <p:nvPr>
+            <p:ph idx="2" type="sldImg"/>
+          </p:nvPr>
+        </p:nvSpPr>
+        <p:spPr>
+          <a:xfrm>
+            <a:off x="1143225" y="685800"/>
+            <a:ext cx="4572300" cy="3429000"/>
           </a:xfrm>
           <a:custGeom>
             <a:rect b="b" l="l" r="r" t="t"/>
@@ -17102,23 +17338,16 @@
           <a:chExt cx="0" cy="0"/>
         </a:xfrm>
       </p:grpSpPr>
-      <p:pic>
-        <p:nvPicPr>
-          <p:cNvPr descr="image.png" id="263" name="Google Shape;263;p11"/>
-          <p:cNvPicPr preferRelativeResize="0"/>
+      <p:sp>
+        <p:nvSpPr>
+          <p:cNvPr id="263" name="Google Shape;263;p11"/>
+          <p:cNvSpPr txBox="1"/>
           <p:nvPr/>
-        </p:nvPicPr>
-        <p:blipFill rotWithShape="1">
-          <a:blip r:embed="rId3">
-            <a:alphaModFix/>
-          </a:blip>
-          <a:srcRect b="0" l="0" r="0" t="0"/>
-          <a:stretch/>
-        </p:blipFill>
-        <p:spPr>
-          <a:xfrm>
-            <a:off x="0" y="0"/>
-            <a:ext cx="12192000" cy="6858000"/>
+        </p:nvSpPr>
+        <p:spPr>
+          <a:xfrm>
+            <a:off x="581025" y="485775"/>
+            <a:ext cx="11581447" cy="438150"/>
           </a:xfrm>
           <a:prstGeom prst="rect">
             <a:avLst/>
@@ -17128,72 +17357,40 @@
             <a:noFill/>
           </a:ln>
         </p:spPr>
-      </p:pic>
-      <p:sp>
-        <p:nvSpPr>
-          <p:cNvPr id="264" name="Google Shape;264;p11"/>
-          <p:cNvSpPr txBox="1"/>
-          <p:nvPr/>
-        </p:nvSpPr>
-        <p:spPr>
-          <a:xfrm>
-            <a:off x="1009650" y="2628900"/>
-            <a:ext cx="10601325" cy="274290"/>
-          </a:xfrm>
-          <a:prstGeom prst="rect">
-            <a:avLst/>
-          </a:prstGeom>
-          <a:noFill/>
-          <a:ln>
-            <a:noFill/>
-          </a:ln>
-        </p:spPr>
         <p:txBody>
-          <a:bodyPr anchorCtr="0" anchor="t" bIns="0" lIns="0" spcFirstLastPara="1" rIns="0" wrap="square" tIns="0">
+          <a:bodyPr anchorCtr="0" anchor="ctr" bIns="0" lIns="0" spcFirstLastPara="1" rIns="0" wrap="square" tIns="0">
             <a:spAutoFit/>
           </a:bodyPr>
           <a:lstStyle/>
           <a:p>
             <a:pPr indent="0" lvl="0" marL="0" marR="0" rtl="0" algn="l">
               <a:lnSpc>
-                <a:spcPct val="160000"/>
-              </a:lnSpc>
-              <a:spcBef>
-                <a:spcPts val="0"/>
-              </a:spcBef>
-              <a:spcAft>
-                <a:spcPts val="0"/>
-              </a:spcAft>
-              <a:buClr>
-                <a:srgbClr val="000000"/>
-              </a:buClr>
-              <a:buSzPts val="1350"/>
+                <a:spcPct val="100000"/>
+              </a:lnSpc>
+              <a:spcBef>
+                <a:spcPts val="0"/>
+              </a:spcBef>
+              <a:spcAft>
+                <a:spcPts val="0"/>
+              </a:spcAft>
+              <a:buClr>
+                <a:srgbClr val="000000"/>
+              </a:buClr>
+              <a:buSzPts val="2700"/>
               <a:buFont typeface="Arial"/>
               <a:buNone/>
             </a:pPr>
             <a:r>
-              <a:rPr b="1" i="0" lang="en-US" sz="1350" u="none" cap="none" strike="noStrike">
+              <a:rPr b="1" i="0" lang="en-US" sz="2700" u="none" cap="none" strike="noStrike">
                 <a:solidFill>
                   <a:srgbClr val="F8FAFC"/>
                 </a:solidFill>
-                <a:latin typeface="Plus Jakarta Sans"/>
-                <a:ea typeface="Plus Jakarta Sans"/>
-                <a:cs typeface="Plus Jakarta Sans"/>
-                <a:sym typeface="Plus Jakarta Sans"/>
+                <a:latin typeface="Space Grotesk"/>
+                <a:ea typeface="Space Grotesk"/>
+                <a:cs typeface="Space Grotesk"/>
+                <a:sym typeface="Space Grotesk"/>
               </a:rPr>
-              <a:t>RF01 - Módulo E-Commerce:</a:t>
-            </a:r>
-            <a:r>
-              <a:rPr b="0" i="0" lang="en-US" sz="1350" u="none" cap="none" strike="noStrike">
-                <a:solidFill>
-                  <a:srgbClr val="94A3B8"/>
-                </a:solidFill>
-                <a:latin typeface="Plus Jakarta Sans"/>
-                <a:ea typeface="Plus Jakarta Sans"/>
-                <a:cs typeface="Plus Jakarta Sans"/>
-                <a:sym typeface="Plus Jakarta Sans"/>
-              </a:rPr>
-              <a:t> Visualización de catálogo por modelo/talla, carrito y flujo de checkout.</a:t>
+              <a:t>Lista de Requerimientos</a:t>
             </a:r>
             <a:endParaRPr b="0" i="0" sz="1400" u="none" cap="none" strike="noStrike">
               <a:solidFill>
@@ -17209,520 +17406,7 @@
       </p:sp>
       <p:sp>
         <p:nvSpPr>
-          <p:cNvPr id="265" name="Google Shape;265;p11"/>
-          <p:cNvSpPr txBox="1"/>
-          <p:nvPr/>
-        </p:nvSpPr>
-        <p:spPr>
-          <a:xfrm>
-            <a:off x="1009650" y="3093690"/>
-            <a:ext cx="10601325" cy="274290"/>
-          </a:xfrm>
-          <a:prstGeom prst="rect">
-            <a:avLst/>
-          </a:prstGeom>
-          <a:noFill/>
-          <a:ln>
-            <a:noFill/>
-          </a:ln>
-        </p:spPr>
-        <p:txBody>
-          <a:bodyPr anchorCtr="0" anchor="t" bIns="0" lIns="0" spcFirstLastPara="1" rIns="0" wrap="square" tIns="0">
-            <a:spAutoFit/>
-          </a:bodyPr>
-          <a:lstStyle/>
-          <a:p>
-            <a:pPr indent="0" lvl="0" marL="0" marR="0" rtl="0" algn="l">
-              <a:lnSpc>
-                <a:spcPct val="160000"/>
-              </a:lnSpc>
-              <a:spcBef>
-                <a:spcPts val="0"/>
-              </a:spcBef>
-              <a:spcAft>
-                <a:spcPts val="0"/>
-              </a:spcAft>
-              <a:buClr>
-                <a:srgbClr val="000000"/>
-              </a:buClr>
-              <a:buSzPts val="1350"/>
-              <a:buFont typeface="Arial"/>
-              <a:buNone/>
-            </a:pPr>
-            <a:r>
-              <a:rPr b="1" i="0" lang="en-US" sz="1350" u="none" cap="none" strike="noStrike">
-                <a:solidFill>
-                  <a:srgbClr val="F8FAFC"/>
-                </a:solidFill>
-                <a:latin typeface="Plus Jakarta Sans"/>
-                <a:ea typeface="Plus Jakarta Sans"/>
-                <a:cs typeface="Plus Jakarta Sans"/>
-                <a:sym typeface="Plus Jakarta Sans"/>
-              </a:rPr>
-              <a:t>RF02 - Actualización de Stock:</a:t>
-            </a:r>
-            <a:r>
-              <a:rPr b="0" i="0" lang="en-US" sz="1350" u="none" cap="none" strike="noStrike">
-                <a:solidFill>
-                  <a:srgbClr val="94A3B8"/>
-                </a:solidFill>
-                <a:latin typeface="Plus Jakarta Sans"/>
-                <a:ea typeface="Plus Jakarta Sans"/>
-                <a:cs typeface="Plus Jakarta Sans"/>
-                <a:sym typeface="Plus Jakarta Sans"/>
-              </a:rPr>
-              <a:t> Descuento automático de unidades tras cada compra confirmada.</a:t>
-            </a:r>
-            <a:endParaRPr b="0" i="0" sz="1400" u="none" cap="none" strike="noStrike">
-              <a:solidFill>
-                <a:srgbClr val="000000"/>
-              </a:solidFill>
-              <a:latin typeface="Arial"/>
-              <a:ea typeface="Arial"/>
-              <a:cs typeface="Arial"/>
-              <a:sym typeface="Arial"/>
-            </a:endParaRPr>
-          </a:p>
-        </p:txBody>
-      </p:sp>
-      <p:sp>
-        <p:nvSpPr>
-          <p:cNvPr id="266" name="Google Shape;266;p11"/>
-          <p:cNvSpPr txBox="1"/>
-          <p:nvPr/>
-        </p:nvSpPr>
-        <p:spPr>
-          <a:xfrm>
-            <a:off x="1009650" y="3558480"/>
-            <a:ext cx="10601325" cy="274290"/>
-          </a:xfrm>
-          <a:prstGeom prst="rect">
-            <a:avLst/>
-          </a:prstGeom>
-          <a:noFill/>
-          <a:ln>
-            <a:noFill/>
-          </a:ln>
-        </p:spPr>
-        <p:txBody>
-          <a:bodyPr anchorCtr="0" anchor="t" bIns="0" lIns="0" spcFirstLastPara="1" rIns="0" wrap="square" tIns="0">
-            <a:spAutoFit/>
-          </a:bodyPr>
-          <a:lstStyle/>
-          <a:p>
-            <a:pPr indent="0" lvl="0" marL="0" marR="0" rtl="0" algn="l">
-              <a:lnSpc>
-                <a:spcPct val="160000"/>
-              </a:lnSpc>
-              <a:spcBef>
-                <a:spcPts val="0"/>
-              </a:spcBef>
-              <a:spcAft>
-                <a:spcPts val="0"/>
-              </a:spcAft>
-              <a:buClr>
-                <a:srgbClr val="000000"/>
-              </a:buClr>
-              <a:buSzPts val="1350"/>
-              <a:buFont typeface="Arial"/>
-              <a:buNone/>
-            </a:pPr>
-            <a:r>
-              <a:rPr b="1" i="0" lang="en-US" sz="1350" u="none" cap="none" strike="noStrike">
-                <a:solidFill>
-                  <a:srgbClr val="F8FAFC"/>
-                </a:solidFill>
-                <a:latin typeface="Plus Jakarta Sans"/>
-                <a:ea typeface="Plus Jakarta Sans"/>
-                <a:cs typeface="Plus Jakarta Sans"/>
-                <a:sym typeface="Plus Jakarta Sans"/>
-              </a:rPr>
-              <a:t>RF03 - Algoritmo de Demanda:</a:t>
-            </a:r>
-            <a:r>
-              <a:rPr b="0" i="0" lang="en-US" sz="1350" u="none" cap="none" strike="noStrike">
-                <a:solidFill>
-                  <a:srgbClr val="94A3B8"/>
-                </a:solidFill>
-                <a:latin typeface="Plus Jakarta Sans"/>
-                <a:ea typeface="Plus Jakarta Sans"/>
-                <a:cs typeface="Plus Jakarta Sans"/>
-                <a:sym typeface="Plus Jakarta Sans"/>
-              </a:rPr>
-              <a:t> Cálculo de rotación y proyección de quiebres futuros.</a:t>
-            </a:r>
-            <a:endParaRPr b="0" i="0" sz="1400" u="none" cap="none" strike="noStrike">
-              <a:solidFill>
-                <a:srgbClr val="000000"/>
-              </a:solidFill>
-              <a:latin typeface="Arial"/>
-              <a:ea typeface="Arial"/>
-              <a:cs typeface="Arial"/>
-              <a:sym typeface="Arial"/>
-            </a:endParaRPr>
-          </a:p>
-        </p:txBody>
-      </p:sp>
-      <p:sp>
-        <p:nvSpPr>
-          <p:cNvPr id="267" name="Google Shape;267;p11"/>
-          <p:cNvSpPr txBox="1"/>
-          <p:nvPr/>
-        </p:nvSpPr>
-        <p:spPr>
-          <a:xfrm>
-            <a:off x="1009650" y="4023270"/>
-            <a:ext cx="10601325" cy="274290"/>
-          </a:xfrm>
-          <a:prstGeom prst="rect">
-            <a:avLst/>
-          </a:prstGeom>
-          <a:noFill/>
-          <a:ln>
-            <a:noFill/>
-          </a:ln>
-        </p:spPr>
-        <p:txBody>
-          <a:bodyPr anchorCtr="0" anchor="t" bIns="0" lIns="0" spcFirstLastPara="1" rIns="0" wrap="square" tIns="0">
-            <a:spAutoFit/>
-          </a:bodyPr>
-          <a:lstStyle/>
-          <a:p>
-            <a:pPr indent="0" lvl="0" marL="0" marR="0" rtl="0" algn="l">
-              <a:lnSpc>
-                <a:spcPct val="160000"/>
-              </a:lnSpc>
-              <a:spcBef>
-                <a:spcPts val="0"/>
-              </a:spcBef>
-              <a:spcAft>
-                <a:spcPts val="0"/>
-              </a:spcAft>
-              <a:buClr>
-                <a:srgbClr val="000000"/>
-              </a:buClr>
-              <a:buSzPts val="1350"/>
-              <a:buFont typeface="Arial"/>
-              <a:buNone/>
-            </a:pPr>
-            <a:r>
-              <a:rPr b="1" i="0" lang="en-US" sz="1350" u="none" cap="none" strike="noStrike">
-                <a:solidFill>
-                  <a:srgbClr val="F8FAFC"/>
-                </a:solidFill>
-                <a:latin typeface="Plus Jakarta Sans"/>
-                <a:ea typeface="Plus Jakarta Sans"/>
-                <a:cs typeface="Plus Jakarta Sans"/>
-                <a:sym typeface="Plus Jakarta Sans"/>
-              </a:rPr>
-              <a:t>RF04 - Dashboard Administrativo:</a:t>
-            </a:r>
-            <a:r>
-              <a:rPr b="0" i="0" lang="en-US" sz="1350" u="none" cap="none" strike="noStrike">
-                <a:solidFill>
-                  <a:srgbClr val="94A3B8"/>
-                </a:solidFill>
-                <a:latin typeface="Plus Jakarta Sans"/>
-                <a:ea typeface="Plus Jakarta Sans"/>
-                <a:cs typeface="Plus Jakarta Sans"/>
-                <a:sym typeface="Plus Jakarta Sans"/>
-              </a:rPr>
-              <a:t> Reportes gráficos de ingresos, pares vendidos y stock mínimo.</a:t>
-            </a:r>
-            <a:endParaRPr b="0" i="0" sz="1400" u="none" cap="none" strike="noStrike">
-              <a:solidFill>
-                <a:srgbClr val="000000"/>
-              </a:solidFill>
-              <a:latin typeface="Arial"/>
-              <a:ea typeface="Arial"/>
-              <a:cs typeface="Arial"/>
-              <a:sym typeface="Arial"/>
-            </a:endParaRPr>
-          </a:p>
-        </p:txBody>
-      </p:sp>
-      <p:sp>
-        <p:nvSpPr>
-          <p:cNvPr id="268" name="Google Shape;268;p11"/>
-          <p:cNvSpPr txBox="1"/>
-          <p:nvPr/>
-        </p:nvSpPr>
-        <p:spPr>
-          <a:xfrm>
-            <a:off x="1009650" y="4488060"/>
-            <a:ext cx="10601325" cy="274290"/>
-          </a:xfrm>
-          <a:prstGeom prst="rect">
-            <a:avLst/>
-          </a:prstGeom>
-          <a:noFill/>
-          <a:ln>
-            <a:noFill/>
-          </a:ln>
-        </p:spPr>
-        <p:txBody>
-          <a:bodyPr anchorCtr="0" anchor="t" bIns="0" lIns="0" spcFirstLastPara="1" rIns="0" wrap="square" tIns="0">
-            <a:spAutoFit/>
-          </a:bodyPr>
-          <a:lstStyle/>
-          <a:p>
-            <a:pPr indent="0" lvl="0" marL="0" marR="0" rtl="0" algn="l">
-              <a:lnSpc>
-                <a:spcPct val="160000"/>
-              </a:lnSpc>
-              <a:spcBef>
-                <a:spcPts val="0"/>
-              </a:spcBef>
-              <a:spcAft>
-                <a:spcPts val="0"/>
-              </a:spcAft>
-              <a:buClr>
-                <a:srgbClr val="000000"/>
-              </a:buClr>
-              <a:buSzPts val="1350"/>
-              <a:buFont typeface="Arial"/>
-              <a:buNone/>
-            </a:pPr>
-            <a:r>
-              <a:rPr b="1" i="0" lang="en-US" sz="1350" u="none" cap="none" strike="noStrike">
-                <a:solidFill>
-                  <a:srgbClr val="F8FAFC"/>
-                </a:solidFill>
-                <a:latin typeface="Plus Jakarta Sans"/>
-                <a:ea typeface="Plus Jakarta Sans"/>
-                <a:cs typeface="Plus Jakarta Sans"/>
-                <a:sym typeface="Plus Jakarta Sans"/>
-              </a:rPr>
-              <a:t>RNF01 - Rendimiento y Seguridad:</a:t>
-            </a:r>
-            <a:r>
-              <a:rPr b="0" i="0" lang="en-US" sz="1350" u="none" cap="none" strike="noStrike">
-                <a:solidFill>
-                  <a:srgbClr val="94A3B8"/>
-                </a:solidFill>
-                <a:latin typeface="Plus Jakarta Sans"/>
-                <a:ea typeface="Plus Jakarta Sans"/>
-                <a:cs typeface="Plus Jakarta Sans"/>
-                <a:sym typeface="Plus Jakarta Sans"/>
-              </a:rPr>
-              <a:t> Respuestas en &lt; 2 segundos y cifrado de datos de usuario.</a:t>
-            </a:r>
-            <a:endParaRPr b="0" i="0" sz="1400" u="none" cap="none" strike="noStrike">
-              <a:solidFill>
-                <a:srgbClr val="000000"/>
-              </a:solidFill>
-              <a:latin typeface="Arial"/>
-              <a:ea typeface="Arial"/>
-              <a:cs typeface="Arial"/>
-              <a:sym typeface="Arial"/>
-            </a:endParaRPr>
-          </a:p>
-        </p:txBody>
-      </p:sp>
-      <p:pic>
-        <p:nvPicPr>
-          <p:cNvPr descr="image.png" id="269" name="Google Shape;269;p11"/>
-          <p:cNvPicPr preferRelativeResize="0"/>
-          <p:nvPr/>
-        </p:nvPicPr>
-        <p:blipFill rotWithShape="1">
-          <a:blip r:embed="rId4">
-            <a:alphaModFix/>
-          </a:blip>
-          <a:srcRect b="0" l="0" r="0" t="0"/>
-          <a:stretch/>
-        </p:blipFill>
-        <p:spPr>
-          <a:xfrm>
-            <a:off x="581025" y="2652712"/>
-            <a:ext cx="209550" cy="219075"/>
-          </a:xfrm>
-          <a:prstGeom prst="rect">
-            <a:avLst/>
-          </a:prstGeom>
-          <a:noFill/>
-          <a:ln>
-            <a:noFill/>
-          </a:ln>
-        </p:spPr>
-      </p:pic>
-      <p:pic>
-        <p:nvPicPr>
-          <p:cNvPr descr="image.png" id="270" name="Google Shape;270;p11"/>
-          <p:cNvPicPr preferRelativeResize="0"/>
-          <p:nvPr/>
-        </p:nvPicPr>
-        <p:blipFill rotWithShape="1">
-          <a:blip r:embed="rId5">
-            <a:alphaModFix/>
-          </a:blip>
-          <a:srcRect b="0" l="0" r="0" t="0"/>
-          <a:stretch/>
-        </p:blipFill>
-        <p:spPr>
-          <a:xfrm>
-            <a:off x="581025" y="3117502"/>
-            <a:ext cx="209550" cy="219075"/>
-          </a:xfrm>
-          <a:prstGeom prst="rect">
-            <a:avLst/>
-          </a:prstGeom>
-          <a:noFill/>
-          <a:ln>
-            <a:noFill/>
-          </a:ln>
-        </p:spPr>
-      </p:pic>
-      <p:pic>
-        <p:nvPicPr>
-          <p:cNvPr descr="image.png" id="271" name="Google Shape;271;p11"/>
-          <p:cNvPicPr preferRelativeResize="0"/>
-          <p:nvPr/>
-        </p:nvPicPr>
-        <p:blipFill rotWithShape="1">
-          <a:blip r:embed="rId6">
-            <a:alphaModFix/>
-          </a:blip>
-          <a:srcRect b="0" l="0" r="0" t="0"/>
-          <a:stretch/>
-        </p:blipFill>
-        <p:spPr>
-          <a:xfrm>
-            <a:off x="581025" y="3582292"/>
-            <a:ext cx="209550" cy="219075"/>
-          </a:xfrm>
-          <a:prstGeom prst="rect">
-            <a:avLst/>
-          </a:prstGeom>
-          <a:noFill/>
-          <a:ln>
-            <a:noFill/>
-          </a:ln>
-        </p:spPr>
-      </p:pic>
-      <p:pic>
-        <p:nvPicPr>
-          <p:cNvPr descr="image.png" id="272" name="Google Shape;272;p11"/>
-          <p:cNvPicPr preferRelativeResize="0"/>
-          <p:nvPr/>
-        </p:nvPicPr>
-        <p:blipFill rotWithShape="1">
-          <a:blip r:embed="rId7">
-            <a:alphaModFix/>
-          </a:blip>
-          <a:srcRect b="0" l="0" r="0" t="0"/>
-          <a:stretch/>
-        </p:blipFill>
-        <p:spPr>
-          <a:xfrm>
-            <a:off x="581025" y="4047083"/>
-            <a:ext cx="209550" cy="219075"/>
-          </a:xfrm>
-          <a:prstGeom prst="rect">
-            <a:avLst/>
-          </a:prstGeom>
-          <a:noFill/>
-          <a:ln>
-            <a:noFill/>
-          </a:ln>
-        </p:spPr>
-      </p:pic>
-      <p:pic>
-        <p:nvPicPr>
-          <p:cNvPr descr="image.png" id="273" name="Google Shape;273;p11"/>
-          <p:cNvPicPr preferRelativeResize="0"/>
-          <p:nvPr/>
-        </p:nvPicPr>
-        <p:blipFill rotWithShape="1">
-          <a:blip r:embed="rId8">
-            <a:alphaModFix/>
-          </a:blip>
-          <a:srcRect b="0" l="0" r="0" t="0"/>
-          <a:stretch/>
-        </p:blipFill>
-        <p:spPr>
-          <a:xfrm>
-            <a:off x="581025" y="4511873"/>
-            <a:ext cx="209550" cy="219075"/>
-          </a:xfrm>
-          <a:prstGeom prst="rect">
-            <a:avLst/>
-          </a:prstGeom>
-          <a:noFill/>
-          <a:ln>
-            <a:noFill/>
-          </a:ln>
-        </p:spPr>
-      </p:pic>
-      <p:sp>
-        <p:nvSpPr>
-          <p:cNvPr id="274" name="Google Shape;274;p11"/>
-          <p:cNvSpPr txBox="1"/>
-          <p:nvPr/>
-        </p:nvSpPr>
-        <p:spPr>
-          <a:xfrm>
-            <a:off x="581025" y="485775"/>
-            <a:ext cx="11581447" cy="438150"/>
-          </a:xfrm>
-          <a:prstGeom prst="rect">
-            <a:avLst/>
-          </a:prstGeom>
-          <a:noFill/>
-          <a:ln>
-            <a:noFill/>
-          </a:ln>
-        </p:spPr>
-        <p:txBody>
-          <a:bodyPr anchorCtr="0" anchor="ctr" bIns="0" lIns="0" spcFirstLastPara="1" rIns="0" wrap="square" tIns="0">
-            <a:spAutoFit/>
-          </a:bodyPr>
-          <a:lstStyle/>
-          <a:p>
-            <a:pPr indent="0" lvl="0" marL="0" marR="0" rtl="0" algn="l">
-              <a:lnSpc>
-                <a:spcPct val="100000"/>
-              </a:lnSpc>
-              <a:spcBef>
-                <a:spcPts val="0"/>
-              </a:spcBef>
-              <a:spcAft>
-                <a:spcPts val="0"/>
-              </a:spcAft>
-              <a:buClr>
-                <a:srgbClr val="000000"/>
-              </a:buClr>
-              <a:buSzPts val="2700"/>
-              <a:buFont typeface="Arial"/>
-              <a:buNone/>
-            </a:pPr>
-            <a:r>
-              <a:rPr b="1" i="0" lang="en-US" sz="2700" u="none" cap="none" strike="noStrike">
-                <a:solidFill>
-                  <a:srgbClr val="F8FAFC"/>
-                </a:solidFill>
-                <a:latin typeface="Space Grotesk"/>
-                <a:ea typeface="Space Grotesk"/>
-                <a:cs typeface="Space Grotesk"/>
-                <a:sym typeface="Space Grotesk"/>
-              </a:rPr>
-              <a:t>Lista de Requerimientos</a:t>
-            </a:r>
-            <a:endParaRPr b="0" i="0" sz="1400" u="none" cap="none" strike="noStrike">
-              <a:solidFill>
-                <a:srgbClr val="000000"/>
-              </a:solidFill>
-              <a:latin typeface="Arial"/>
-              <a:ea typeface="Arial"/>
-              <a:cs typeface="Arial"/>
-              <a:sym typeface="Arial"/>
-            </a:endParaRPr>
-          </a:p>
-        </p:txBody>
-      </p:sp>
-      <p:sp>
-        <p:nvSpPr>
-          <p:cNvPr id="275" name="Google Shape;275;p11"/>
+          <p:cNvPr id="264" name="Google Shape;264;p11"/>
           <p:cNvSpPr/>
           <p:nvPr/>
         </p:nvSpPr>
@@ -17779,6 +17463,62 @@
           </a:p>
         </p:txBody>
       </p:sp>
+      <p:pic>
+        <p:nvPicPr>
+          <p:cNvPr id="265" name="Google Shape;265;p11"/>
+          <p:cNvPicPr preferRelativeResize="0"/>
+          <p:nvPr/>
+        </p:nvPicPr>
+        <p:blipFill>
+          <a:blip r:embed="rId3">
+            <a:alphaModFix/>
+          </a:blip>
+          <a:stretch>
+            <a:fillRect/>
+          </a:stretch>
+        </p:blipFill>
+        <p:spPr>
+          <a:xfrm>
+            <a:off x="84000" y="993200"/>
+            <a:ext cx="7362794" cy="5629275"/>
+          </a:xfrm>
+          <a:prstGeom prst="rect">
+            <a:avLst/>
+          </a:prstGeom>
+          <a:noFill/>
+          <a:ln>
+            <a:noFill/>
+          </a:ln>
+        </p:spPr>
+      </p:pic>
+      <p:pic>
+        <p:nvPicPr>
+          <p:cNvPr id="266" name="Google Shape;266;p11"/>
+          <p:cNvPicPr preferRelativeResize="0"/>
+          <p:nvPr/>
+        </p:nvPicPr>
+        <p:blipFill>
+          <a:blip r:embed="rId4">
+            <a:alphaModFix/>
+          </a:blip>
+          <a:stretch>
+            <a:fillRect/>
+          </a:stretch>
+        </p:blipFill>
+        <p:spPr>
+          <a:xfrm>
+            <a:off x="7599194" y="1076325"/>
+            <a:ext cx="4440407" cy="2660833"/>
+          </a:xfrm>
+          <a:prstGeom prst="rect">
+            <a:avLst/>
+          </a:prstGeom>
+          <a:noFill/>
+          <a:ln>
+            <a:noFill/>
+          </a:ln>
+        </p:spPr>
+      </p:pic>
     </p:spTree>
   </p:cSld>
   <p:clrMapOvr>
@@ -17799,7 +17539,7 @@
     </p:bg>
     <p:spTree>
       <p:nvGrpSpPr>
-        <p:cNvPr id="279" name="Shape 279"/>
+        <p:cNvPr id="270" name="Shape 270"/>
         <p:cNvGrpSpPr/>
         <p:nvPr/>
       </p:nvGrpSpPr>
@@ -17813,7 +17553,7 @@
       </p:grpSpPr>
       <p:pic>
         <p:nvPicPr>
-          <p:cNvPr descr="image.png" id="280" name="Google Shape;280;p12"/>
+          <p:cNvPr descr="image.png" id="271" name="Google Shape;271;p12"/>
           <p:cNvPicPr preferRelativeResize="0"/>
           <p:nvPr/>
         </p:nvPicPr>
@@ -17838,36 +17578,9 @@
           </a:ln>
         </p:spPr>
       </p:pic>
-      <p:pic>
-        <p:nvPicPr>
-          <p:cNvPr descr="image.png" id="281" name="Google Shape;281;p12"/>
-          <p:cNvPicPr preferRelativeResize="0"/>
-          <p:nvPr/>
-        </p:nvPicPr>
-        <p:blipFill rotWithShape="1">
-          <a:blip r:embed="rId4">
-            <a:alphaModFix/>
-          </a:blip>
-          <a:srcRect b="0" l="0" r="0" t="0"/>
-          <a:stretch/>
-        </p:blipFill>
-        <p:spPr>
-          <a:xfrm>
-            <a:off x="6262687" y="1981200"/>
-            <a:ext cx="5348287" cy="3619500"/>
-          </a:xfrm>
-          <a:prstGeom prst="rect">
-            <a:avLst/>
-          </a:prstGeom>
-          <a:noFill/>
-          <a:ln>
-            <a:noFill/>
-          </a:ln>
-        </p:spPr>
-      </p:pic>
       <p:sp>
         <p:nvSpPr>
-          <p:cNvPr id="282" name="Google Shape;282;p12"/>
+          <p:cNvPr id="272" name="Google Shape;272;p12"/>
           <p:cNvSpPr txBox="1"/>
           <p:nvPr/>
         </p:nvSpPr>
@@ -17933,7 +17646,7 @@
       </p:sp>
       <p:sp>
         <p:nvSpPr>
-          <p:cNvPr id="283" name="Google Shape;283;p12"/>
+          <p:cNvPr id="273" name="Google Shape;273;p12"/>
           <p:cNvSpPr txBox="1"/>
           <p:nvPr/>
         </p:nvSpPr>
@@ -18011,7 +17724,7 @@
       </p:sp>
       <p:sp>
         <p:nvSpPr>
-          <p:cNvPr id="284" name="Google Shape;284;p12"/>
+          <p:cNvPr id="274" name="Google Shape;274;p12"/>
           <p:cNvSpPr txBox="1"/>
           <p:nvPr/>
         </p:nvSpPr>
@@ -18098,99 +17811,6 @@
                 <a:sym typeface="Plus Jakarta Sans"/>
               </a:rPr>
               <a:t>) para prevenir la pérdida de ventas.</a:t>
-            </a:r>
-            <a:endParaRPr b="0" i="0" sz="1400" u="none" cap="none" strike="noStrike">
-              <a:solidFill>
-                <a:srgbClr val="000000"/>
-              </a:solidFill>
-              <a:latin typeface="Arial"/>
-              <a:ea typeface="Arial"/>
-              <a:cs typeface="Arial"/>
-              <a:sym typeface="Arial"/>
-            </a:endParaRPr>
-          </a:p>
-        </p:txBody>
-      </p:sp>
-      <p:pic>
-        <p:nvPicPr>
-          <p:cNvPr descr="image.png" id="285" name="Google Shape;285;p12"/>
-          <p:cNvPicPr preferRelativeResize="0"/>
-          <p:nvPr/>
-        </p:nvPicPr>
-        <p:blipFill rotWithShape="1">
-          <a:blip r:embed="rId5">
-            <a:alphaModFix/>
-          </a:blip>
-          <a:srcRect b="0" l="0" r="0" t="0"/>
-          <a:stretch/>
-        </p:blipFill>
-        <p:spPr>
-          <a:xfrm>
-            <a:off x="6272212" y="1990725"/>
-            <a:ext cx="5329237" cy="3600450"/>
-          </a:xfrm>
-          <a:prstGeom prst="rect">
-            <a:avLst/>
-          </a:prstGeom>
-          <a:noFill/>
-          <a:ln>
-            <a:noFill/>
-          </a:ln>
-        </p:spPr>
-      </p:pic>
-      <p:sp>
-        <p:nvSpPr>
-          <p:cNvPr id="286" name="Google Shape;286;p12"/>
-          <p:cNvSpPr txBox="1"/>
-          <p:nvPr/>
-        </p:nvSpPr>
-        <p:spPr>
-          <a:xfrm>
-            <a:off x="581025" y="485775"/>
-            <a:ext cx="11581447" cy="438150"/>
-          </a:xfrm>
-          <a:prstGeom prst="rect">
-            <a:avLst/>
-          </a:prstGeom>
-          <a:noFill/>
-          <a:ln>
-            <a:noFill/>
-          </a:ln>
-        </p:spPr>
-        <p:txBody>
-          <a:bodyPr anchorCtr="0" anchor="ctr" bIns="0" lIns="0" spcFirstLastPara="1" rIns="0" wrap="square" tIns="0">
-            <a:spAutoFit/>
-          </a:bodyPr>
-          <a:lstStyle/>
-          <a:p>
-            <a:pPr indent="0" lvl="0" marL="0" marR="0" rtl="0" algn="l">
-              <a:lnSpc>
-                <a:spcPct val="100000"/>
-              </a:lnSpc>
-              <a:spcBef>
-                <a:spcPts val="0"/>
-              </a:spcBef>
-              <a:spcAft>
-                <a:spcPts val="0"/>
-              </a:spcAft>
-              <a:buClr>
-                <a:srgbClr val="000000"/>
-              </a:buClr>
-              <a:buSzPts val="2700"/>
-              <a:buFont typeface="Arial"/>
-              <a:buNone/>
-            </a:pPr>
-            <a:r>
-              <a:rPr b="1" i="0" lang="en-US" sz="2700" u="none" cap="none" strike="noStrike">
-                <a:solidFill>
-                  <a:srgbClr val="F8FAFC"/>
-                </a:solidFill>
-                <a:latin typeface="Space Grotesk"/>
-                <a:ea typeface="Space Grotesk"/>
-                <a:cs typeface="Space Grotesk"/>
-                <a:sym typeface="Space Grotesk"/>
-              </a:rPr>
-              <a:t>Mockups del Sistema</a:t>
             </a:r>
             <a:endParaRPr b="0" i="0" sz="1400" u="none" cap="none" strike="noStrike">
               <a:solidFill>
@@ -18206,7 +17826,73 @@
       </p:sp>
       <p:sp>
         <p:nvSpPr>
-          <p:cNvPr id="287" name="Google Shape;287;p12"/>
+          <p:cNvPr id="275" name="Google Shape;275;p12"/>
+          <p:cNvSpPr txBox="1"/>
+          <p:nvPr/>
+        </p:nvSpPr>
+        <p:spPr>
+          <a:xfrm>
+            <a:off x="581025" y="485775"/>
+            <a:ext cx="11581447" cy="438150"/>
+          </a:xfrm>
+          <a:prstGeom prst="rect">
+            <a:avLst/>
+          </a:prstGeom>
+          <a:noFill/>
+          <a:ln>
+            <a:noFill/>
+          </a:ln>
+        </p:spPr>
+        <p:txBody>
+          <a:bodyPr anchorCtr="0" anchor="ctr" bIns="0" lIns="0" spcFirstLastPara="1" rIns="0" wrap="square" tIns="0">
+            <a:spAutoFit/>
+          </a:bodyPr>
+          <a:lstStyle/>
+          <a:p>
+            <a:pPr indent="0" lvl="0" marL="0" marR="0" rtl="0" algn="l">
+              <a:lnSpc>
+                <a:spcPct val="100000"/>
+              </a:lnSpc>
+              <a:spcBef>
+                <a:spcPts val="0"/>
+              </a:spcBef>
+              <a:spcAft>
+                <a:spcPts val="0"/>
+              </a:spcAft>
+              <a:buClr>
+                <a:srgbClr val="000000"/>
+              </a:buClr>
+              <a:buSzPts val="2700"/>
+              <a:buFont typeface="Arial"/>
+              <a:buNone/>
+            </a:pPr>
+            <a:r>
+              <a:rPr b="1" i="0" lang="en-US" sz="2700" u="none" cap="none" strike="noStrike">
+                <a:solidFill>
+                  <a:srgbClr val="F8FAFC"/>
+                </a:solidFill>
+                <a:latin typeface="Space Grotesk"/>
+                <a:ea typeface="Space Grotesk"/>
+                <a:cs typeface="Space Grotesk"/>
+                <a:sym typeface="Space Grotesk"/>
+              </a:rPr>
+              <a:t>Mockups del Sistema</a:t>
+            </a:r>
+            <a:endParaRPr b="0" i="0" sz="1400" u="none" cap="none" strike="noStrike">
+              <a:solidFill>
+                <a:srgbClr val="000000"/>
+              </a:solidFill>
+              <a:latin typeface="Arial"/>
+              <a:ea typeface="Arial"/>
+              <a:cs typeface="Arial"/>
+              <a:sym typeface="Arial"/>
+            </a:endParaRPr>
+          </a:p>
+        </p:txBody>
+      </p:sp>
+      <p:sp>
+        <p:nvSpPr>
+          <p:cNvPr id="276" name="Google Shape;276;p12"/>
           <p:cNvSpPr/>
           <p:nvPr/>
         </p:nvSpPr>
@@ -18283,7 +17969,251 @@
     </p:bg>
     <p:spTree>
       <p:nvGrpSpPr>
-        <p:cNvPr id="291" name="Shape 291"/>
+        <p:cNvPr id="280" name="Shape 280"/>
+        <p:cNvGrpSpPr/>
+        <p:nvPr/>
+      </p:nvGrpSpPr>
+      <p:grpSpPr>
+        <a:xfrm>
+          <a:off x="0" y="0"/>
+          <a:ext cx="0" cy="0"/>
+          <a:chOff x="0" y="0"/>
+          <a:chExt cx="0" cy="0"/>
+        </a:xfrm>
+      </p:grpSpPr>
+      <p:sp>
+        <p:nvSpPr>
+          <p:cNvPr id="281" name="Google Shape;281;g3fa48b68155_1_3"/>
+          <p:cNvSpPr txBox="1"/>
+          <p:nvPr/>
+        </p:nvSpPr>
+        <p:spPr>
+          <a:xfrm>
+            <a:off x="581025" y="485775"/>
+            <a:ext cx="11581500" cy="954300"/>
+          </a:xfrm>
+          <a:prstGeom prst="rect">
+            <a:avLst/>
+          </a:prstGeom>
+          <a:noFill/>
+          <a:ln>
+            <a:noFill/>
+          </a:ln>
+        </p:spPr>
+        <p:txBody>
+          <a:bodyPr anchorCtr="0" anchor="ctr" bIns="0" lIns="0" spcFirstLastPara="1" rIns="0" wrap="square" tIns="0">
+            <a:spAutoFit/>
+          </a:bodyPr>
+          <a:lstStyle/>
+          <a:p>
+            <a:pPr indent="0" lvl="0" marL="0" marR="0" rtl="0" algn="l">
+              <a:lnSpc>
+                <a:spcPct val="100000"/>
+              </a:lnSpc>
+              <a:spcBef>
+                <a:spcPts val="0"/>
+              </a:spcBef>
+              <a:spcAft>
+                <a:spcPts val="0"/>
+              </a:spcAft>
+              <a:buClr>
+                <a:srgbClr val="000000"/>
+              </a:buClr>
+              <a:buSzPts val="2700"/>
+              <a:buFont typeface="Arial"/>
+              <a:buNone/>
+            </a:pPr>
+            <a:r>
+              <a:rPr b="1" lang="en-US" sz="3100">
+                <a:solidFill>
+                  <a:srgbClr val="F8FAFC"/>
+                </a:solidFill>
+                <a:latin typeface="Space Grotesk"/>
+                <a:ea typeface="Space Grotesk"/>
+                <a:cs typeface="Space Grotesk"/>
+                <a:sym typeface="Space Grotesk"/>
+              </a:rPr>
+              <a:t>Mockups</a:t>
+            </a:r>
+            <a:endParaRPr b="1" sz="3100">
+              <a:solidFill>
+                <a:srgbClr val="F8FAFC"/>
+              </a:solidFill>
+              <a:latin typeface="Space Grotesk"/>
+              <a:ea typeface="Space Grotesk"/>
+              <a:cs typeface="Space Grotesk"/>
+              <a:sym typeface="Space Grotesk"/>
+            </a:endParaRPr>
+          </a:p>
+          <a:p>
+            <a:pPr indent="0" lvl="0" marL="0" marR="0" rtl="0" algn="l">
+              <a:lnSpc>
+                <a:spcPct val="100000"/>
+              </a:lnSpc>
+              <a:spcBef>
+                <a:spcPts val="0"/>
+              </a:spcBef>
+              <a:spcAft>
+                <a:spcPts val="0"/>
+              </a:spcAft>
+              <a:buClr>
+                <a:srgbClr val="000000"/>
+              </a:buClr>
+              <a:buSzPts val="2700"/>
+              <a:buFont typeface="Arial"/>
+              <a:buNone/>
+            </a:pPr>
+            <a:r>
+              <a:t/>
+            </a:r>
+            <a:endParaRPr b="1" sz="3100">
+              <a:solidFill>
+                <a:srgbClr val="F8FAFC"/>
+              </a:solidFill>
+              <a:latin typeface="Space Grotesk"/>
+              <a:ea typeface="Space Grotesk"/>
+              <a:cs typeface="Space Grotesk"/>
+              <a:sym typeface="Space Grotesk"/>
+            </a:endParaRPr>
+          </a:p>
+        </p:txBody>
+      </p:sp>
+      <p:sp>
+        <p:nvSpPr>
+          <p:cNvPr id="282" name="Google Shape;282;g3fa48b68155_1_3"/>
+          <p:cNvSpPr/>
+          <p:nvPr/>
+        </p:nvSpPr>
+        <p:spPr>
+          <a:xfrm>
+            <a:off x="581025" y="923925"/>
+            <a:ext cx="57300" cy="304800"/>
+          </a:xfrm>
+          <a:prstGeom prst="roundRect">
+            <a:avLst>
+              <a:gd fmla="val 50000" name="adj"/>
+            </a:avLst>
+          </a:prstGeom>
+          <a:noFill/>
+          <a:ln>
+            <a:noFill/>
+          </a:ln>
+        </p:spPr>
+        <p:txBody>
+          <a:bodyPr anchorCtr="0" anchor="ctr" bIns="45700" lIns="91425" spcFirstLastPara="1" rIns="91425" wrap="square" tIns="45700">
+            <a:noAutofit/>
+          </a:bodyPr>
+          <a:lstStyle/>
+          <a:p>
+            <a:pPr indent="0" lvl="0" marL="0" marR="0" rtl="0" algn="ctr">
+              <a:lnSpc>
+                <a:spcPct val="100000"/>
+              </a:lnSpc>
+              <a:spcBef>
+                <a:spcPts val="0"/>
+              </a:spcBef>
+              <a:spcAft>
+                <a:spcPts val="0"/>
+              </a:spcAft>
+              <a:buClr>
+                <a:srgbClr val="000000"/>
+              </a:buClr>
+              <a:buSzPts val="1800"/>
+              <a:buFont typeface="Arial"/>
+              <a:buNone/>
+            </a:pPr>
+            <a:r>
+              <a:t/>
+            </a:r>
+            <a:endParaRPr b="0" i="0" sz="1800" u="none" cap="none" strike="noStrike">
+              <a:solidFill>
+                <a:schemeClr val="dk1"/>
+              </a:solidFill>
+              <a:latin typeface="Calibri"/>
+              <a:ea typeface="Calibri"/>
+              <a:cs typeface="Calibri"/>
+              <a:sym typeface="Calibri"/>
+            </a:endParaRPr>
+          </a:p>
+        </p:txBody>
+      </p:sp>
+      <p:pic>
+        <p:nvPicPr>
+          <p:cNvPr id="283" name="Google Shape;283;g3fa48b68155_1_3"/>
+          <p:cNvPicPr preferRelativeResize="0"/>
+          <p:nvPr/>
+        </p:nvPicPr>
+        <p:blipFill>
+          <a:blip r:embed="rId3">
+            <a:alphaModFix/>
+          </a:blip>
+          <a:stretch>
+            <a:fillRect/>
+          </a:stretch>
+        </p:blipFill>
+        <p:spPr>
+          <a:xfrm>
+            <a:off x="241975" y="1228725"/>
+            <a:ext cx="4767936" cy="5113126"/>
+          </a:xfrm>
+          <a:prstGeom prst="rect">
+            <a:avLst/>
+          </a:prstGeom>
+          <a:noFill/>
+          <a:ln>
+            <a:noFill/>
+          </a:ln>
+        </p:spPr>
+      </p:pic>
+      <p:pic>
+        <p:nvPicPr>
+          <p:cNvPr id="284" name="Google Shape;284;g3fa48b68155_1_3"/>
+          <p:cNvPicPr preferRelativeResize="0"/>
+          <p:nvPr/>
+        </p:nvPicPr>
+        <p:blipFill>
+          <a:blip r:embed="rId4">
+            <a:alphaModFix/>
+          </a:blip>
+          <a:stretch>
+            <a:fillRect/>
+          </a:stretch>
+        </p:blipFill>
+        <p:spPr>
+          <a:xfrm>
+            <a:off x="5241936" y="1353575"/>
+            <a:ext cx="6096006" cy="5113125"/>
+          </a:xfrm>
+          <a:prstGeom prst="rect">
+            <a:avLst/>
+          </a:prstGeom>
+          <a:noFill/>
+          <a:ln>
+            <a:noFill/>
+          </a:ln>
+        </p:spPr>
+      </p:pic>
+    </p:spTree>
+  </p:cSld>
+  <p:clrMapOvr>
+    <a:masterClrMapping/>
+  </p:clrMapOvr>
+</p:sld>
+</file>
+
+<file path=ppt/slides/slide14.xml><?xml version="1.0" encoding="utf-8"?>
+<p:sld xmlns:a="http://schemas.openxmlformats.org/drawingml/2006/main" xmlns:r="http://schemas.openxmlformats.org/officeDocument/2006/relationships" xmlns:mc="http://schemas.openxmlformats.org/markup-compatibility/2006" xmlns:mv="urn:schemas-microsoft-com:mac:vml" xmlns:p="http://schemas.openxmlformats.org/presentationml/2006/main" xmlns:c="http://schemas.openxmlformats.org/drawingml/2006/chart" xmlns:dgm="http://schemas.openxmlformats.org/drawingml/2006/diagram" xmlns:o="urn:schemas-microsoft-com:office:office" xmlns:v="urn:schemas-microsoft-com:vml" xmlns:pvml="urn:schemas-microsoft-com:office:powerpoint" xmlns:com="http://schemas.openxmlformats.org/drawingml/2006/compatibility" xmlns:p14="http://schemas.microsoft.com/office/powerpoint/2010/main" xmlns:p15="http://schemas.microsoft.com/office/powerpoint/2012/main" xmlns:ahyp="http://schemas.microsoft.com/office/drawing/2018/hyperlinkcolor">
+  <p:cSld>
+    <p:bg>
+      <p:bgPr>
+        <a:solidFill>
+          <a:srgbClr val="0F172A"/>
+        </a:solidFill>
+      </p:bgPr>
+    </p:bg>
+    <p:spTree>
+      <p:nvGrpSpPr>
+        <p:cNvPr id="288" name="Shape 288"/>
         <p:cNvGrpSpPr/>
         <p:nvPr/>
       </p:nvGrpSpPr>
@@ -18297,7 +18227,7 @@
       </p:grpSpPr>
       <p:pic>
         <p:nvPicPr>
-          <p:cNvPr descr="image.png" id="292" name="Google Shape;292;p13"/>
+          <p:cNvPr descr="image.png" id="289" name="Google Shape;289;p13"/>
           <p:cNvPicPr preferRelativeResize="0"/>
           <p:nvPr/>
         </p:nvPicPr>
@@ -18310,7 +18240,7 @@
         </p:blipFill>
         <p:spPr>
           <a:xfrm>
-            <a:off x="0" y="0"/>
+            <a:off x="0" y="10391"/>
             <a:ext cx="12192000" cy="6858000"/>
           </a:xfrm>
           <a:prstGeom prst="rect">
@@ -18324,7 +18254,7 @@
       </p:pic>
       <p:graphicFrame>
         <p:nvGraphicFramePr>
-          <p:cNvPr id="293" name="Google Shape;293;p13"/>
+          <p:cNvPr id="290" name="Google Shape;290;p13"/>
           <p:cNvGraphicFramePr/>
           <p:nvPr/>
         </p:nvGraphicFramePr>
@@ -18337,7 +18267,7 @@
             <a:tbl>
               <a:tblPr bandRow="1" firstRow="1">
                 <a:noFill/>
-                <a:tableStyleId>{FE92B86E-E1B8-46CD-B875-A73837D21097}</a:tableStyleId>
+                <a:tableStyleId>{5B575228-F79E-496A-A8C0-7297307BC0E4}</a:tableStyleId>
               </a:tblPr>
               <a:tblGrid>
                 <a:gridCol w="6495300"/>
@@ -19972,7 +19902,7 @@
       </p:graphicFrame>
       <p:sp>
         <p:nvSpPr>
-          <p:cNvPr id="294" name="Google Shape;294;p13"/>
+          <p:cNvPr id="291" name="Google Shape;291;p13"/>
           <p:cNvSpPr/>
           <p:nvPr/>
         </p:nvSpPr>
@@ -19986,6 +19916,183 @@
           </a:prstGeom>
           <a:solidFill>
             <a:srgbClr val="334155"/>
+          </a:solidFill>
+          <a:ln>
+            <a:noFill/>
+          </a:ln>
+        </p:spPr>
+        <p:txBody>
+          <a:bodyPr anchorCtr="0" anchor="ctr" bIns="45700" lIns="91425" spcFirstLastPara="1" rIns="91425" wrap="square" tIns="45700">
+            <a:noAutofit/>
+          </a:bodyPr>
+          <a:lstStyle/>
+          <a:p>
+            <a:pPr indent="0" lvl="0" marL="0" marR="0" rtl="0" algn="ctr">
+              <a:lnSpc>
+                <a:spcPct val="100000"/>
+              </a:lnSpc>
+              <a:spcBef>
+                <a:spcPts val="0"/>
+              </a:spcBef>
+              <a:spcAft>
+                <a:spcPts val="0"/>
+              </a:spcAft>
+              <a:buClr>
+                <a:srgbClr val="000000"/>
+              </a:buClr>
+              <a:buSzPts val="1800"/>
+              <a:buFont typeface="Arial"/>
+              <a:buNone/>
+            </a:pPr>
+            <a:r>
+              <a:t/>
+            </a:r>
+            <a:endParaRPr b="0" i="0" sz="1800" u="none" cap="none" strike="noStrike">
+              <a:solidFill>
+                <a:schemeClr val="dk1"/>
+              </a:solidFill>
+              <a:latin typeface="Calibri"/>
+              <a:ea typeface="Calibri"/>
+              <a:cs typeface="Calibri"/>
+              <a:sym typeface="Calibri"/>
+            </a:endParaRPr>
+          </a:p>
+        </p:txBody>
+      </p:sp>
+      <p:sp>
+        <p:nvSpPr>
+          <p:cNvPr id="292" name="Google Shape;292;p13"/>
+          <p:cNvSpPr/>
+          <p:nvPr/>
+        </p:nvSpPr>
+        <p:spPr>
+          <a:xfrm>
+            <a:off x="7085855" y="2634853"/>
+            <a:ext cx="1328886" cy="19050"/>
+          </a:xfrm>
+          <a:prstGeom prst="rect">
+            <a:avLst/>
+          </a:prstGeom>
+          <a:solidFill>
+            <a:srgbClr val="334155"/>
+          </a:solidFill>
+          <a:ln>
+            <a:noFill/>
+          </a:ln>
+        </p:spPr>
+        <p:txBody>
+          <a:bodyPr anchorCtr="0" anchor="ctr" bIns="45700" lIns="91425" spcFirstLastPara="1" rIns="91425" wrap="square" tIns="45700">
+            <a:noAutofit/>
+          </a:bodyPr>
+          <a:lstStyle/>
+          <a:p>
+            <a:pPr indent="0" lvl="0" marL="0" marR="0" rtl="0" algn="ctr">
+              <a:lnSpc>
+                <a:spcPct val="100000"/>
+              </a:lnSpc>
+              <a:spcBef>
+                <a:spcPts val="0"/>
+              </a:spcBef>
+              <a:spcAft>
+                <a:spcPts val="0"/>
+              </a:spcAft>
+              <a:buClr>
+                <a:srgbClr val="000000"/>
+              </a:buClr>
+              <a:buSzPts val="1800"/>
+              <a:buFont typeface="Arial"/>
+              <a:buNone/>
+            </a:pPr>
+            <a:r>
+              <a:t/>
+            </a:r>
+            <a:endParaRPr b="0" i="0" sz="1800" u="none" cap="none" strike="noStrike">
+              <a:solidFill>
+                <a:schemeClr val="dk1"/>
+              </a:solidFill>
+              <a:latin typeface="Calibri"/>
+              <a:ea typeface="Calibri"/>
+              <a:cs typeface="Calibri"/>
+              <a:sym typeface="Calibri"/>
+            </a:endParaRPr>
+          </a:p>
+        </p:txBody>
+      </p:sp>
+      <p:sp>
+        <p:nvSpPr>
+          <p:cNvPr id="293" name="Google Shape;293;p13"/>
+          <p:cNvSpPr/>
+          <p:nvPr/>
+        </p:nvSpPr>
+        <p:spPr>
+          <a:xfrm>
+            <a:off x="8414742" y="2634853"/>
+            <a:ext cx="3186707" cy="19050"/>
+          </a:xfrm>
+          <a:prstGeom prst="rect">
+            <a:avLst/>
+          </a:prstGeom>
+          <a:solidFill>
+            <a:srgbClr val="334155"/>
+          </a:solidFill>
+          <a:ln>
+            <a:noFill/>
+          </a:ln>
+        </p:spPr>
+        <p:txBody>
+          <a:bodyPr anchorCtr="0" anchor="ctr" bIns="45700" lIns="91425" spcFirstLastPara="1" rIns="91425" wrap="square" tIns="45700">
+            <a:noAutofit/>
+          </a:bodyPr>
+          <a:lstStyle/>
+          <a:p>
+            <a:pPr indent="0" lvl="0" marL="0" marR="0" rtl="0" algn="ctr">
+              <a:lnSpc>
+                <a:spcPct val="100000"/>
+              </a:lnSpc>
+              <a:spcBef>
+                <a:spcPts val="0"/>
+              </a:spcBef>
+              <a:spcAft>
+                <a:spcPts val="0"/>
+              </a:spcAft>
+              <a:buClr>
+                <a:srgbClr val="000000"/>
+              </a:buClr>
+              <a:buSzPts val="1800"/>
+              <a:buFont typeface="Arial"/>
+              <a:buNone/>
+            </a:pPr>
+            <a:r>
+              <a:t/>
+            </a:r>
+            <a:endParaRPr b="0" i="0" sz="1800" u="none" cap="none" strike="noStrike">
+              <a:solidFill>
+                <a:schemeClr val="dk1"/>
+              </a:solidFill>
+              <a:latin typeface="Calibri"/>
+              <a:ea typeface="Calibri"/>
+              <a:cs typeface="Calibri"/>
+              <a:sym typeface="Calibri"/>
+            </a:endParaRPr>
+          </a:p>
+        </p:txBody>
+      </p:sp>
+      <p:sp>
+        <p:nvSpPr>
+          <p:cNvPr id="294" name="Google Shape;294;p13"/>
+          <p:cNvSpPr/>
+          <p:nvPr/>
+        </p:nvSpPr>
+        <p:spPr>
+          <a:xfrm>
+            <a:off x="590550" y="3217664"/>
+            <a:ext cx="6495305" cy="9525"/>
+          </a:xfrm>
+          <a:prstGeom prst="rect">
+            <a:avLst/>
+          </a:prstGeom>
+          <a:solidFill>
+            <a:srgbClr val="1E293B"/>
           </a:solidFill>
           <a:ln>
             <a:noFill/>
@@ -20037,14 +20144,14 @@
         </p:nvSpPr>
         <p:spPr>
           <a:xfrm>
-            <a:off x="7085855" y="2634853"/>
-            <a:ext cx="1328886" cy="19050"/>
+            <a:off x="7085855" y="3217664"/>
+            <a:ext cx="1328886" cy="9525"/>
           </a:xfrm>
           <a:prstGeom prst="rect">
             <a:avLst/>
           </a:prstGeom>
           <a:solidFill>
-            <a:srgbClr val="334155"/>
+            <a:srgbClr val="1E293B"/>
           </a:solidFill>
           <a:ln>
             <a:noFill/>
@@ -20096,14 +20203,14 @@
         </p:nvSpPr>
         <p:spPr>
           <a:xfrm>
-            <a:off x="8414742" y="2634853"/>
-            <a:ext cx="3186707" cy="19050"/>
+            <a:off x="8414742" y="3217664"/>
+            <a:ext cx="3186707" cy="9525"/>
           </a:xfrm>
           <a:prstGeom prst="rect">
             <a:avLst/>
           </a:prstGeom>
           <a:solidFill>
-            <a:srgbClr val="334155"/>
+            <a:srgbClr val="1E293B"/>
           </a:solidFill>
           <a:ln>
             <a:noFill/>
@@ -20155,7 +20262,7 @@
         </p:nvSpPr>
         <p:spPr>
           <a:xfrm>
-            <a:off x="590550" y="3217664"/>
+            <a:off x="590550" y="3790950"/>
             <a:ext cx="6495305" cy="9525"/>
           </a:xfrm>
           <a:prstGeom prst="rect">
@@ -20214,7 +20321,7 @@
         </p:nvSpPr>
         <p:spPr>
           <a:xfrm>
-            <a:off x="7085855" y="3217664"/>
+            <a:off x="7085855" y="3790950"/>
             <a:ext cx="1328886" cy="9525"/>
           </a:xfrm>
           <a:prstGeom prst="rect">
@@ -20273,7 +20380,7 @@
         </p:nvSpPr>
         <p:spPr>
           <a:xfrm>
-            <a:off x="8414742" y="3217664"/>
+            <a:off x="8414742" y="3790950"/>
             <a:ext cx="3186707" cy="9525"/>
           </a:xfrm>
           <a:prstGeom prst="rect">
@@ -20332,7 +20439,7 @@
         </p:nvSpPr>
         <p:spPr>
           <a:xfrm>
-            <a:off x="590550" y="3790950"/>
+            <a:off x="590550" y="4364235"/>
             <a:ext cx="6495305" cy="9525"/>
           </a:xfrm>
           <a:prstGeom prst="rect">
@@ -20391,7 +20498,7 @@
         </p:nvSpPr>
         <p:spPr>
           <a:xfrm>
-            <a:off x="7085855" y="3790950"/>
+            <a:off x="7085855" y="4364235"/>
             <a:ext cx="1328886" cy="9525"/>
           </a:xfrm>
           <a:prstGeom prst="rect">
@@ -20450,7 +20557,7 @@
         </p:nvSpPr>
         <p:spPr>
           <a:xfrm>
-            <a:off x="8414742" y="3790950"/>
+            <a:off x="8414742" y="4364235"/>
             <a:ext cx="3186707" cy="9525"/>
           </a:xfrm>
           <a:prstGeom prst="rect">
@@ -20509,7 +20616,7 @@
         </p:nvSpPr>
         <p:spPr>
           <a:xfrm>
-            <a:off x="590550" y="4364235"/>
+            <a:off x="590550" y="4937521"/>
             <a:ext cx="6495305" cy="9525"/>
           </a:xfrm>
           <a:prstGeom prst="rect">
@@ -20568,7 +20675,7 @@
         </p:nvSpPr>
         <p:spPr>
           <a:xfrm>
-            <a:off x="7085855" y="4364235"/>
+            <a:off x="7085855" y="4937521"/>
             <a:ext cx="1328886" cy="9525"/>
           </a:xfrm>
           <a:prstGeom prst="rect">
@@ -20627,7 +20734,7 @@
         </p:nvSpPr>
         <p:spPr>
           <a:xfrm>
-            <a:off x="8414742" y="4364235"/>
+            <a:off x="8414742" y="4937521"/>
             <a:ext cx="3186707" cy="9525"/>
           </a:xfrm>
           <a:prstGeom prst="rect">
@@ -20681,183 +20788,6 @@
       <p:sp>
         <p:nvSpPr>
           <p:cNvPr id="306" name="Google Shape;306;p13"/>
-          <p:cNvSpPr/>
-          <p:nvPr/>
-        </p:nvSpPr>
-        <p:spPr>
-          <a:xfrm>
-            <a:off x="590550" y="4937521"/>
-            <a:ext cx="6495305" cy="9525"/>
-          </a:xfrm>
-          <a:prstGeom prst="rect">
-            <a:avLst/>
-          </a:prstGeom>
-          <a:solidFill>
-            <a:srgbClr val="1E293B"/>
-          </a:solidFill>
-          <a:ln>
-            <a:noFill/>
-          </a:ln>
-        </p:spPr>
-        <p:txBody>
-          <a:bodyPr anchorCtr="0" anchor="ctr" bIns="45700" lIns="91425" spcFirstLastPara="1" rIns="91425" wrap="square" tIns="45700">
-            <a:noAutofit/>
-          </a:bodyPr>
-          <a:lstStyle/>
-          <a:p>
-            <a:pPr indent="0" lvl="0" marL="0" marR="0" rtl="0" algn="ctr">
-              <a:lnSpc>
-                <a:spcPct val="100000"/>
-              </a:lnSpc>
-              <a:spcBef>
-                <a:spcPts val="0"/>
-              </a:spcBef>
-              <a:spcAft>
-                <a:spcPts val="0"/>
-              </a:spcAft>
-              <a:buClr>
-                <a:srgbClr val="000000"/>
-              </a:buClr>
-              <a:buSzPts val="1800"/>
-              <a:buFont typeface="Arial"/>
-              <a:buNone/>
-            </a:pPr>
-            <a:r>
-              <a:t/>
-            </a:r>
-            <a:endParaRPr b="0" i="0" sz="1800" u="none" cap="none" strike="noStrike">
-              <a:solidFill>
-                <a:schemeClr val="dk1"/>
-              </a:solidFill>
-              <a:latin typeface="Calibri"/>
-              <a:ea typeface="Calibri"/>
-              <a:cs typeface="Calibri"/>
-              <a:sym typeface="Calibri"/>
-            </a:endParaRPr>
-          </a:p>
-        </p:txBody>
-      </p:sp>
-      <p:sp>
-        <p:nvSpPr>
-          <p:cNvPr id="307" name="Google Shape;307;p13"/>
-          <p:cNvSpPr/>
-          <p:nvPr/>
-        </p:nvSpPr>
-        <p:spPr>
-          <a:xfrm>
-            <a:off x="7085855" y="4937521"/>
-            <a:ext cx="1328886" cy="9525"/>
-          </a:xfrm>
-          <a:prstGeom prst="rect">
-            <a:avLst/>
-          </a:prstGeom>
-          <a:solidFill>
-            <a:srgbClr val="1E293B"/>
-          </a:solidFill>
-          <a:ln>
-            <a:noFill/>
-          </a:ln>
-        </p:spPr>
-        <p:txBody>
-          <a:bodyPr anchorCtr="0" anchor="ctr" bIns="45700" lIns="91425" spcFirstLastPara="1" rIns="91425" wrap="square" tIns="45700">
-            <a:noAutofit/>
-          </a:bodyPr>
-          <a:lstStyle/>
-          <a:p>
-            <a:pPr indent="0" lvl="0" marL="0" marR="0" rtl="0" algn="ctr">
-              <a:lnSpc>
-                <a:spcPct val="100000"/>
-              </a:lnSpc>
-              <a:spcBef>
-                <a:spcPts val="0"/>
-              </a:spcBef>
-              <a:spcAft>
-                <a:spcPts val="0"/>
-              </a:spcAft>
-              <a:buClr>
-                <a:srgbClr val="000000"/>
-              </a:buClr>
-              <a:buSzPts val="1800"/>
-              <a:buFont typeface="Arial"/>
-              <a:buNone/>
-            </a:pPr>
-            <a:r>
-              <a:t/>
-            </a:r>
-            <a:endParaRPr b="0" i="0" sz="1800" u="none" cap="none" strike="noStrike">
-              <a:solidFill>
-                <a:schemeClr val="dk1"/>
-              </a:solidFill>
-              <a:latin typeface="Calibri"/>
-              <a:ea typeface="Calibri"/>
-              <a:cs typeface="Calibri"/>
-              <a:sym typeface="Calibri"/>
-            </a:endParaRPr>
-          </a:p>
-        </p:txBody>
-      </p:sp>
-      <p:sp>
-        <p:nvSpPr>
-          <p:cNvPr id="308" name="Google Shape;308;p13"/>
-          <p:cNvSpPr/>
-          <p:nvPr/>
-        </p:nvSpPr>
-        <p:spPr>
-          <a:xfrm>
-            <a:off x="8414742" y="4937521"/>
-            <a:ext cx="3186707" cy="9525"/>
-          </a:xfrm>
-          <a:prstGeom prst="rect">
-            <a:avLst/>
-          </a:prstGeom>
-          <a:solidFill>
-            <a:srgbClr val="1E293B"/>
-          </a:solidFill>
-          <a:ln>
-            <a:noFill/>
-          </a:ln>
-        </p:spPr>
-        <p:txBody>
-          <a:bodyPr anchorCtr="0" anchor="ctr" bIns="45700" lIns="91425" spcFirstLastPara="1" rIns="91425" wrap="square" tIns="45700">
-            <a:noAutofit/>
-          </a:bodyPr>
-          <a:lstStyle/>
-          <a:p>
-            <a:pPr indent="0" lvl="0" marL="0" marR="0" rtl="0" algn="ctr">
-              <a:lnSpc>
-                <a:spcPct val="100000"/>
-              </a:lnSpc>
-              <a:spcBef>
-                <a:spcPts val="0"/>
-              </a:spcBef>
-              <a:spcAft>
-                <a:spcPts val="0"/>
-              </a:spcAft>
-              <a:buClr>
-                <a:srgbClr val="000000"/>
-              </a:buClr>
-              <a:buSzPts val="1800"/>
-              <a:buFont typeface="Arial"/>
-              <a:buNone/>
-            </a:pPr>
-            <a:r>
-              <a:t/>
-            </a:r>
-            <a:endParaRPr b="0" i="0" sz="1800" u="none" cap="none" strike="noStrike">
-              <a:solidFill>
-                <a:schemeClr val="dk1"/>
-              </a:solidFill>
-              <a:latin typeface="Calibri"/>
-              <a:ea typeface="Calibri"/>
-              <a:cs typeface="Calibri"/>
-              <a:sym typeface="Calibri"/>
-            </a:endParaRPr>
-          </a:p>
-        </p:txBody>
-      </p:sp>
-      <p:sp>
-        <p:nvSpPr>
-          <p:cNvPr id="309" name="Google Shape;309;p13"/>
           <p:cNvSpPr txBox="1"/>
           <p:nvPr/>
         </p:nvSpPr>
@@ -20923,1043 +20853,7 @@
       </p:sp>
       <p:sp>
         <p:nvSpPr>
-          <p:cNvPr id="310" name="Google Shape;310;p13"/>
-          <p:cNvSpPr/>
-          <p:nvPr/>
-        </p:nvSpPr>
-        <p:spPr>
-          <a:xfrm>
-            <a:off x="581025" y="923925"/>
-            <a:ext cx="57150" cy="304800"/>
-          </a:xfrm>
-          <a:prstGeom prst="roundRect">
-            <a:avLst>
-              <a:gd fmla="val 50000" name="adj"/>
-            </a:avLst>
-          </a:prstGeom>
-          <a:noFill/>
-          <a:ln>
-            <a:noFill/>
-          </a:ln>
-        </p:spPr>
-        <p:txBody>
-          <a:bodyPr anchorCtr="0" anchor="ctr" bIns="45700" lIns="91425" spcFirstLastPara="1" rIns="91425" wrap="square" tIns="45700">
-            <a:noAutofit/>
-          </a:bodyPr>
-          <a:lstStyle/>
-          <a:p>
-            <a:pPr indent="0" lvl="0" marL="0" marR="0" rtl="0" algn="ctr">
-              <a:lnSpc>
-                <a:spcPct val="100000"/>
-              </a:lnSpc>
-              <a:spcBef>
-                <a:spcPts val="0"/>
-              </a:spcBef>
-              <a:spcAft>
-                <a:spcPts val="0"/>
-              </a:spcAft>
-              <a:buClr>
-                <a:srgbClr val="000000"/>
-              </a:buClr>
-              <a:buSzPts val="1800"/>
-              <a:buFont typeface="Arial"/>
-              <a:buNone/>
-            </a:pPr>
-            <a:r>
-              <a:t/>
-            </a:r>
-            <a:endParaRPr b="0" i="0" sz="1800" u="none" cap="none" strike="noStrike">
-              <a:solidFill>
-                <a:schemeClr val="dk1"/>
-              </a:solidFill>
-              <a:latin typeface="Calibri"/>
-              <a:ea typeface="Calibri"/>
-              <a:cs typeface="Calibri"/>
-              <a:sym typeface="Calibri"/>
-            </a:endParaRPr>
-          </a:p>
-        </p:txBody>
-      </p:sp>
-    </p:spTree>
-  </p:cSld>
-  <p:clrMapOvr>
-    <a:masterClrMapping/>
-  </p:clrMapOvr>
-</p:sld>
-</file>
-
-<file path=ppt/slides/slide14.xml><?xml version="1.0" encoding="utf-8"?>
-<p:sld xmlns:a="http://schemas.openxmlformats.org/drawingml/2006/main" xmlns:r="http://schemas.openxmlformats.org/officeDocument/2006/relationships" xmlns:mc="http://schemas.openxmlformats.org/markup-compatibility/2006" xmlns:mv="urn:schemas-microsoft-com:mac:vml" xmlns:p="http://schemas.openxmlformats.org/presentationml/2006/main" xmlns:c="http://schemas.openxmlformats.org/drawingml/2006/chart" xmlns:dgm="http://schemas.openxmlformats.org/drawingml/2006/diagram" xmlns:o="urn:schemas-microsoft-com:office:office" xmlns:v="urn:schemas-microsoft-com:vml" xmlns:pvml="urn:schemas-microsoft-com:office:powerpoint" xmlns:com="http://schemas.openxmlformats.org/drawingml/2006/compatibility" xmlns:p14="http://schemas.microsoft.com/office/powerpoint/2010/main" xmlns:p15="http://schemas.microsoft.com/office/powerpoint/2012/main" xmlns:ahyp="http://schemas.microsoft.com/office/drawing/2018/hyperlinkcolor">
-  <p:cSld>
-    <p:bg>
-      <p:bgPr>
-        <a:solidFill>
-          <a:srgbClr val="0F172A"/>
-        </a:solidFill>
-      </p:bgPr>
-    </p:bg>
-    <p:spTree>
-      <p:nvGrpSpPr>
-        <p:cNvPr id="314" name="Shape 314"/>
-        <p:cNvGrpSpPr/>
-        <p:nvPr/>
-      </p:nvGrpSpPr>
-      <p:grpSpPr>
-        <a:xfrm>
-          <a:off x="0" y="0"/>
-          <a:ext cx="0" cy="0"/>
-          <a:chOff x="0" y="0"/>
-          <a:chExt cx="0" cy="0"/>
-        </a:xfrm>
-      </p:grpSpPr>
-      <p:pic>
-        <p:nvPicPr>
-          <p:cNvPr descr="image.png" id="315" name="Google Shape;315;p14"/>
-          <p:cNvPicPr preferRelativeResize="0"/>
-          <p:nvPr/>
-        </p:nvPicPr>
-        <p:blipFill rotWithShape="1">
-          <a:blip r:embed="rId3">
-            <a:alphaModFix/>
-          </a:blip>
-          <a:srcRect b="0" l="0" r="0" t="0"/>
-          <a:stretch/>
-        </p:blipFill>
-        <p:spPr>
-          <a:xfrm>
-            <a:off x="0" y="0"/>
-            <a:ext cx="12192000" cy="6858000"/>
-          </a:xfrm>
-          <a:prstGeom prst="rect">
-            <a:avLst/>
-          </a:prstGeom>
-          <a:noFill/>
-          <a:ln>
-            <a:noFill/>
-          </a:ln>
-        </p:spPr>
-      </p:pic>
-      <p:pic>
-        <p:nvPicPr>
-          <p:cNvPr descr="image.png" id="316" name="Google Shape;316;p14"/>
-          <p:cNvPicPr preferRelativeResize="0"/>
-          <p:nvPr/>
-        </p:nvPicPr>
-        <p:blipFill rotWithShape="1">
-          <a:blip r:embed="rId4">
-            <a:alphaModFix/>
-          </a:blip>
-          <a:srcRect b="0" l="0" r="0" t="0"/>
-          <a:stretch/>
-        </p:blipFill>
-        <p:spPr>
-          <a:xfrm>
-            <a:off x="581025" y="2252960"/>
-            <a:ext cx="2578893" cy="3075979"/>
-          </a:xfrm>
-          <a:prstGeom prst="rect">
-            <a:avLst/>
-          </a:prstGeom>
-          <a:noFill/>
-          <a:ln>
-            <a:noFill/>
-          </a:ln>
-        </p:spPr>
-      </p:pic>
-      <p:pic>
-        <p:nvPicPr>
-          <p:cNvPr descr="image.png" id="317" name="Google Shape;317;p14"/>
-          <p:cNvPicPr preferRelativeResize="0"/>
-          <p:nvPr/>
-        </p:nvPicPr>
-        <p:blipFill rotWithShape="1">
-          <a:blip r:embed="rId5">
-            <a:alphaModFix/>
-          </a:blip>
-          <a:srcRect b="0" l="0" r="0" t="0"/>
-          <a:stretch/>
-        </p:blipFill>
-        <p:spPr>
-          <a:xfrm>
-            <a:off x="3398043" y="2252960"/>
-            <a:ext cx="2578893" cy="3075979"/>
-          </a:xfrm>
-          <a:prstGeom prst="rect">
-            <a:avLst/>
-          </a:prstGeom>
-          <a:noFill/>
-          <a:ln>
-            <a:noFill/>
-          </a:ln>
-        </p:spPr>
-      </p:pic>
-      <p:pic>
-        <p:nvPicPr>
-          <p:cNvPr descr="image.png" id="318" name="Google Shape;318;p14"/>
-          <p:cNvPicPr preferRelativeResize="0"/>
-          <p:nvPr/>
-        </p:nvPicPr>
-        <p:blipFill rotWithShape="1">
-          <a:blip r:embed="rId6">
-            <a:alphaModFix/>
-          </a:blip>
-          <a:srcRect b="0" l="0" r="0" t="0"/>
-          <a:stretch/>
-        </p:blipFill>
-        <p:spPr>
-          <a:xfrm>
-            <a:off x="6215062" y="2252960"/>
-            <a:ext cx="2578893" cy="3075979"/>
-          </a:xfrm>
-          <a:prstGeom prst="rect">
-            <a:avLst/>
-          </a:prstGeom>
-          <a:noFill/>
-          <a:ln>
-            <a:noFill/>
-          </a:ln>
-        </p:spPr>
-      </p:pic>
-      <p:pic>
-        <p:nvPicPr>
-          <p:cNvPr descr="image.png" id="319" name="Google Shape;319;p14"/>
-          <p:cNvPicPr preferRelativeResize="0"/>
-          <p:nvPr/>
-        </p:nvPicPr>
-        <p:blipFill rotWithShape="1">
-          <a:blip r:embed="rId7">
-            <a:alphaModFix/>
-          </a:blip>
-          <a:srcRect b="0" l="0" r="0" t="0"/>
-          <a:stretch/>
-        </p:blipFill>
-        <p:spPr>
-          <a:xfrm>
-            <a:off x="9032081" y="2252960"/>
-            <a:ext cx="2578893" cy="3075979"/>
-          </a:xfrm>
-          <a:prstGeom prst="rect">
-            <a:avLst/>
-          </a:prstGeom>
-          <a:noFill/>
-          <a:ln>
-            <a:noFill/>
-          </a:ln>
-        </p:spPr>
-      </p:pic>
-      <p:pic>
-        <p:nvPicPr>
-          <p:cNvPr descr="image.png" id="320" name="Google Shape;320;p14"/>
-          <p:cNvPicPr preferRelativeResize="0"/>
-          <p:nvPr/>
-        </p:nvPicPr>
-        <p:blipFill rotWithShape="1">
-          <a:blip r:embed="rId8">
-            <a:alphaModFix/>
-          </a:blip>
-          <a:srcRect b="0" l="0" r="0" t="0"/>
-          <a:stretch/>
-        </p:blipFill>
-        <p:spPr>
-          <a:xfrm>
-            <a:off x="876300" y="2548235"/>
-            <a:ext cx="619125" cy="619125"/>
-          </a:xfrm>
-          <a:prstGeom prst="rect">
-            <a:avLst/>
-          </a:prstGeom>
-          <a:noFill/>
-          <a:ln>
-            <a:noFill/>
-          </a:ln>
-        </p:spPr>
-      </p:pic>
-      <p:sp>
-        <p:nvSpPr>
-          <p:cNvPr id="321" name="Google Shape;321;p14"/>
-          <p:cNvSpPr txBox="1"/>
-          <p:nvPr/>
-        </p:nvSpPr>
-        <p:spPr>
-          <a:xfrm>
-            <a:off x="876300" y="3357860"/>
-            <a:ext cx="2087760" cy="266700"/>
-          </a:xfrm>
-          <a:prstGeom prst="rect">
-            <a:avLst/>
-          </a:prstGeom>
-          <a:noFill/>
-          <a:ln>
-            <a:noFill/>
-          </a:ln>
-        </p:spPr>
-        <p:txBody>
-          <a:bodyPr anchorCtr="0" anchor="t" bIns="0" lIns="0" spcFirstLastPara="1" rIns="0" wrap="square" tIns="0">
-            <a:spAutoFit/>
-          </a:bodyPr>
-          <a:lstStyle/>
-          <a:p>
-            <a:pPr indent="0" lvl="0" marL="0" marR="0" rtl="0" algn="l">
-              <a:lnSpc>
-                <a:spcPct val="100000"/>
-              </a:lnSpc>
-              <a:spcBef>
-                <a:spcPts val="0"/>
-              </a:spcBef>
-              <a:spcAft>
-                <a:spcPts val="0"/>
-              </a:spcAft>
-              <a:buClr>
-                <a:srgbClr val="000000"/>
-              </a:buClr>
-              <a:buSzPts val="1650"/>
-              <a:buFont typeface="Arial"/>
-              <a:buNone/>
-            </a:pPr>
-            <a:r>
-              <a:rPr b="1" i="0" lang="en-US" sz="1650" u="none" cap="none" strike="noStrike">
-                <a:solidFill>
-                  <a:srgbClr val="F8FAFC"/>
-                </a:solidFill>
-                <a:latin typeface="Space Grotesk"/>
-                <a:ea typeface="Space Grotesk"/>
-                <a:cs typeface="Space Grotesk"/>
-                <a:sym typeface="Space Grotesk"/>
-              </a:rPr>
-              <a:t>Python ML</a:t>
-            </a:r>
-            <a:endParaRPr b="0" i="0" sz="1400" u="none" cap="none" strike="noStrike">
-              <a:solidFill>
-                <a:srgbClr val="000000"/>
-              </a:solidFill>
-              <a:latin typeface="Arial"/>
-              <a:ea typeface="Arial"/>
-              <a:cs typeface="Arial"/>
-              <a:sym typeface="Arial"/>
-            </a:endParaRPr>
-          </a:p>
-        </p:txBody>
-      </p:sp>
-      <p:sp>
-        <p:nvSpPr>
-          <p:cNvPr id="322" name="Google Shape;322;p14"/>
-          <p:cNvSpPr txBox="1"/>
-          <p:nvPr/>
-        </p:nvSpPr>
-        <p:spPr>
-          <a:xfrm>
-            <a:off x="876300" y="3738860"/>
-            <a:ext cx="1988343" cy="1294804"/>
-          </a:xfrm>
-          <a:prstGeom prst="rect">
-            <a:avLst/>
-          </a:prstGeom>
-          <a:noFill/>
-          <a:ln>
-            <a:noFill/>
-          </a:ln>
-        </p:spPr>
-        <p:txBody>
-          <a:bodyPr anchorCtr="0" anchor="t" bIns="0" lIns="0" spcFirstLastPara="1" rIns="0" wrap="square" tIns="0">
-            <a:spAutoFit/>
-          </a:bodyPr>
-          <a:lstStyle/>
-          <a:p>
-            <a:pPr indent="0" lvl="0" marL="0" marR="0" rtl="0" algn="l">
-              <a:lnSpc>
-                <a:spcPct val="159921"/>
-              </a:lnSpc>
-              <a:spcBef>
-                <a:spcPts val="0"/>
-              </a:spcBef>
-              <a:spcAft>
-                <a:spcPts val="0"/>
-              </a:spcAft>
-              <a:buClr>
-                <a:srgbClr val="000000"/>
-              </a:buClr>
-              <a:buSzPts val="1275"/>
-              <a:buFont typeface="Arial"/>
-              <a:buNone/>
-            </a:pPr>
-            <a:r>
-              <a:rPr b="0" i="0" lang="en-US" sz="1275" u="none" cap="none" strike="noStrike">
-                <a:solidFill>
-                  <a:srgbClr val="94A3B8"/>
-                </a:solidFill>
-                <a:latin typeface="Plus Jakarta Sans"/>
-                <a:ea typeface="Plus Jakarta Sans"/>
-                <a:cs typeface="Plus Jakarta Sans"/>
-                <a:sym typeface="Plus Jakarta Sans"/>
-              </a:rPr>
-              <a:t>Motor analítico desarrollado en Python para modelos predictivos de series temporales y estimación de demanda.</a:t>
-            </a:r>
-            <a:endParaRPr b="0" i="0" sz="1400" u="none" cap="none" strike="noStrike">
-              <a:solidFill>
-                <a:srgbClr val="000000"/>
-              </a:solidFill>
-              <a:latin typeface="Arial"/>
-              <a:ea typeface="Arial"/>
-              <a:cs typeface="Arial"/>
-              <a:sym typeface="Arial"/>
-            </a:endParaRPr>
-          </a:p>
-        </p:txBody>
-      </p:sp>
-      <p:pic>
-        <p:nvPicPr>
-          <p:cNvPr descr="image.png" id="323" name="Google Shape;323;p14"/>
-          <p:cNvPicPr preferRelativeResize="0"/>
-          <p:nvPr/>
-        </p:nvPicPr>
-        <p:blipFill rotWithShape="1">
-          <a:blip r:embed="rId9">
-            <a:alphaModFix/>
-          </a:blip>
-          <a:srcRect b="0" l="0" r="0" t="0"/>
-          <a:stretch/>
-        </p:blipFill>
-        <p:spPr>
-          <a:xfrm>
-            <a:off x="3693318" y="2548235"/>
-            <a:ext cx="619125" cy="619125"/>
-          </a:xfrm>
-          <a:prstGeom prst="rect">
-            <a:avLst/>
-          </a:prstGeom>
-          <a:noFill/>
-          <a:ln>
-            <a:noFill/>
-          </a:ln>
-        </p:spPr>
-      </p:pic>
-      <p:sp>
-        <p:nvSpPr>
-          <p:cNvPr id="324" name="Google Shape;324;p14"/>
-          <p:cNvSpPr txBox="1"/>
-          <p:nvPr/>
-        </p:nvSpPr>
-        <p:spPr>
-          <a:xfrm>
-            <a:off x="3693318" y="3357860"/>
-            <a:ext cx="2087760" cy="266700"/>
-          </a:xfrm>
-          <a:prstGeom prst="rect">
-            <a:avLst/>
-          </a:prstGeom>
-          <a:noFill/>
-          <a:ln>
-            <a:noFill/>
-          </a:ln>
-        </p:spPr>
-        <p:txBody>
-          <a:bodyPr anchorCtr="0" anchor="t" bIns="0" lIns="0" spcFirstLastPara="1" rIns="0" wrap="square" tIns="0">
-            <a:spAutoFit/>
-          </a:bodyPr>
-          <a:lstStyle/>
-          <a:p>
-            <a:pPr indent="0" lvl="0" marL="0" marR="0" rtl="0" algn="l">
-              <a:lnSpc>
-                <a:spcPct val="100000"/>
-              </a:lnSpc>
-              <a:spcBef>
-                <a:spcPts val="0"/>
-              </a:spcBef>
-              <a:spcAft>
-                <a:spcPts val="0"/>
-              </a:spcAft>
-              <a:buClr>
-                <a:srgbClr val="000000"/>
-              </a:buClr>
-              <a:buSzPts val="1650"/>
-              <a:buFont typeface="Arial"/>
-              <a:buNone/>
-            </a:pPr>
-            <a:r>
-              <a:rPr b="1" i="0" lang="en-US" sz="1650" u="none" cap="none" strike="noStrike">
-                <a:solidFill>
-                  <a:srgbClr val="F8FAFC"/>
-                </a:solidFill>
-                <a:latin typeface="Space Grotesk"/>
-                <a:ea typeface="Space Grotesk"/>
-                <a:cs typeface="Space Grotesk"/>
-                <a:sym typeface="Space Grotesk"/>
-              </a:rPr>
-              <a:t>PostgreSQL</a:t>
-            </a:r>
-            <a:endParaRPr b="0" i="0" sz="1400" u="none" cap="none" strike="noStrike">
-              <a:solidFill>
-                <a:srgbClr val="000000"/>
-              </a:solidFill>
-              <a:latin typeface="Arial"/>
-              <a:ea typeface="Arial"/>
-              <a:cs typeface="Arial"/>
-              <a:sym typeface="Arial"/>
-            </a:endParaRPr>
-          </a:p>
-        </p:txBody>
-      </p:sp>
-      <p:sp>
-        <p:nvSpPr>
-          <p:cNvPr id="325" name="Google Shape;325;p14"/>
-          <p:cNvSpPr txBox="1"/>
-          <p:nvPr/>
-        </p:nvSpPr>
-        <p:spPr>
-          <a:xfrm>
-            <a:off x="3693318" y="3738860"/>
-            <a:ext cx="1988343" cy="1294804"/>
-          </a:xfrm>
-          <a:prstGeom prst="rect">
-            <a:avLst/>
-          </a:prstGeom>
-          <a:noFill/>
-          <a:ln>
-            <a:noFill/>
-          </a:ln>
-        </p:spPr>
-        <p:txBody>
-          <a:bodyPr anchorCtr="0" anchor="t" bIns="0" lIns="0" spcFirstLastPara="1" rIns="0" wrap="square" tIns="0">
-            <a:spAutoFit/>
-          </a:bodyPr>
-          <a:lstStyle/>
-          <a:p>
-            <a:pPr indent="0" lvl="0" marL="0" marR="0" rtl="0" algn="l">
-              <a:lnSpc>
-                <a:spcPct val="159921"/>
-              </a:lnSpc>
-              <a:spcBef>
-                <a:spcPts val="0"/>
-              </a:spcBef>
-              <a:spcAft>
-                <a:spcPts val="0"/>
-              </a:spcAft>
-              <a:buClr>
-                <a:srgbClr val="000000"/>
-              </a:buClr>
-              <a:buSzPts val="1275"/>
-              <a:buFont typeface="Arial"/>
-              <a:buNone/>
-            </a:pPr>
-            <a:r>
-              <a:rPr b="0" i="0" lang="en-US" sz="1275" u="none" cap="none" strike="noStrike">
-                <a:solidFill>
-                  <a:srgbClr val="94A3B8"/>
-                </a:solidFill>
-                <a:latin typeface="Plus Jakarta Sans"/>
-                <a:ea typeface="Plus Jakarta Sans"/>
-                <a:cs typeface="Plus Jakarta Sans"/>
-                <a:sym typeface="Plus Jakarta Sans"/>
-              </a:rPr>
-              <a:t>Base de datos relacional robusta e hiper-escalable para consolidar inventarios, clientes y transacciones.</a:t>
-            </a:r>
-            <a:endParaRPr b="0" i="0" sz="1400" u="none" cap="none" strike="noStrike">
-              <a:solidFill>
-                <a:srgbClr val="000000"/>
-              </a:solidFill>
-              <a:latin typeface="Arial"/>
-              <a:ea typeface="Arial"/>
-              <a:cs typeface="Arial"/>
-              <a:sym typeface="Arial"/>
-            </a:endParaRPr>
-          </a:p>
-        </p:txBody>
-      </p:sp>
-      <p:pic>
-        <p:nvPicPr>
-          <p:cNvPr descr="image.png" id="326" name="Google Shape;326;p14"/>
-          <p:cNvPicPr preferRelativeResize="0"/>
-          <p:nvPr/>
-        </p:nvPicPr>
-        <p:blipFill rotWithShape="1">
-          <a:blip r:embed="rId10">
-            <a:alphaModFix/>
-          </a:blip>
-          <a:srcRect b="0" l="0" r="0" t="0"/>
-          <a:stretch/>
-        </p:blipFill>
-        <p:spPr>
-          <a:xfrm>
-            <a:off x="6510337" y="2548235"/>
-            <a:ext cx="619125" cy="619125"/>
-          </a:xfrm>
-          <a:prstGeom prst="rect">
-            <a:avLst/>
-          </a:prstGeom>
-          <a:noFill/>
-          <a:ln>
-            <a:noFill/>
-          </a:ln>
-        </p:spPr>
-      </p:pic>
-      <p:sp>
-        <p:nvSpPr>
-          <p:cNvPr id="327" name="Google Shape;327;p14"/>
-          <p:cNvSpPr txBox="1"/>
-          <p:nvPr/>
-        </p:nvSpPr>
-        <p:spPr>
-          <a:xfrm>
-            <a:off x="6510337" y="3357860"/>
-            <a:ext cx="2087760" cy="266700"/>
-          </a:xfrm>
-          <a:prstGeom prst="rect">
-            <a:avLst/>
-          </a:prstGeom>
-          <a:noFill/>
-          <a:ln>
-            <a:noFill/>
-          </a:ln>
-        </p:spPr>
-        <p:txBody>
-          <a:bodyPr anchorCtr="0" anchor="t" bIns="0" lIns="0" spcFirstLastPara="1" rIns="0" wrap="square" tIns="0">
-            <a:spAutoFit/>
-          </a:bodyPr>
-          <a:lstStyle/>
-          <a:p>
-            <a:pPr indent="0" lvl="0" marL="0" marR="0" rtl="0" algn="l">
-              <a:lnSpc>
-                <a:spcPct val="100000"/>
-              </a:lnSpc>
-              <a:spcBef>
-                <a:spcPts val="0"/>
-              </a:spcBef>
-              <a:spcAft>
-                <a:spcPts val="0"/>
-              </a:spcAft>
-              <a:buClr>
-                <a:srgbClr val="000000"/>
-              </a:buClr>
-              <a:buSzPts val="1650"/>
-              <a:buFont typeface="Arial"/>
-              <a:buNone/>
-            </a:pPr>
-            <a:r>
-              <a:rPr b="1" i="0" lang="en-US" sz="1650" u="none" cap="none" strike="noStrike">
-                <a:solidFill>
-                  <a:srgbClr val="F8FAFC"/>
-                </a:solidFill>
-                <a:latin typeface="Space Grotesk"/>
-                <a:ea typeface="Space Grotesk"/>
-                <a:cs typeface="Space Grotesk"/>
-                <a:sym typeface="Space Grotesk"/>
-              </a:rPr>
-              <a:t>Frontend Web</a:t>
-            </a:r>
-            <a:endParaRPr b="0" i="0" sz="1400" u="none" cap="none" strike="noStrike">
-              <a:solidFill>
-                <a:srgbClr val="000000"/>
-              </a:solidFill>
-              <a:latin typeface="Arial"/>
-              <a:ea typeface="Arial"/>
-              <a:cs typeface="Arial"/>
-              <a:sym typeface="Arial"/>
-            </a:endParaRPr>
-          </a:p>
-        </p:txBody>
-      </p:sp>
-      <p:sp>
-        <p:nvSpPr>
-          <p:cNvPr id="328" name="Google Shape;328;p14"/>
-          <p:cNvSpPr txBox="1"/>
-          <p:nvPr/>
-        </p:nvSpPr>
-        <p:spPr>
-          <a:xfrm>
-            <a:off x="6510337" y="3738860"/>
-            <a:ext cx="1988343" cy="1294804"/>
-          </a:xfrm>
-          <a:prstGeom prst="rect">
-            <a:avLst/>
-          </a:prstGeom>
-          <a:noFill/>
-          <a:ln>
-            <a:noFill/>
-          </a:ln>
-        </p:spPr>
-        <p:txBody>
-          <a:bodyPr anchorCtr="0" anchor="t" bIns="0" lIns="0" spcFirstLastPara="1" rIns="0" wrap="square" tIns="0">
-            <a:spAutoFit/>
-          </a:bodyPr>
-          <a:lstStyle/>
-          <a:p>
-            <a:pPr indent="0" lvl="0" marL="0" marR="0" rtl="0" algn="l">
-              <a:lnSpc>
-                <a:spcPct val="159921"/>
-              </a:lnSpc>
-              <a:spcBef>
-                <a:spcPts val="0"/>
-              </a:spcBef>
-              <a:spcAft>
-                <a:spcPts val="0"/>
-              </a:spcAft>
-              <a:buClr>
-                <a:srgbClr val="000000"/>
-              </a:buClr>
-              <a:buSzPts val="1275"/>
-              <a:buFont typeface="Arial"/>
-              <a:buNone/>
-            </a:pPr>
-            <a:r>
-              <a:rPr b="0" i="0" lang="en-US" sz="1275" u="none" cap="none" strike="noStrike">
-                <a:solidFill>
-                  <a:srgbClr val="94A3B8"/>
-                </a:solidFill>
-                <a:latin typeface="Plus Jakarta Sans"/>
-                <a:ea typeface="Plus Jakarta Sans"/>
-                <a:cs typeface="Plus Jakarta Sans"/>
-                <a:sym typeface="Plus Jakarta Sans"/>
-              </a:rPr>
-              <a:t>Interface responsiva en React/HTML5 para el Portal E-Commerce y el Dashboard Administrativo.</a:t>
-            </a:r>
-            <a:endParaRPr b="0" i="0" sz="1400" u="none" cap="none" strike="noStrike">
-              <a:solidFill>
-                <a:srgbClr val="000000"/>
-              </a:solidFill>
-              <a:latin typeface="Arial"/>
-              <a:ea typeface="Arial"/>
-              <a:cs typeface="Arial"/>
-              <a:sym typeface="Arial"/>
-            </a:endParaRPr>
-          </a:p>
-        </p:txBody>
-      </p:sp>
-      <p:pic>
-        <p:nvPicPr>
-          <p:cNvPr descr="image.png" id="329" name="Google Shape;329;p14"/>
-          <p:cNvPicPr preferRelativeResize="0"/>
-          <p:nvPr/>
-        </p:nvPicPr>
-        <p:blipFill rotWithShape="1">
-          <a:blip r:embed="rId11">
-            <a:alphaModFix/>
-          </a:blip>
-          <a:srcRect b="0" l="0" r="0" t="0"/>
-          <a:stretch/>
-        </p:blipFill>
-        <p:spPr>
-          <a:xfrm>
-            <a:off x="9327356" y="2548235"/>
-            <a:ext cx="619125" cy="619125"/>
-          </a:xfrm>
-          <a:prstGeom prst="rect">
-            <a:avLst/>
-          </a:prstGeom>
-          <a:noFill/>
-          <a:ln>
-            <a:noFill/>
-          </a:ln>
-        </p:spPr>
-      </p:pic>
-      <p:sp>
-        <p:nvSpPr>
-          <p:cNvPr id="330" name="Google Shape;330;p14"/>
-          <p:cNvSpPr txBox="1"/>
-          <p:nvPr/>
-        </p:nvSpPr>
-        <p:spPr>
-          <a:xfrm>
-            <a:off x="9327356" y="3357860"/>
-            <a:ext cx="2087760" cy="266700"/>
-          </a:xfrm>
-          <a:prstGeom prst="rect">
-            <a:avLst/>
-          </a:prstGeom>
-          <a:noFill/>
-          <a:ln>
-            <a:noFill/>
-          </a:ln>
-        </p:spPr>
-        <p:txBody>
-          <a:bodyPr anchorCtr="0" anchor="t" bIns="0" lIns="0" spcFirstLastPara="1" rIns="0" wrap="square" tIns="0">
-            <a:spAutoFit/>
-          </a:bodyPr>
-          <a:lstStyle/>
-          <a:p>
-            <a:pPr indent="0" lvl="0" marL="0" marR="0" rtl="0" algn="l">
-              <a:lnSpc>
-                <a:spcPct val="100000"/>
-              </a:lnSpc>
-              <a:spcBef>
-                <a:spcPts val="0"/>
-              </a:spcBef>
-              <a:spcAft>
-                <a:spcPts val="0"/>
-              </a:spcAft>
-              <a:buClr>
-                <a:srgbClr val="000000"/>
-              </a:buClr>
-              <a:buSzPts val="1650"/>
-              <a:buFont typeface="Arial"/>
-              <a:buNone/>
-            </a:pPr>
-            <a:r>
-              <a:rPr b="1" i="0" lang="en-US" sz="1650" u="none" cap="none" strike="noStrike">
-                <a:solidFill>
-                  <a:srgbClr val="F8FAFC"/>
-                </a:solidFill>
-                <a:latin typeface="Space Grotesk"/>
-                <a:ea typeface="Space Grotesk"/>
-                <a:cs typeface="Space Grotesk"/>
-                <a:sym typeface="Space Grotesk"/>
-              </a:rPr>
-              <a:t>Cloud Deploy</a:t>
-            </a:r>
-            <a:endParaRPr b="0" i="0" sz="1400" u="none" cap="none" strike="noStrike">
-              <a:solidFill>
-                <a:srgbClr val="000000"/>
-              </a:solidFill>
-              <a:latin typeface="Arial"/>
-              <a:ea typeface="Arial"/>
-              <a:cs typeface="Arial"/>
-              <a:sym typeface="Arial"/>
-            </a:endParaRPr>
-          </a:p>
-        </p:txBody>
-      </p:sp>
-      <p:sp>
-        <p:nvSpPr>
-          <p:cNvPr id="331" name="Google Shape;331;p14"/>
-          <p:cNvSpPr txBox="1"/>
-          <p:nvPr/>
-        </p:nvSpPr>
-        <p:spPr>
-          <a:xfrm>
-            <a:off x="9327356" y="3738860"/>
-            <a:ext cx="1988343" cy="1035843"/>
-          </a:xfrm>
-          <a:prstGeom prst="rect">
-            <a:avLst/>
-          </a:prstGeom>
-          <a:noFill/>
-          <a:ln>
-            <a:noFill/>
-          </a:ln>
-        </p:spPr>
-        <p:txBody>
-          <a:bodyPr anchorCtr="0" anchor="t" bIns="0" lIns="0" spcFirstLastPara="1" rIns="0" wrap="square" tIns="0">
-            <a:spAutoFit/>
-          </a:bodyPr>
-          <a:lstStyle/>
-          <a:p>
-            <a:pPr indent="0" lvl="0" marL="0" marR="0" rtl="0" algn="l">
-              <a:lnSpc>
-                <a:spcPct val="159921"/>
-              </a:lnSpc>
-              <a:spcBef>
-                <a:spcPts val="0"/>
-              </a:spcBef>
-              <a:spcAft>
-                <a:spcPts val="0"/>
-              </a:spcAft>
-              <a:buClr>
-                <a:srgbClr val="000000"/>
-              </a:buClr>
-              <a:buSzPts val="1275"/>
-              <a:buFont typeface="Arial"/>
-              <a:buNone/>
-            </a:pPr>
-            <a:r>
-              <a:rPr b="0" i="0" lang="en-US" sz="1275" u="none" cap="none" strike="noStrike">
-                <a:solidFill>
-                  <a:srgbClr val="94A3B8"/>
-                </a:solidFill>
-                <a:latin typeface="Plus Jakarta Sans"/>
-                <a:ea typeface="Plus Jakarta Sans"/>
-                <a:cs typeface="Plus Jakarta Sans"/>
-                <a:sym typeface="Plus Jakarta Sans"/>
-              </a:rPr>
-              <a:t>Servicios en la nube con altos estándares de seguridad y latencia reducida (&lt; 2 segundos).</a:t>
-            </a:r>
-            <a:endParaRPr b="0" i="0" sz="1400" u="none" cap="none" strike="noStrike">
-              <a:solidFill>
-                <a:srgbClr val="000000"/>
-              </a:solidFill>
-              <a:latin typeface="Arial"/>
-              <a:ea typeface="Arial"/>
-              <a:cs typeface="Arial"/>
-              <a:sym typeface="Arial"/>
-            </a:endParaRPr>
-          </a:p>
-        </p:txBody>
-      </p:sp>
-      <p:pic>
-        <p:nvPicPr>
-          <p:cNvPr descr="image.png" id="332" name="Google Shape;332;p14"/>
-          <p:cNvPicPr preferRelativeResize="0"/>
-          <p:nvPr/>
-        </p:nvPicPr>
-        <p:blipFill rotWithShape="1">
-          <a:blip r:embed="rId12">
-            <a:alphaModFix/>
-          </a:blip>
-          <a:srcRect b="0" l="0" r="0" t="0"/>
-          <a:stretch/>
-        </p:blipFill>
-        <p:spPr>
-          <a:xfrm>
-            <a:off x="1028700" y="2676822"/>
-            <a:ext cx="314325" cy="361950"/>
-          </a:xfrm>
-          <a:prstGeom prst="rect">
-            <a:avLst/>
-          </a:prstGeom>
-          <a:noFill/>
-          <a:ln>
-            <a:noFill/>
-          </a:ln>
-        </p:spPr>
-      </p:pic>
-      <p:pic>
-        <p:nvPicPr>
-          <p:cNvPr descr="image.png" id="333" name="Google Shape;333;p14"/>
-          <p:cNvPicPr preferRelativeResize="0"/>
-          <p:nvPr/>
-        </p:nvPicPr>
-        <p:blipFill rotWithShape="1">
-          <a:blip r:embed="rId13">
-            <a:alphaModFix/>
-          </a:blip>
-          <a:srcRect b="0" l="0" r="0" t="0"/>
-          <a:stretch/>
-        </p:blipFill>
-        <p:spPr>
-          <a:xfrm>
-            <a:off x="3845718" y="2676822"/>
-            <a:ext cx="314325" cy="361950"/>
-          </a:xfrm>
-          <a:prstGeom prst="rect">
-            <a:avLst/>
-          </a:prstGeom>
-          <a:noFill/>
-          <a:ln>
-            <a:noFill/>
-          </a:ln>
-        </p:spPr>
-      </p:pic>
-      <p:pic>
-        <p:nvPicPr>
-          <p:cNvPr descr="image.png" id="334" name="Google Shape;334;p14"/>
-          <p:cNvPicPr preferRelativeResize="0"/>
-          <p:nvPr/>
-        </p:nvPicPr>
-        <p:blipFill rotWithShape="1">
-          <a:blip r:embed="rId14">
-            <a:alphaModFix/>
-          </a:blip>
-          <a:srcRect b="0" l="0" r="0" t="0"/>
-          <a:stretch/>
-        </p:blipFill>
-        <p:spPr>
-          <a:xfrm>
-            <a:off x="6638925" y="2676822"/>
-            <a:ext cx="361950" cy="361950"/>
-          </a:xfrm>
-          <a:prstGeom prst="rect">
-            <a:avLst/>
-          </a:prstGeom>
-          <a:noFill/>
-          <a:ln>
-            <a:noFill/>
-          </a:ln>
-        </p:spPr>
-      </p:pic>
-      <p:pic>
-        <p:nvPicPr>
-          <p:cNvPr descr="image.png" id="335" name="Google Shape;335;p14"/>
-          <p:cNvPicPr preferRelativeResize="0"/>
-          <p:nvPr/>
-        </p:nvPicPr>
-        <p:blipFill rotWithShape="1">
-          <a:blip r:embed="rId15">
-            <a:alphaModFix/>
-          </a:blip>
-          <a:srcRect b="0" l="0" r="0" t="0"/>
-          <a:stretch/>
-        </p:blipFill>
-        <p:spPr>
-          <a:xfrm>
-            <a:off x="9408318" y="2676822"/>
-            <a:ext cx="457200" cy="361950"/>
-          </a:xfrm>
-          <a:prstGeom prst="rect">
-            <a:avLst/>
-          </a:prstGeom>
-          <a:noFill/>
-          <a:ln>
-            <a:noFill/>
-          </a:ln>
-        </p:spPr>
-      </p:pic>
-      <p:sp>
-        <p:nvSpPr>
-          <p:cNvPr id="336" name="Google Shape;336;p14"/>
-          <p:cNvSpPr txBox="1"/>
-          <p:nvPr/>
-        </p:nvSpPr>
-        <p:spPr>
-          <a:xfrm>
-            <a:off x="581025" y="485775"/>
-            <a:ext cx="11581447" cy="438150"/>
-          </a:xfrm>
-          <a:prstGeom prst="rect">
-            <a:avLst/>
-          </a:prstGeom>
-          <a:noFill/>
-          <a:ln>
-            <a:noFill/>
-          </a:ln>
-        </p:spPr>
-        <p:txBody>
-          <a:bodyPr anchorCtr="0" anchor="ctr" bIns="0" lIns="0" spcFirstLastPara="1" rIns="0" wrap="square" tIns="0">
-            <a:spAutoFit/>
-          </a:bodyPr>
-          <a:lstStyle/>
-          <a:p>
-            <a:pPr indent="0" lvl="0" marL="0" marR="0" rtl="0" algn="l">
-              <a:lnSpc>
-                <a:spcPct val="100000"/>
-              </a:lnSpc>
-              <a:spcBef>
-                <a:spcPts val="0"/>
-              </a:spcBef>
-              <a:spcAft>
-                <a:spcPts val="0"/>
-              </a:spcAft>
-              <a:buClr>
-                <a:srgbClr val="000000"/>
-              </a:buClr>
-              <a:buSzPts val="2700"/>
-              <a:buFont typeface="Arial"/>
-              <a:buNone/>
-            </a:pPr>
-            <a:r>
-              <a:rPr b="1" i="0" lang="en-US" sz="2700" u="none" cap="none" strike="noStrike">
-                <a:solidFill>
-                  <a:srgbClr val="F8FAFC"/>
-                </a:solidFill>
-                <a:latin typeface="Space Grotesk"/>
-                <a:ea typeface="Space Grotesk"/>
-                <a:cs typeface="Space Grotesk"/>
-                <a:sym typeface="Space Grotesk"/>
-              </a:rPr>
-              <a:t>Stack Tecnológico</a:t>
-            </a:r>
-            <a:endParaRPr b="0" i="0" sz="1400" u="none" cap="none" strike="noStrike">
-              <a:solidFill>
-                <a:srgbClr val="000000"/>
-              </a:solidFill>
-              <a:latin typeface="Arial"/>
-              <a:ea typeface="Arial"/>
-              <a:cs typeface="Arial"/>
-              <a:sym typeface="Arial"/>
-            </a:endParaRPr>
-          </a:p>
-        </p:txBody>
-      </p:sp>
-      <p:sp>
-        <p:nvSpPr>
-          <p:cNvPr id="337" name="Google Shape;337;p14"/>
+          <p:cNvPr id="307" name="Google Shape;307;p13"/>
           <p:cNvSpPr/>
           <p:nvPr/>
         </p:nvSpPr>
@@ -22036,7 +20930,7 @@
     </p:bg>
     <p:spTree>
       <p:nvGrpSpPr>
-        <p:cNvPr id="341" name="Shape 341"/>
+        <p:cNvPr id="311" name="Shape 311"/>
         <p:cNvGrpSpPr/>
         <p:nvPr/>
       </p:nvGrpSpPr>
@@ -22050,7 +20944,7 @@
       </p:grpSpPr>
       <p:pic>
         <p:nvPicPr>
-          <p:cNvPr descr="image.png" id="342" name="Google Shape;342;p15"/>
+          <p:cNvPr descr="image.png" id="312" name="Google Shape;312;p14"/>
           <p:cNvPicPr preferRelativeResize="0"/>
           <p:nvPr/>
         </p:nvPicPr>
@@ -22077,7 +20971,7 @@
       </p:pic>
       <p:pic>
         <p:nvPicPr>
-          <p:cNvPr descr="image.png" id="343" name="Google Shape;343;p15"/>
+          <p:cNvPr descr="image.png" id="313" name="Google Shape;313;p14"/>
           <p:cNvPicPr preferRelativeResize="0"/>
           <p:nvPr/>
         </p:nvPicPr>
@@ -22090,8 +20984,8 @@
         </p:blipFill>
         <p:spPr>
           <a:xfrm>
-            <a:off x="581025" y="2719387"/>
-            <a:ext cx="5348287" cy="2143125"/>
+            <a:off x="581025" y="2252960"/>
+            <a:ext cx="2578893" cy="3075979"/>
           </a:xfrm>
           <a:prstGeom prst="rect">
             <a:avLst/>
@@ -22102,9 +20996,1045 @@
           </a:ln>
         </p:spPr>
       </p:pic>
+      <p:pic>
+        <p:nvPicPr>
+          <p:cNvPr descr="image.png" id="314" name="Google Shape;314;p14"/>
+          <p:cNvPicPr preferRelativeResize="0"/>
+          <p:nvPr/>
+        </p:nvPicPr>
+        <p:blipFill rotWithShape="1">
+          <a:blip r:embed="rId5">
+            <a:alphaModFix/>
+          </a:blip>
+          <a:srcRect b="0" l="0" r="0" t="0"/>
+          <a:stretch/>
+        </p:blipFill>
+        <p:spPr>
+          <a:xfrm>
+            <a:off x="3398043" y="2252960"/>
+            <a:ext cx="2578893" cy="3075979"/>
+          </a:xfrm>
+          <a:prstGeom prst="rect">
+            <a:avLst/>
+          </a:prstGeom>
+          <a:noFill/>
+          <a:ln>
+            <a:noFill/>
+          </a:ln>
+        </p:spPr>
+      </p:pic>
+      <p:pic>
+        <p:nvPicPr>
+          <p:cNvPr descr="image.png" id="315" name="Google Shape;315;p14"/>
+          <p:cNvPicPr preferRelativeResize="0"/>
+          <p:nvPr/>
+        </p:nvPicPr>
+        <p:blipFill rotWithShape="1">
+          <a:blip r:embed="rId6">
+            <a:alphaModFix/>
+          </a:blip>
+          <a:srcRect b="0" l="0" r="0" t="0"/>
+          <a:stretch/>
+        </p:blipFill>
+        <p:spPr>
+          <a:xfrm>
+            <a:off x="6215062" y="2252960"/>
+            <a:ext cx="2578893" cy="3075979"/>
+          </a:xfrm>
+          <a:prstGeom prst="rect">
+            <a:avLst/>
+          </a:prstGeom>
+          <a:noFill/>
+          <a:ln>
+            <a:noFill/>
+          </a:ln>
+        </p:spPr>
+      </p:pic>
+      <p:pic>
+        <p:nvPicPr>
+          <p:cNvPr descr="image.png" id="316" name="Google Shape;316;p14"/>
+          <p:cNvPicPr preferRelativeResize="0"/>
+          <p:nvPr/>
+        </p:nvPicPr>
+        <p:blipFill rotWithShape="1">
+          <a:blip r:embed="rId7">
+            <a:alphaModFix/>
+          </a:blip>
+          <a:srcRect b="0" l="0" r="0" t="0"/>
+          <a:stretch/>
+        </p:blipFill>
+        <p:spPr>
+          <a:xfrm>
+            <a:off x="9032081" y="2252960"/>
+            <a:ext cx="2578893" cy="3075979"/>
+          </a:xfrm>
+          <a:prstGeom prst="rect">
+            <a:avLst/>
+          </a:prstGeom>
+          <a:noFill/>
+          <a:ln>
+            <a:noFill/>
+          </a:ln>
+        </p:spPr>
+      </p:pic>
+      <p:pic>
+        <p:nvPicPr>
+          <p:cNvPr descr="image.png" id="317" name="Google Shape;317;p14"/>
+          <p:cNvPicPr preferRelativeResize="0"/>
+          <p:nvPr/>
+        </p:nvPicPr>
+        <p:blipFill rotWithShape="1">
+          <a:blip r:embed="rId8">
+            <a:alphaModFix/>
+          </a:blip>
+          <a:srcRect b="0" l="0" r="0" t="0"/>
+          <a:stretch/>
+        </p:blipFill>
+        <p:spPr>
+          <a:xfrm>
+            <a:off x="876300" y="2548235"/>
+            <a:ext cx="619125" cy="619125"/>
+          </a:xfrm>
+          <a:prstGeom prst="rect">
+            <a:avLst/>
+          </a:prstGeom>
+          <a:noFill/>
+          <a:ln>
+            <a:noFill/>
+          </a:ln>
+        </p:spPr>
+      </p:pic>
       <p:sp>
         <p:nvSpPr>
-          <p:cNvPr id="344" name="Google Shape;344;p15"/>
+          <p:cNvPr id="318" name="Google Shape;318;p14"/>
+          <p:cNvSpPr txBox="1"/>
+          <p:nvPr/>
+        </p:nvSpPr>
+        <p:spPr>
+          <a:xfrm>
+            <a:off x="876300" y="3357860"/>
+            <a:ext cx="2087760" cy="266700"/>
+          </a:xfrm>
+          <a:prstGeom prst="rect">
+            <a:avLst/>
+          </a:prstGeom>
+          <a:noFill/>
+          <a:ln>
+            <a:noFill/>
+          </a:ln>
+        </p:spPr>
+        <p:txBody>
+          <a:bodyPr anchorCtr="0" anchor="t" bIns="0" lIns="0" spcFirstLastPara="1" rIns="0" wrap="square" tIns="0">
+            <a:spAutoFit/>
+          </a:bodyPr>
+          <a:lstStyle/>
+          <a:p>
+            <a:pPr indent="0" lvl="0" marL="0" marR="0" rtl="0" algn="l">
+              <a:lnSpc>
+                <a:spcPct val="100000"/>
+              </a:lnSpc>
+              <a:spcBef>
+                <a:spcPts val="0"/>
+              </a:spcBef>
+              <a:spcAft>
+                <a:spcPts val="0"/>
+              </a:spcAft>
+              <a:buClr>
+                <a:srgbClr val="000000"/>
+              </a:buClr>
+              <a:buSzPts val="1650"/>
+              <a:buFont typeface="Arial"/>
+              <a:buNone/>
+            </a:pPr>
+            <a:r>
+              <a:rPr b="1" i="0" lang="en-US" sz="1650" u="none" cap="none" strike="noStrike">
+                <a:solidFill>
+                  <a:srgbClr val="F8FAFC"/>
+                </a:solidFill>
+                <a:latin typeface="Space Grotesk"/>
+                <a:ea typeface="Space Grotesk"/>
+                <a:cs typeface="Space Grotesk"/>
+                <a:sym typeface="Space Grotesk"/>
+              </a:rPr>
+              <a:t>Python ML</a:t>
+            </a:r>
+            <a:endParaRPr b="0" i="0" sz="1400" u="none" cap="none" strike="noStrike">
+              <a:solidFill>
+                <a:srgbClr val="000000"/>
+              </a:solidFill>
+              <a:latin typeface="Arial"/>
+              <a:ea typeface="Arial"/>
+              <a:cs typeface="Arial"/>
+              <a:sym typeface="Arial"/>
+            </a:endParaRPr>
+          </a:p>
+        </p:txBody>
+      </p:sp>
+      <p:sp>
+        <p:nvSpPr>
+          <p:cNvPr id="319" name="Google Shape;319;p14"/>
+          <p:cNvSpPr txBox="1"/>
+          <p:nvPr/>
+        </p:nvSpPr>
+        <p:spPr>
+          <a:xfrm>
+            <a:off x="876300" y="3738860"/>
+            <a:ext cx="1988343" cy="1294804"/>
+          </a:xfrm>
+          <a:prstGeom prst="rect">
+            <a:avLst/>
+          </a:prstGeom>
+          <a:noFill/>
+          <a:ln>
+            <a:noFill/>
+          </a:ln>
+        </p:spPr>
+        <p:txBody>
+          <a:bodyPr anchorCtr="0" anchor="t" bIns="0" lIns="0" spcFirstLastPara="1" rIns="0" wrap="square" tIns="0">
+            <a:spAutoFit/>
+          </a:bodyPr>
+          <a:lstStyle/>
+          <a:p>
+            <a:pPr indent="0" lvl="0" marL="0" marR="0" rtl="0" algn="l">
+              <a:lnSpc>
+                <a:spcPct val="159921"/>
+              </a:lnSpc>
+              <a:spcBef>
+                <a:spcPts val="0"/>
+              </a:spcBef>
+              <a:spcAft>
+                <a:spcPts val="0"/>
+              </a:spcAft>
+              <a:buClr>
+                <a:srgbClr val="000000"/>
+              </a:buClr>
+              <a:buSzPts val="1275"/>
+              <a:buFont typeface="Arial"/>
+              <a:buNone/>
+            </a:pPr>
+            <a:r>
+              <a:rPr b="0" i="0" lang="en-US" sz="1275" u="none" cap="none" strike="noStrike">
+                <a:solidFill>
+                  <a:srgbClr val="94A3B8"/>
+                </a:solidFill>
+                <a:latin typeface="Plus Jakarta Sans"/>
+                <a:ea typeface="Plus Jakarta Sans"/>
+                <a:cs typeface="Plus Jakarta Sans"/>
+                <a:sym typeface="Plus Jakarta Sans"/>
+              </a:rPr>
+              <a:t>Motor analítico desarrollado en Python para modelos predictivos de series temporales y estimación de demanda.</a:t>
+            </a:r>
+            <a:endParaRPr b="0" i="0" sz="1400" u="none" cap="none" strike="noStrike">
+              <a:solidFill>
+                <a:srgbClr val="000000"/>
+              </a:solidFill>
+              <a:latin typeface="Arial"/>
+              <a:ea typeface="Arial"/>
+              <a:cs typeface="Arial"/>
+              <a:sym typeface="Arial"/>
+            </a:endParaRPr>
+          </a:p>
+        </p:txBody>
+      </p:sp>
+      <p:pic>
+        <p:nvPicPr>
+          <p:cNvPr descr="image.png" id="320" name="Google Shape;320;p14"/>
+          <p:cNvPicPr preferRelativeResize="0"/>
+          <p:nvPr/>
+        </p:nvPicPr>
+        <p:blipFill rotWithShape="1">
+          <a:blip r:embed="rId9">
+            <a:alphaModFix/>
+          </a:blip>
+          <a:srcRect b="0" l="0" r="0" t="0"/>
+          <a:stretch/>
+        </p:blipFill>
+        <p:spPr>
+          <a:xfrm>
+            <a:off x="3693318" y="2548235"/>
+            <a:ext cx="619125" cy="619125"/>
+          </a:xfrm>
+          <a:prstGeom prst="rect">
+            <a:avLst/>
+          </a:prstGeom>
+          <a:noFill/>
+          <a:ln>
+            <a:noFill/>
+          </a:ln>
+        </p:spPr>
+      </p:pic>
+      <p:sp>
+        <p:nvSpPr>
+          <p:cNvPr id="321" name="Google Shape;321;p14"/>
+          <p:cNvSpPr txBox="1"/>
+          <p:nvPr/>
+        </p:nvSpPr>
+        <p:spPr>
+          <a:xfrm>
+            <a:off x="3693318" y="3357860"/>
+            <a:ext cx="2087760" cy="266700"/>
+          </a:xfrm>
+          <a:prstGeom prst="rect">
+            <a:avLst/>
+          </a:prstGeom>
+          <a:noFill/>
+          <a:ln>
+            <a:noFill/>
+          </a:ln>
+        </p:spPr>
+        <p:txBody>
+          <a:bodyPr anchorCtr="0" anchor="t" bIns="0" lIns="0" spcFirstLastPara="1" rIns="0" wrap="square" tIns="0">
+            <a:spAutoFit/>
+          </a:bodyPr>
+          <a:lstStyle/>
+          <a:p>
+            <a:pPr indent="0" lvl="0" marL="0" marR="0" rtl="0" algn="l">
+              <a:lnSpc>
+                <a:spcPct val="100000"/>
+              </a:lnSpc>
+              <a:spcBef>
+                <a:spcPts val="0"/>
+              </a:spcBef>
+              <a:spcAft>
+                <a:spcPts val="0"/>
+              </a:spcAft>
+              <a:buClr>
+                <a:srgbClr val="000000"/>
+              </a:buClr>
+              <a:buSzPts val="1650"/>
+              <a:buFont typeface="Arial"/>
+              <a:buNone/>
+            </a:pPr>
+            <a:r>
+              <a:rPr b="1" i="0" lang="en-US" sz="1650" u="none" cap="none" strike="noStrike">
+                <a:solidFill>
+                  <a:srgbClr val="F8FAFC"/>
+                </a:solidFill>
+                <a:latin typeface="Space Grotesk"/>
+                <a:ea typeface="Space Grotesk"/>
+                <a:cs typeface="Space Grotesk"/>
+                <a:sym typeface="Space Grotesk"/>
+              </a:rPr>
+              <a:t>PostgreSQL</a:t>
+            </a:r>
+            <a:endParaRPr b="0" i="0" sz="1400" u="none" cap="none" strike="noStrike">
+              <a:solidFill>
+                <a:srgbClr val="000000"/>
+              </a:solidFill>
+              <a:latin typeface="Arial"/>
+              <a:ea typeface="Arial"/>
+              <a:cs typeface="Arial"/>
+              <a:sym typeface="Arial"/>
+            </a:endParaRPr>
+          </a:p>
+        </p:txBody>
+      </p:sp>
+      <p:sp>
+        <p:nvSpPr>
+          <p:cNvPr id="322" name="Google Shape;322;p14"/>
+          <p:cNvSpPr txBox="1"/>
+          <p:nvPr/>
+        </p:nvSpPr>
+        <p:spPr>
+          <a:xfrm>
+            <a:off x="3693318" y="3738860"/>
+            <a:ext cx="1988343" cy="1294804"/>
+          </a:xfrm>
+          <a:prstGeom prst="rect">
+            <a:avLst/>
+          </a:prstGeom>
+          <a:noFill/>
+          <a:ln>
+            <a:noFill/>
+          </a:ln>
+        </p:spPr>
+        <p:txBody>
+          <a:bodyPr anchorCtr="0" anchor="t" bIns="0" lIns="0" spcFirstLastPara="1" rIns="0" wrap="square" tIns="0">
+            <a:spAutoFit/>
+          </a:bodyPr>
+          <a:lstStyle/>
+          <a:p>
+            <a:pPr indent="0" lvl="0" marL="0" marR="0" rtl="0" algn="l">
+              <a:lnSpc>
+                <a:spcPct val="159921"/>
+              </a:lnSpc>
+              <a:spcBef>
+                <a:spcPts val="0"/>
+              </a:spcBef>
+              <a:spcAft>
+                <a:spcPts val="0"/>
+              </a:spcAft>
+              <a:buClr>
+                <a:srgbClr val="000000"/>
+              </a:buClr>
+              <a:buSzPts val="1275"/>
+              <a:buFont typeface="Arial"/>
+              <a:buNone/>
+            </a:pPr>
+            <a:r>
+              <a:rPr b="0" i="0" lang="en-US" sz="1275" u="none" cap="none" strike="noStrike">
+                <a:solidFill>
+                  <a:srgbClr val="94A3B8"/>
+                </a:solidFill>
+                <a:latin typeface="Plus Jakarta Sans"/>
+                <a:ea typeface="Plus Jakarta Sans"/>
+                <a:cs typeface="Plus Jakarta Sans"/>
+                <a:sym typeface="Plus Jakarta Sans"/>
+              </a:rPr>
+              <a:t>Base de datos relacional robusta e hiper-escalable para consolidar inventarios, clientes y transacciones.</a:t>
+            </a:r>
+            <a:endParaRPr b="0" i="0" sz="1400" u="none" cap="none" strike="noStrike">
+              <a:solidFill>
+                <a:srgbClr val="000000"/>
+              </a:solidFill>
+              <a:latin typeface="Arial"/>
+              <a:ea typeface="Arial"/>
+              <a:cs typeface="Arial"/>
+              <a:sym typeface="Arial"/>
+            </a:endParaRPr>
+          </a:p>
+        </p:txBody>
+      </p:sp>
+      <p:pic>
+        <p:nvPicPr>
+          <p:cNvPr descr="image.png" id="323" name="Google Shape;323;p14"/>
+          <p:cNvPicPr preferRelativeResize="0"/>
+          <p:nvPr/>
+        </p:nvPicPr>
+        <p:blipFill rotWithShape="1">
+          <a:blip r:embed="rId10">
+            <a:alphaModFix/>
+          </a:blip>
+          <a:srcRect b="0" l="0" r="0" t="0"/>
+          <a:stretch/>
+        </p:blipFill>
+        <p:spPr>
+          <a:xfrm>
+            <a:off x="6510337" y="2548235"/>
+            <a:ext cx="619125" cy="619125"/>
+          </a:xfrm>
+          <a:prstGeom prst="rect">
+            <a:avLst/>
+          </a:prstGeom>
+          <a:noFill/>
+          <a:ln>
+            <a:noFill/>
+          </a:ln>
+        </p:spPr>
+      </p:pic>
+      <p:sp>
+        <p:nvSpPr>
+          <p:cNvPr id="324" name="Google Shape;324;p14"/>
+          <p:cNvSpPr txBox="1"/>
+          <p:nvPr/>
+        </p:nvSpPr>
+        <p:spPr>
+          <a:xfrm>
+            <a:off x="6510337" y="3357860"/>
+            <a:ext cx="2087760" cy="266700"/>
+          </a:xfrm>
+          <a:prstGeom prst="rect">
+            <a:avLst/>
+          </a:prstGeom>
+          <a:noFill/>
+          <a:ln>
+            <a:noFill/>
+          </a:ln>
+        </p:spPr>
+        <p:txBody>
+          <a:bodyPr anchorCtr="0" anchor="t" bIns="0" lIns="0" spcFirstLastPara="1" rIns="0" wrap="square" tIns="0">
+            <a:spAutoFit/>
+          </a:bodyPr>
+          <a:lstStyle/>
+          <a:p>
+            <a:pPr indent="0" lvl="0" marL="0" marR="0" rtl="0" algn="l">
+              <a:lnSpc>
+                <a:spcPct val="100000"/>
+              </a:lnSpc>
+              <a:spcBef>
+                <a:spcPts val="0"/>
+              </a:spcBef>
+              <a:spcAft>
+                <a:spcPts val="0"/>
+              </a:spcAft>
+              <a:buClr>
+                <a:srgbClr val="000000"/>
+              </a:buClr>
+              <a:buSzPts val="1650"/>
+              <a:buFont typeface="Arial"/>
+              <a:buNone/>
+            </a:pPr>
+            <a:r>
+              <a:rPr b="1" i="0" lang="en-US" sz="1650" u="none" cap="none" strike="noStrike">
+                <a:solidFill>
+                  <a:srgbClr val="F8FAFC"/>
+                </a:solidFill>
+                <a:latin typeface="Space Grotesk"/>
+                <a:ea typeface="Space Grotesk"/>
+                <a:cs typeface="Space Grotesk"/>
+                <a:sym typeface="Space Grotesk"/>
+              </a:rPr>
+              <a:t>Frontend Web</a:t>
+            </a:r>
+            <a:endParaRPr b="0" i="0" sz="1400" u="none" cap="none" strike="noStrike">
+              <a:solidFill>
+                <a:srgbClr val="000000"/>
+              </a:solidFill>
+              <a:latin typeface="Arial"/>
+              <a:ea typeface="Arial"/>
+              <a:cs typeface="Arial"/>
+              <a:sym typeface="Arial"/>
+            </a:endParaRPr>
+          </a:p>
+        </p:txBody>
+      </p:sp>
+      <p:sp>
+        <p:nvSpPr>
+          <p:cNvPr id="325" name="Google Shape;325;p14"/>
+          <p:cNvSpPr txBox="1"/>
+          <p:nvPr/>
+        </p:nvSpPr>
+        <p:spPr>
+          <a:xfrm>
+            <a:off x="6510337" y="3738860"/>
+            <a:ext cx="1988343" cy="1294804"/>
+          </a:xfrm>
+          <a:prstGeom prst="rect">
+            <a:avLst/>
+          </a:prstGeom>
+          <a:noFill/>
+          <a:ln>
+            <a:noFill/>
+          </a:ln>
+        </p:spPr>
+        <p:txBody>
+          <a:bodyPr anchorCtr="0" anchor="t" bIns="0" lIns="0" spcFirstLastPara="1" rIns="0" wrap="square" tIns="0">
+            <a:spAutoFit/>
+          </a:bodyPr>
+          <a:lstStyle/>
+          <a:p>
+            <a:pPr indent="0" lvl="0" marL="0" marR="0" rtl="0" algn="l">
+              <a:lnSpc>
+                <a:spcPct val="159921"/>
+              </a:lnSpc>
+              <a:spcBef>
+                <a:spcPts val="0"/>
+              </a:spcBef>
+              <a:spcAft>
+                <a:spcPts val="0"/>
+              </a:spcAft>
+              <a:buClr>
+                <a:srgbClr val="000000"/>
+              </a:buClr>
+              <a:buSzPts val="1275"/>
+              <a:buFont typeface="Arial"/>
+              <a:buNone/>
+            </a:pPr>
+            <a:r>
+              <a:rPr b="0" i="0" lang="en-US" sz="1275" u="none" cap="none" strike="noStrike">
+                <a:solidFill>
+                  <a:srgbClr val="94A3B8"/>
+                </a:solidFill>
+                <a:latin typeface="Plus Jakarta Sans"/>
+                <a:ea typeface="Plus Jakarta Sans"/>
+                <a:cs typeface="Plus Jakarta Sans"/>
+                <a:sym typeface="Plus Jakarta Sans"/>
+              </a:rPr>
+              <a:t>Interface responsiva en React/HTML5 para el Portal E-Commerce y el Dashboard Administrativo.</a:t>
+            </a:r>
+            <a:endParaRPr b="0" i="0" sz="1400" u="none" cap="none" strike="noStrike">
+              <a:solidFill>
+                <a:srgbClr val="000000"/>
+              </a:solidFill>
+              <a:latin typeface="Arial"/>
+              <a:ea typeface="Arial"/>
+              <a:cs typeface="Arial"/>
+              <a:sym typeface="Arial"/>
+            </a:endParaRPr>
+          </a:p>
+        </p:txBody>
+      </p:sp>
+      <p:pic>
+        <p:nvPicPr>
+          <p:cNvPr descr="image.png" id="326" name="Google Shape;326;p14"/>
+          <p:cNvPicPr preferRelativeResize="0"/>
+          <p:nvPr/>
+        </p:nvPicPr>
+        <p:blipFill rotWithShape="1">
+          <a:blip r:embed="rId11">
+            <a:alphaModFix/>
+          </a:blip>
+          <a:srcRect b="0" l="0" r="0" t="0"/>
+          <a:stretch/>
+        </p:blipFill>
+        <p:spPr>
+          <a:xfrm>
+            <a:off x="9327356" y="2548235"/>
+            <a:ext cx="619125" cy="619125"/>
+          </a:xfrm>
+          <a:prstGeom prst="rect">
+            <a:avLst/>
+          </a:prstGeom>
+          <a:noFill/>
+          <a:ln>
+            <a:noFill/>
+          </a:ln>
+        </p:spPr>
+      </p:pic>
+      <p:sp>
+        <p:nvSpPr>
+          <p:cNvPr id="327" name="Google Shape;327;p14"/>
+          <p:cNvSpPr txBox="1"/>
+          <p:nvPr/>
+        </p:nvSpPr>
+        <p:spPr>
+          <a:xfrm>
+            <a:off x="9327356" y="3357860"/>
+            <a:ext cx="2087760" cy="266700"/>
+          </a:xfrm>
+          <a:prstGeom prst="rect">
+            <a:avLst/>
+          </a:prstGeom>
+          <a:noFill/>
+          <a:ln>
+            <a:noFill/>
+          </a:ln>
+        </p:spPr>
+        <p:txBody>
+          <a:bodyPr anchorCtr="0" anchor="t" bIns="0" lIns="0" spcFirstLastPara="1" rIns="0" wrap="square" tIns="0">
+            <a:spAutoFit/>
+          </a:bodyPr>
+          <a:lstStyle/>
+          <a:p>
+            <a:pPr indent="0" lvl="0" marL="0" marR="0" rtl="0" algn="l">
+              <a:lnSpc>
+                <a:spcPct val="100000"/>
+              </a:lnSpc>
+              <a:spcBef>
+                <a:spcPts val="0"/>
+              </a:spcBef>
+              <a:spcAft>
+                <a:spcPts val="0"/>
+              </a:spcAft>
+              <a:buClr>
+                <a:srgbClr val="000000"/>
+              </a:buClr>
+              <a:buSzPts val="1650"/>
+              <a:buFont typeface="Arial"/>
+              <a:buNone/>
+            </a:pPr>
+            <a:r>
+              <a:rPr b="1" i="0" lang="en-US" sz="1650" u="none" cap="none" strike="noStrike">
+                <a:solidFill>
+                  <a:srgbClr val="F8FAFC"/>
+                </a:solidFill>
+                <a:latin typeface="Space Grotesk"/>
+                <a:ea typeface="Space Grotesk"/>
+                <a:cs typeface="Space Grotesk"/>
+                <a:sym typeface="Space Grotesk"/>
+              </a:rPr>
+              <a:t>Cloud Deploy</a:t>
+            </a:r>
+            <a:endParaRPr b="0" i="0" sz="1400" u="none" cap="none" strike="noStrike">
+              <a:solidFill>
+                <a:srgbClr val="000000"/>
+              </a:solidFill>
+              <a:latin typeface="Arial"/>
+              <a:ea typeface="Arial"/>
+              <a:cs typeface="Arial"/>
+              <a:sym typeface="Arial"/>
+            </a:endParaRPr>
+          </a:p>
+        </p:txBody>
+      </p:sp>
+      <p:sp>
+        <p:nvSpPr>
+          <p:cNvPr id="328" name="Google Shape;328;p14"/>
+          <p:cNvSpPr txBox="1"/>
+          <p:nvPr/>
+        </p:nvSpPr>
+        <p:spPr>
+          <a:xfrm>
+            <a:off x="9327356" y="3738860"/>
+            <a:ext cx="1988343" cy="1035843"/>
+          </a:xfrm>
+          <a:prstGeom prst="rect">
+            <a:avLst/>
+          </a:prstGeom>
+          <a:noFill/>
+          <a:ln>
+            <a:noFill/>
+          </a:ln>
+        </p:spPr>
+        <p:txBody>
+          <a:bodyPr anchorCtr="0" anchor="t" bIns="0" lIns="0" spcFirstLastPara="1" rIns="0" wrap="square" tIns="0">
+            <a:spAutoFit/>
+          </a:bodyPr>
+          <a:lstStyle/>
+          <a:p>
+            <a:pPr indent="0" lvl="0" marL="0" marR="0" rtl="0" algn="l">
+              <a:lnSpc>
+                <a:spcPct val="159921"/>
+              </a:lnSpc>
+              <a:spcBef>
+                <a:spcPts val="0"/>
+              </a:spcBef>
+              <a:spcAft>
+                <a:spcPts val="0"/>
+              </a:spcAft>
+              <a:buClr>
+                <a:srgbClr val="000000"/>
+              </a:buClr>
+              <a:buSzPts val="1275"/>
+              <a:buFont typeface="Arial"/>
+              <a:buNone/>
+            </a:pPr>
+            <a:r>
+              <a:rPr b="0" i="0" lang="en-US" sz="1275" u="none" cap="none" strike="noStrike">
+                <a:solidFill>
+                  <a:srgbClr val="94A3B8"/>
+                </a:solidFill>
+                <a:latin typeface="Plus Jakarta Sans"/>
+                <a:ea typeface="Plus Jakarta Sans"/>
+                <a:cs typeface="Plus Jakarta Sans"/>
+                <a:sym typeface="Plus Jakarta Sans"/>
+              </a:rPr>
+              <a:t>Servicios en la nube con altos estándares de seguridad y latencia reducida (&lt; 2 segundos).</a:t>
+            </a:r>
+            <a:endParaRPr b="0" i="0" sz="1400" u="none" cap="none" strike="noStrike">
+              <a:solidFill>
+                <a:srgbClr val="000000"/>
+              </a:solidFill>
+              <a:latin typeface="Arial"/>
+              <a:ea typeface="Arial"/>
+              <a:cs typeface="Arial"/>
+              <a:sym typeface="Arial"/>
+            </a:endParaRPr>
+          </a:p>
+        </p:txBody>
+      </p:sp>
+      <p:pic>
+        <p:nvPicPr>
+          <p:cNvPr descr="image.png" id="329" name="Google Shape;329;p14"/>
+          <p:cNvPicPr preferRelativeResize="0"/>
+          <p:nvPr/>
+        </p:nvPicPr>
+        <p:blipFill rotWithShape="1">
+          <a:blip r:embed="rId12">
+            <a:alphaModFix/>
+          </a:blip>
+          <a:srcRect b="0" l="0" r="0" t="0"/>
+          <a:stretch/>
+        </p:blipFill>
+        <p:spPr>
+          <a:xfrm>
+            <a:off x="1028700" y="2676822"/>
+            <a:ext cx="314325" cy="361950"/>
+          </a:xfrm>
+          <a:prstGeom prst="rect">
+            <a:avLst/>
+          </a:prstGeom>
+          <a:noFill/>
+          <a:ln>
+            <a:noFill/>
+          </a:ln>
+        </p:spPr>
+      </p:pic>
+      <p:pic>
+        <p:nvPicPr>
+          <p:cNvPr descr="image.png" id="330" name="Google Shape;330;p14"/>
+          <p:cNvPicPr preferRelativeResize="0"/>
+          <p:nvPr/>
+        </p:nvPicPr>
+        <p:blipFill rotWithShape="1">
+          <a:blip r:embed="rId13">
+            <a:alphaModFix/>
+          </a:blip>
+          <a:srcRect b="0" l="0" r="0" t="0"/>
+          <a:stretch/>
+        </p:blipFill>
+        <p:spPr>
+          <a:xfrm>
+            <a:off x="3845718" y="2676822"/>
+            <a:ext cx="314325" cy="361950"/>
+          </a:xfrm>
+          <a:prstGeom prst="rect">
+            <a:avLst/>
+          </a:prstGeom>
+          <a:noFill/>
+          <a:ln>
+            <a:noFill/>
+          </a:ln>
+        </p:spPr>
+      </p:pic>
+      <p:pic>
+        <p:nvPicPr>
+          <p:cNvPr descr="image.png" id="331" name="Google Shape;331;p14"/>
+          <p:cNvPicPr preferRelativeResize="0"/>
+          <p:nvPr/>
+        </p:nvPicPr>
+        <p:blipFill rotWithShape="1">
+          <a:blip r:embed="rId14">
+            <a:alphaModFix/>
+          </a:blip>
+          <a:srcRect b="0" l="0" r="0" t="0"/>
+          <a:stretch/>
+        </p:blipFill>
+        <p:spPr>
+          <a:xfrm>
+            <a:off x="6638925" y="2676822"/>
+            <a:ext cx="361950" cy="361950"/>
+          </a:xfrm>
+          <a:prstGeom prst="rect">
+            <a:avLst/>
+          </a:prstGeom>
+          <a:noFill/>
+          <a:ln>
+            <a:noFill/>
+          </a:ln>
+        </p:spPr>
+      </p:pic>
+      <p:pic>
+        <p:nvPicPr>
+          <p:cNvPr descr="image.png" id="332" name="Google Shape;332;p14"/>
+          <p:cNvPicPr preferRelativeResize="0"/>
+          <p:nvPr/>
+        </p:nvPicPr>
+        <p:blipFill rotWithShape="1">
+          <a:blip r:embed="rId15">
+            <a:alphaModFix/>
+          </a:blip>
+          <a:srcRect b="0" l="0" r="0" t="0"/>
+          <a:stretch/>
+        </p:blipFill>
+        <p:spPr>
+          <a:xfrm>
+            <a:off x="9408318" y="2676822"/>
+            <a:ext cx="457200" cy="361950"/>
+          </a:xfrm>
+          <a:prstGeom prst="rect">
+            <a:avLst/>
+          </a:prstGeom>
+          <a:noFill/>
+          <a:ln>
+            <a:noFill/>
+          </a:ln>
+        </p:spPr>
+      </p:pic>
+      <p:sp>
+        <p:nvSpPr>
+          <p:cNvPr id="333" name="Google Shape;333;p14"/>
+          <p:cNvSpPr txBox="1"/>
+          <p:nvPr/>
+        </p:nvSpPr>
+        <p:spPr>
+          <a:xfrm>
+            <a:off x="581025" y="485775"/>
+            <a:ext cx="11581447" cy="438150"/>
+          </a:xfrm>
+          <a:prstGeom prst="rect">
+            <a:avLst/>
+          </a:prstGeom>
+          <a:noFill/>
+          <a:ln>
+            <a:noFill/>
+          </a:ln>
+        </p:spPr>
+        <p:txBody>
+          <a:bodyPr anchorCtr="0" anchor="ctr" bIns="0" lIns="0" spcFirstLastPara="1" rIns="0" wrap="square" tIns="0">
+            <a:spAutoFit/>
+          </a:bodyPr>
+          <a:lstStyle/>
+          <a:p>
+            <a:pPr indent="0" lvl="0" marL="0" marR="0" rtl="0" algn="l">
+              <a:lnSpc>
+                <a:spcPct val="100000"/>
+              </a:lnSpc>
+              <a:spcBef>
+                <a:spcPts val="0"/>
+              </a:spcBef>
+              <a:spcAft>
+                <a:spcPts val="0"/>
+              </a:spcAft>
+              <a:buClr>
+                <a:srgbClr val="000000"/>
+              </a:buClr>
+              <a:buSzPts val="2700"/>
+              <a:buFont typeface="Arial"/>
+              <a:buNone/>
+            </a:pPr>
+            <a:r>
+              <a:rPr b="1" i="0" lang="en-US" sz="2700" u="none" cap="none" strike="noStrike">
+                <a:solidFill>
+                  <a:srgbClr val="F8FAFC"/>
+                </a:solidFill>
+                <a:latin typeface="Space Grotesk"/>
+                <a:ea typeface="Space Grotesk"/>
+                <a:cs typeface="Space Grotesk"/>
+                <a:sym typeface="Space Grotesk"/>
+              </a:rPr>
+              <a:t>Stack Tecnológico</a:t>
+            </a:r>
+            <a:endParaRPr b="0" i="0" sz="1400" u="none" cap="none" strike="noStrike">
+              <a:solidFill>
+                <a:srgbClr val="000000"/>
+              </a:solidFill>
+              <a:latin typeface="Arial"/>
+              <a:ea typeface="Arial"/>
+              <a:cs typeface="Arial"/>
+              <a:sym typeface="Arial"/>
+            </a:endParaRPr>
+          </a:p>
+        </p:txBody>
+      </p:sp>
+      <p:sp>
+        <p:nvSpPr>
+          <p:cNvPr id="334" name="Google Shape;334;p14"/>
+          <p:cNvSpPr/>
+          <p:nvPr/>
+        </p:nvSpPr>
+        <p:spPr>
+          <a:xfrm>
+            <a:off x="581025" y="923925"/>
+            <a:ext cx="57150" cy="304800"/>
+          </a:xfrm>
+          <a:prstGeom prst="roundRect">
+            <a:avLst>
+              <a:gd fmla="val 50000" name="adj"/>
+            </a:avLst>
+          </a:prstGeom>
+          <a:noFill/>
+          <a:ln>
+            <a:noFill/>
+          </a:ln>
+        </p:spPr>
+        <p:txBody>
+          <a:bodyPr anchorCtr="0" anchor="ctr" bIns="45700" lIns="91425" spcFirstLastPara="1" rIns="91425" wrap="square" tIns="45700">
+            <a:noAutofit/>
+          </a:bodyPr>
+          <a:lstStyle/>
+          <a:p>
+            <a:pPr indent="0" lvl="0" marL="0" marR="0" rtl="0" algn="ctr">
+              <a:lnSpc>
+                <a:spcPct val="100000"/>
+              </a:lnSpc>
+              <a:spcBef>
+                <a:spcPts val="0"/>
+              </a:spcBef>
+              <a:spcAft>
+                <a:spcPts val="0"/>
+              </a:spcAft>
+              <a:buClr>
+                <a:srgbClr val="000000"/>
+              </a:buClr>
+              <a:buSzPts val="1800"/>
+              <a:buFont typeface="Arial"/>
+              <a:buNone/>
+            </a:pPr>
+            <a:r>
+              <a:t/>
+            </a:r>
+            <a:endParaRPr b="0" i="0" sz="1800" u="none" cap="none" strike="noStrike">
+              <a:solidFill>
+                <a:schemeClr val="dk1"/>
+              </a:solidFill>
+              <a:latin typeface="Calibri"/>
+              <a:ea typeface="Calibri"/>
+              <a:cs typeface="Calibri"/>
+              <a:sym typeface="Calibri"/>
+            </a:endParaRPr>
+          </a:p>
+        </p:txBody>
+      </p:sp>
+    </p:spTree>
+  </p:cSld>
+  <p:clrMapOvr>
+    <a:masterClrMapping/>
+  </p:clrMapOvr>
+</p:sld>
+</file>
+
+<file path=ppt/slides/slide16.xml><?xml version="1.0" encoding="utf-8"?>
+<p:sld xmlns:a="http://schemas.openxmlformats.org/drawingml/2006/main" xmlns:r="http://schemas.openxmlformats.org/officeDocument/2006/relationships" xmlns:mc="http://schemas.openxmlformats.org/markup-compatibility/2006" xmlns:mv="urn:schemas-microsoft-com:mac:vml" xmlns:p="http://schemas.openxmlformats.org/presentationml/2006/main" xmlns:c="http://schemas.openxmlformats.org/drawingml/2006/chart" xmlns:dgm="http://schemas.openxmlformats.org/drawingml/2006/diagram" xmlns:o="urn:schemas-microsoft-com:office:office" xmlns:v="urn:schemas-microsoft-com:vml" xmlns:pvml="urn:schemas-microsoft-com:office:powerpoint" xmlns:com="http://schemas.openxmlformats.org/drawingml/2006/compatibility" xmlns:p14="http://schemas.microsoft.com/office/powerpoint/2010/main" xmlns:p15="http://schemas.microsoft.com/office/powerpoint/2012/main" xmlns:ahyp="http://schemas.microsoft.com/office/drawing/2018/hyperlinkcolor">
+  <p:cSld>
+    <p:bg>
+      <p:bgPr>
+        <a:solidFill>
+          <a:srgbClr val="0F172A"/>
+        </a:solidFill>
+      </p:bgPr>
+    </p:bg>
+    <p:spTree>
+      <p:nvGrpSpPr>
+        <p:cNvPr id="338" name="Shape 338"/>
+        <p:cNvGrpSpPr/>
+        <p:nvPr/>
+      </p:nvGrpSpPr>
+      <p:grpSpPr>
+        <a:xfrm>
+          <a:off x="0" y="0"/>
+          <a:ext cx="0" cy="0"/>
+          <a:chOff x="0" y="0"/>
+          <a:chExt cx="0" cy="0"/>
+        </a:xfrm>
+      </p:grpSpPr>
+      <p:pic>
+        <p:nvPicPr>
+          <p:cNvPr descr="image.png" id="339" name="Google Shape;339;p15"/>
+          <p:cNvPicPr preferRelativeResize="0"/>
+          <p:nvPr/>
+        </p:nvPicPr>
+        <p:blipFill rotWithShape="1">
+          <a:blip r:embed="rId3">
+            <a:alphaModFix/>
+          </a:blip>
+          <a:srcRect b="0" l="0" r="0" t="0"/>
+          <a:stretch/>
+        </p:blipFill>
+        <p:spPr>
+          <a:xfrm>
+            <a:off x="0" y="0"/>
+            <a:ext cx="12192000" cy="6858000"/>
+          </a:xfrm>
+          <a:prstGeom prst="rect">
+            <a:avLst/>
+          </a:prstGeom>
+          <a:noFill/>
+          <a:ln>
+            <a:noFill/>
+          </a:ln>
+        </p:spPr>
+      </p:pic>
+      <p:pic>
+        <p:nvPicPr>
+          <p:cNvPr descr="image.png" id="340" name="Google Shape;340;p15"/>
+          <p:cNvPicPr preferRelativeResize="0"/>
+          <p:nvPr/>
+        </p:nvPicPr>
+        <p:blipFill rotWithShape="1">
+          <a:blip r:embed="rId4">
+            <a:alphaModFix/>
+          </a:blip>
+          <a:srcRect b="0" l="0" r="0" t="0"/>
+          <a:stretch/>
+        </p:blipFill>
+        <p:spPr>
+          <a:xfrm>
+            <a:off x="581025" y="2719387"/>
+            <a:ext cx="5348287" cy="2143125"/>
+          </a:xfrm>
+          <a:prstGeom prst="rect">
+            <a:avLst/>
+          </a:prstGeom>
+          <a:noFill/>
+          <a:ln>
+            <a:noFill/>
+          </a:ln>
+        </p:spPr>
+      </p:pic>
+      <p:sp>
+        <p:nvSpPr>
+          <p:cNvPr id="341" name="Google Shape;341;p15"/>
           <p:cNvSpPr txBox="1"/>
           <p:nvPr/>
         </p:nvSpPr>
@@ -22155,6 +22085,252 @@
                 <a:sym typeface="Space Grotesk"/>
               </a:rPr>
               <a:t>3-4</a:t>
+            </a:r>
+            <a:endParaRPr b="0" i="0" sz="1400" u="none" cap="none" strike="noStrike">
+              <a:solidFill>
+                <a:srgbClr val="000000"/>
+              </a:solidFill>
+              <a:latin typeface="Arial"/>
+              <a:ea typeface="Arial"/>
+              <a:cs typeface="Arial"/>
+              <a:sym typeface="Arial"/>
+            </a:endParaRPr>
+          </a:p>
+        </p:txBody>
+      </p:sp>
+      <p:sp>
+        <p:nvSpPr>
+          <p:cNvPr id="342" name="Google Shape;342;p15"/>
+          <p:cNvSpPr txBox="1"/>
+          <p:nvPr/>
+        </p:nvSpPr>
+        <p:spPr>
+          <a:xfrm>
+            <a:off x="971550" y="4205287"/>
+            <a:ext cx="4567237" cy="266700"/>
+          </a:xfrm>
+          <a:prstGeom prst="rect">
+            <a:avLst/>
+          </a:prstGeom>
+          <a:noFill/>
+          <a:ln>
+            <a:noFill/>
+          </a:ln>
+        </p:spPr>
+        <p:txBody>
+          <a:bodyPr anchorCtr="0" anchor="t" bIns="0" lIns="0" spcFirstLastPara="1" rIns="0" wrap="square" tIns="0">
+            <a:spAutoFit/>
+          </a:bodyPr>
+          <a:lstStyle/>
+          <a:p>
+            <a:pPr indent="0" lvl="0" marL="0" marR="0" rtl="0" algn="ctr">
+              <a:lnSpc>
+                <a:spcPct val="100000"/>
+              </a:lnSpc>
+              <a:spcBef>
+                <a:spcPts val="0"/>
+              </a:spcBef>
+              <a:spcAft>
+                <a:spcPts val="0"/>
+              </a:spcAft>
+              <a:buClr>
+                <a:srgbClr val="000000"/>
+              </a:buClr>
+              <a:buSzPts val="1650"/>
+              <a:buFont typeface="Arial"/>
+              <a:buNone/>
+            </a:pPr>
+            <a:r>
+              <a:rPr b="0" i="0" lang="en-US" sz="1650" u="none" cap="none" strike="noStrike">
+                <a:solidFill>
+                  <a:srgbClr val="F8FAFC"/>
+                </a:solidFill>
+                <a:latin typeface="Plus Jakarta Sans SemiBold"/>
+                <a:ea typeface="Plus Jakarta Sans SemiBold"/>
+                <a:cs typeface="Plus Jakarta Sans SemiBold"/>
+                <a:sym typeface="Plus Jakarta Sans SemiBold"/>
+              </a:rPr>
+              <a:t>Meses para el ROI Total</a:t>
+            </a:r>
+            <a:endParaRPr b="0" i="0" sz="1400" u="none" cap="none" strike="noStrike">
+              <a:solidFill>
+                <a:srgbClr val="000000"/>
+              </a:solidFill>
+              <a:latin typeface="Arial"/>
+              <a:ea typeface="Arial"/>
+              <a:cs typeface="Arial"/>
+              <a:sym typeface="Arial"/>
+            </a:endParaRPr>
+          </a:p>
+        </p:txBody>
+      </p:sp>
+      <p:sp>
+        <p:nvSpPr>
+          <p:cNvPr id="343" name="Google Shape;343;p15"/>
+          <p:cNvSpPr txBox="1"/>
+          <p:nvPr/>
+        </p:nvSpPr>
+        <p:spPr>
+          <a:xfrm>
+            <a:off x="6262687" y="2829222"/>
+            <a:ext cx="5615701" cy="342900"/>
+          </a:xfrm>
+          <a:prstGeom prst="rect">
+            <a:avLst/>
+          </a:prstGeom>
+          <a:noFill/>
+          <a:ln>
+            <a:noFill/>
+          </a:ln>
+        </p:spPr>
+        <p:txBody>
+          <a:bodyPr anchorCtr="0" anchor="t" bIns="0" lIns="0" spcFirstLastPara="1" rIns="0" wrap="square" tIns="0">
+            <a:spAutoFit/>
+          </a:bodyPr>
+          <a:lstStyle/>
+          <a:p>
+            <a:pPr indent="0" lvl="0" marL="0" marR="0" rtl="0" algn="l">
+              <a:lnSpc>
+                <a:spcPct val="100000"/>
+              </a:lnSpc>
+              <a:spcBef>
+                <a:spcPts val="0"/>
+              </a:spcBef>
+              <a:spcAft>
+                <a:spcPts val="0"/>
+              </a:spcAft>
+              <a:buClr>
+                <a:srgbClr val="000000"/>
+              </a:buClr>
+              <a:buSzPts val="2100"/>
+              <a:buFont typeface="Arial"/>
+              <a:buNone/>
+            </a:pPr>
+            <a:r>
+              <a:rPr b="1" i="0" lang="en-US" sz="2100" u="none" cap="none" strike="noStrike">
+                <a:solidFill>
+                  <a:srgbClr val="F8FAFC"/>
+                </a:solidFill>
+                <a:latin typeface="Space Grotesk"/>
+                <a:ea typeface="Space Grotesk"/>
+                <a:cs typeface="Space Grotesk"/>
+                <a:sym typeface="Space Grotesk"/>
+              </a:rPr>
+              <a:t>Rentabilidad Inmediata</a:t>
+            </a:r>
+            <a:endParaRPr b="0" i="0" sz="1400" u="none" cap="none" strike="noStrike">
+              <a:solidFill>
+                <a:srgbClr val="000000"/>
+              </a:solidFill>
+              <a:latin typeface="Arial"/>
+              <a:ea typeface="Arial"/>
+              <a:cs typeface="Arial"/>
+              <a:sym typeface="Arial"/>
+            </a:endParaRPr>
+          </a:p>
+        </p:txBody>
+      </p:sp>
+      <p:sp>
+        <p:nvSpPr>
+          <p:cNvPr id="344" name="Google Shape;344;p15"/>
+          <p:cNvSpPr txBox="1"/>
+          <p:nvPr/>
+        </p:nvSpPr>
+        <p:spPr>
+          <a:xfrm>
+            <a:off x="6262687" y="3314997"/>
+            <a:ext cx="5348287" cy="776882"/>
+          </a:xfrm>
+          <a:prstGeom prst="rect">
+            <a:avLst/>
+          </a:prstGeom>
+          <a:noFill/>
+          <a:ln>
+            <a:noFill/>
+          </a:ln>
+        </p:spPr>
+        <p:txBody>
+          <a:bodyPr anchorCtr="0" anchor="t" bIns="0" lIns="0" spcFirstLastPara="1" rIns="0" wrap="square" tIns="0">
+            <a:spAutoFit/>
+          </a:bodyPr>
+          <a:lstStyle/>
+          <a:p>
+            <a:pPr indent="0" lvl="0" marL="0" marR="0" rtl="0" algn="l">
+              <a:lnSpc>
+                <a:spcPct val="159921"/>
+              </a:lnSpc>
+              <a:spcBef>
+                <a:spcPts val="0"/>
+              </a:spcBef>
+              <a:spcAft>
+                <a:spcPts val="0"/>
+              </a:spcAft>
+              <a:buClr>
+                <a:srgbClr val="000000"/>
+              </a:buClr>
+              <a:buSzPts val="1275"/>
+              <a:buFont typeface="Arial"/>
+              <a:buNone/>
+            </a:pPr>
+            <a:r>
+              <a:rPr b="0" i="0" lang="en-US" sz="1275" u="none" cap="none" strike="noStrike">
+                <a:solidFill>
+                  <a:srgbClr val="94A3B8"/>
+                </a:solidFill>
+                <a:latin typeface="Plus Jakarta Sans"/>
+                <a:ea typeface="Plus Jakarta Sans"/>
+                <a:cs typeface="Plus Jakarta Sans"/>
+                <a:sym typeface="Plus Jakarta Sans"/>
+              </a:rPr>
+              <a:t>Con una inversión inicial acotada de </a:t>
+            </a:r>
+            <a:r>
+              <a:rPr b="1" i="0" lang="en-US" sz="1275" u="none" cap="none" strike="noStrike">
+                <a:solidFill>
+                  <a:srgbClr val="00D2FF"/>
+                </a:solidFill>
+                <a:latin typeface="Plus Jakarta Sans"/>
+                <a:ea typeface="Plus Jakarta Sans"/>
+                <a:cs typeface="Plus Jakarta Sans"/>
+                <a:sym typeface="Plus Jakarta Sans"/>
+              </a:rPr>
+              <a:t>$3.200.000 CLP</a:t>
+            </a:r>
+            <a:r>
+              <a:rPr b="0" i="0" lang="en-US" sz="1275" u="none" cap="none" strike="noStrike">
+                <a:solidFill>
+                  <a:srgbClr val="94A3B8"/>
+                </a:solidFill>
+                <a:latin typeface="Plus Jakarta Sans"/>
+                <a:ea typeface="Plus Jakarta Sans"/>
+                <a:cs typeface="Plus Jakarta Sans"/>
+                <a:sym typeface="Plus Jakarta Sans"/>
+              </a:rPr>
+              <a:t>, el sistema recupera más de </a:t>
+            </a:r>
+            <a:r>
+              <a:rPr b="1" i="0" lang="en-US" sz="1275" u="none" cap="none" strike="noStrike">
+                <a:solidFill>
+                  <a:srgbClr val="00D2FF"/>
+                </a:solidFill>
+                <a:latin typeface="Plus Jakarta Sans"/>
+                <a:ea typeface="Plus Jakarta Sans"/>
+                <a:cs typeface="Plus Jakarta Sans"/>
+                <a:sym typeface="Plus Jakarta Sans"/>
+              </a:rPr>
+              <a:t>$1.100.000 CLP mensuales</a:t>
+            </a:r>
+            <a:r>
+              <a:rPr b="0" i="0" lang="en-US" sz="1275" u="none" cap="none" strike="noStrike">
+                <a:solidFill>
+                  <a:srgbClr val="94A3B8"/>
+                </a:solidFill>
+                <a:latin typeface="Plus Jakarta Sans"/>
+                <a:ea typeface="Plus Jakarta Sans"/>
+                <a:cs typeface="Plus Jakarta Sans"/>
+                <a:sym typeface="Plus Jakarta Sans"/>
+              </a:rPr>
+              <a:t> en ventas anteriormente perdidas por falta de stock.</a:t>
             </a:r>
             <a:endParaRPr b="0" i="0" sz="1400" u="none" cap="none" strike="noStrike">
               <a:solidFill>
@@ -22176,8 +22352,8 @@
         </p:nvSpPr>
         <p:spPr>
           <a:xfrm>
-            <a:off x="971550" y="4205287"/>
-            <a:ext cx="4567237" cy="266700"/>
+            <a:off x="6262687" y="4234755"/>
+            <a:ext cx="5348287" cy="517921"/>
           </a:xfrm>
           <a:prstGeom prst="rect">
             <a:avLst/>
@@ -22193,34 +22369,58 @@
           </a:bodyPr>
           <a:lstStyle/>
           <a:p>
-            <a:pPr indent="0" lvl="0" marL="0" marR="0" rtl="0" algn="ctr">
-              <a:lnSpc>
-                <a:spcPct val="100000"/>
-              </a:lnSpc>
-              <a:spcBef>
-                <a:spcPts val="0"/>
-              </a:spcBef>
-              <a:spcAft>
-                <a:spcPts val="0"/>
-              </a:spcAft>
-              <a:buClr>
-                <a:srgbClr val="000000"/>
-              </a:buClr>
-              <a:buSzPts val="1650"/>
+            <a:pPr indent="0" lvl="0" marL="0" marR="0" rtl="0" algn="l">
+              <a:lnSpc>
+                <a:spcPct val="159921"/>
+              </a:lnSpc>
+              <a:spcBef>
+                <a:spcPts val="0"/>
+              </a:spcBef>
+              <a:spcAft>
+                <a:spcPts val="0"/>
+              </a:spcAft>
+              <a:buClr>
+                <a:srgbClr val="000000"/>
+              </a:buClr>
+              <a:buSzPts val="1275"/>
               <a:buFont typeface="Arial"/>
               <a:buNone/>
             </a:pPr>
             <a:r>
-              <a:rPr b="0" i="0" lang="en-US" sz="1650" u="none" cap="none" strike="noStrike">
-                <a:solidFill>
-                  <a:srgbClr val="F8FAFC"/>
-                </a:solidFill>
-                <a:latin typeface="Plus Jakarta Sans SemiBold"/>
-                <a:ea typeface="Plus Jakarta Sans SemiBold"/>
-                <a:cs typeface="Plus Jakarta Sans SemiBold"/>
-                <a:sym typeface="Plus Jakarta Sans SemiBold"/>
+              <a:rPr b="0" i="0" lang="en-US" sz="1275" u="none" cap="none" strike="noStrike">
+                <a:solidFill>
+                  <a:srgbClr val="94A3B8"/>
+                </a:solidFill>
+                <a:latin typeface="Plus Jakarta Sans"/>
+                <a:ea typeface="Plus Jakarta Sans"/>
+                <a:cs typeface="Plus Jakarta Sans"/>
+                <a:sym typeface="Plus Jakarta Sans"/>
               </a:rPr>
-              <a:t>Meses para el ROI Total</a:t>
+              <a:t>Además, libera </a:t>
+            </a:r>
+            <a:r>
+              <a:rPr b="1" i="0" lang="en-US" sz="1275" u="none" cap="none" strike="noStrike">
+                <a:solidFill>
+                  <a:srgbClr val="00D2FF"/>
+                </a:solidFill>
+                <a:latin typeface="Plus Jakarta Sans"/>
+                <a:ea typeface="Plus Jakarta Sans"/>
+                <a:cs typeface="Plus Jakarta Sans"/>
+                <a:sym typeface="Plus Jakarta Sans"/>
+              </a:rPr>
+              <a:t>$3.500.000 CLP</a:t>
+            </a:r>
+            <a:r>
+              <a:rPr b="0" i="0" lang="en-US" sz="1275" u="none" cap="none" strike="noStrike">
+                <a:solidFill>
+                  <a:srgbClr val="94A3B8"/>
+                </a:solidFill>
+                <a:latin typeface="Plus Jakarta Sans"/>
+                <a:ea typeface="Plus Jakarta Sans"/>
+                <a:cs typeface="Plus Jakarta Sans"/>
+                <a:sym typeface="Plus Jakarta Sans"/>
+              </a:rPr>
+              <a:t> de capital de trabajo inmovilizado en compras ineficientes durante los primeros 6 meses.</a:t>
             </a:r>
             <a:endParaRPr b="0" i="0" sz="1400" u="none" cap="none" strike="noStrike">
               <a:solidFill>
@@ -22242,8 +22442,8 @@
         </p:nvSpPr>
         <p:spPr>
           <a:xfrm>
-            <a:off x="6262687" y="2829222"/>
-            <a:ext cx="5615701" cy="342900"/>
+            <a:off x="581025" y="485775"/>
+            <a:ext cx="11581447" cy="438150"/>
           </a:xfrm>
           <a:prstGeom prst="rect">
             <a:avLst/>
@@ -22254,7 +22454,7 @@
           </a:ln>
         </p:spPr>
         <p:txBody>
-          <a:bodyPr anchorCtr="0" anchor="t" bIns="0" lIns="0" spcFirstLastPara="1" rIns="0" wrap="square" tIns="0">
+          <a:bodyPr anchorCtr="0" anchor="ctr" bIns="0" lIns="0" spcFirstLastPara="1" rIns="0" wrap="square" tIns="0">
             <a:spAutoFit/>
           </a:bodyPr>
           <a:lstStyle/>
@@ -22272,12 +22472,12 @@
               <a:buClr>
                 <a:srgbClr val="000000"/>
               </a:buClr>
-              <a:buSzPts val="2100"/>
+              <a:buSzPts val="2700"/>
               <a:buFont typeface="Arial"/>
               <a:buNone/>
             </a:pPr>
             <a:r>
-              <a:rPr b="1" i="0" lang="en-US" sz="2100" u="none" cap="none" strike="noStrike">
+              <a:rPr b="1" i="0" lang="en-US" sz="2700" u="none" cap="none" strike="noStrike">
                 <a:solidFill>
                   <a:srgbClr val="F8FAFC"/>
                 </a:solidFill>
@@ -22286,7 +22486,7 @@
                 <a:cs typeface="Space Grotesk"/>
                 <a:sym typeface="Space Grotesk"/>
               </a:rPr>
-              <a:t>Rentabilidad Inmediata</a:t>
+              <a:t>Impacto Financiero Prometido</a:t>
             </a:r>
             <a:endParaRPr b="0" i="0" sz="1400" u="none" cap="none" strike="noStrike">
               <a:solidFill>
@@ -22303,13 +22503,104 @@
       <p:sp>
         <p:nvSpPr>
           <p:cNvPr id="347" name="Google Shape;347;p15"/>
+          <p:cNvSpPr/>
+          <p:nvPr/>
+        </p:nvSpPr>
+        <p:spPr>
+          <a:xfrm>
+            <a:off x="581025" y="923925"/>
+            <a:ext cx="57150" cy="304800"/>
+          </a:xfrm>
+          <a:prstGeom prst="roundRect">
+            <a:avLst>
+              <a:gd fmla="val 50000" name="adj"/>
+            </a:avLst>
+          </a:prstGeom>
+          <a:noFill/>
+          <a:ln>
+            <a:noFill/>
+          </a:ln>
+        </p:spPr>
+        <p:txBody>
+          <a:bodyPr anchorCtr="0" anchor="ctr" bIns="45700" lIns="91425" spcFirstLastPara="1" rIns="91425" wrap="square" tIns="45700">
+            <a:noAutofit/>
+          </a:bodyPr>
+          <a:lstStyle/>
+          <a:p>
+            <a:pPr indent="0" lvl="0" marL="0" marR="0" rtl="0" algn="ctr">
+              <a:lnSpc>
+                <a:spcPct val="100000"/>
+              </a:lnSpc>
+              <a:spcBef>
+                <a:spcPts val="0"/>
+              </a:spcBef>
+              <a:spcAft>
+                <a:spcPts val="0"/>
+              </a:spcAft>
+              <a:buClr>
+                <a:srgbClr val="000000"/>
+              </a:buClr>
+              <a:buSzPts val="1800"/>
+              <a:buFont typeface="Arial"/>
+              <a:buNone/>
+            </a:pPr>
+            <a:r>
+              <a:t/>
+            </a:r>
+            <a:endParaRPr b="0" i="0" sz="1800" u="none" cap="none" strike="noStrike">
+              <a:solidFill>
+                <a:schemeClr val="dk1"/>
+              </a:solidFill>
+              <a:latin typeface="Calibri"/>
+              <a:ea typeface="Calibri"/>
+              <a:cs typeface="Calibri"/>
+              <a:sym typeface="Calibri"/>
+            </a:endParaRPr>
+          </a:p>
+        </p:txBody>
+      </p:sp>
+    </p:spTree>
+  </p:cSld>
+  <p:clrMapOvr>
+    <a:masterClrMapping/>
+  </p:clrMapOvr>
+</p:sld>
+</file>
+
+<file path=ppt/slides/slide17.xml><?xml version="1.0" encoding="utf-8"?>
+<p:sld xmlns:a="http://schemas.openxmlformats.org/drawingml/2006/main" xmlns:r="http://schemas.openxmlformats.org/officeDocument/2006/relationships" xmlns:mc="http://schemas.openxmlformats.org/markup-compatibility/2006" xmlns:mv="urn:schemas-microsoft-com:mac:vml" xmlns:p="http://schemas.openxmlformats.org/presentationml/2006/main" xmlns:c="http://schemas.openxmlformats.org/drawingml/2006/chart" xmlns:dgm="http://schemas.openxmlformats.org/drawingml/2006/diagram" xmlns:o="urn:schemas-microsoft-com:office:office" xmlns:v="urn:schemas-microsoft-com:vml" xmlns:pvml="urn:schemas-microsoft-com:office:powerpoint" xmlns:com="http://schemas.openxmlformats.org/drawingml/2006/compatibility" xmlns:p14="http://schemas.microsoft.com/office/powerpoint/2010/main" xmlns:p15="http://schemas.microsoft.com/office/powerpoint/2012/main" xmlns:ahyp="http://schemas.microsoft.com/office/drawing/2018/hyperlinkcolor">
+  <p:cSld>
+    <p:bg>
+      <p:bgPr>
+        <a:solidFill>
+          <a:srgbClr val="0F172A"/>
+        </a:solidFill>
+      </p:bgPr>
+    </p:bg>
+    <p:spTree>
+      <p:nvGrpSpPr>
+        <p:cNvPr id="351" name="Shape 351"/>
+        <p:cNvGrpSpPr/>
+        <p:nvPr/>
+      </p:nvGrpSpPr>
+      <p:grpSpPr>
+        <a:xfrm>
+          <a:off x="0" y="0"/>
+          <a:ext cx="0" cy="0"/>
+          <a:chOff x="0" y="0"/>
+          <a:chExt cx="0" cy="0"/>
+        </a:xfrm>
+      </p:grpSpPr>
+      <p:sp>
+        <p:nvSpPr>
+          <p:cNvPr id="352" name="Google Shape;352;g3fa4490e163_0_3"/>
           <p:cNvSpPr txBox="1"/>
           <p:nvPr/>
         </p:nvSpPr>
         <p:spPr>
           <a:xfrm>
-            <a:off x="6262687" y="3314997"/>
-            <a:ext cx="5348287" cy="776882"/>
+            <a:off x="419915" y="1782150"/>
+            <a:ext cx="9812400" cy="3528600"/>
           </a:xfrm>
           <a:prstGeom prst="rect">
             <a:avLst/>
@@ -22325,12 +22616,188 @@
           </a:bodyPr>
           <a:lstStyle/>
           <a:p>
+            <a:pPr indent="0" lvl="0" marL="0" rtl="0" algn="l">
+              <a:lnSpc>
+                <a:spcPct val="115000"/>
+              </a:lnSpc>
+              <a:spcBef>
+                <a:spcPts val="1200"/>
+              </a:spcBef>
+              <a:spcAft>
+                <a:spcPts val="0"/>
+              </a:spcAft>
+              <a:buClr>
+                <a:schemeClr val="dk1"/>
+              </a:buClr>
+              <a:buSzPts val="1100"/>
+              <a:buFont typeface="Arial"/>
+              <a:buNone/>
+            </a:pPr>
+            <a:r>
+              <a:rPr lang="en-US" sz="1500">
+                <a:solidFill>
+                  <a:schemeClr val="lt1"/>
+                </a:solidFill>
+              </a:rPr>
+              <a:t>El proyecto </a:t>
+            </a:r>
+            <a:r>
+              <a:rPr b="1" lang="en-US" sz="1500">
+                <a:solidFill>
+                  <a:schemeClr val="lt1"/>
+                </a:solidFill>
+              </a:rPr>
+              <a:t>Zapatillas Duoc: E-Commerce &amp; Retail Analytics</a:t>
+            </a:r>
+            <a:r>
+              <a:rPr lang="en-US" sz="1500">
+                <a:solidFill>
+                  <a:schemeClr val="lt1"/>
+                </a:solidFill>
+              </a:rPr>
+              <a:t> demuestra cómo la tecnología puede transformar una problemática real del comercio local en una oportunidad de mejora y crecimiento.</a:t>
+            </a:r>
+            <a:endParaRPr sz="1500">
+              <a:solidFill>
+                <a:schemeClr val="lt1"/>
+              </a:solidFill>
+            </a:endParaRPr>
+          </a:p>
+          <a:p>
+            <a:pPr indent="0" lvl="0" marL="0" rtl="0" algn="l">
+              <a:lnSpc>
+                <a:spcPct val="115000"/>
+              </a:lnSpc>
+              <a:spcBef>
+                <a:spcPts val="1200"/>
+              </a:spcBef>
+              <a:spcAft>
+                <a:spcPts val="0"/>
+              </a:spcAft>
+              <a:buClr>
+                <a:schemeClr val="dk1"/>
+              </a:buClr>
+              <a:buSzPts val="1100"/>
+              <a:buFont typeface="Arial"/>
+              <a:buNone/>
+            </a:pPr>
+            <a:r>
+              <a:rPr lang="en-US" sz="1500">
+                <a:solidFill>
+                  <a:schemeClr val="lt1"/>
+                </a:solidFill>
+              </a:rPr>
+              <a:t>Mediante la integración de un </a:t>
+            </a:r>
+            <a:r>
+              <a:rPr b="1" lang="en-US" sz="1500">
+                <a:solidFill>
+                  <a:schemeClr val="lt1"/>
+                </a:solidFill>
+              </a:rPr>
+              <a:t>portal E-Commerce, una base de datos PostgreSQL, un motor de analítica predictiva y un dashboard administrativo</a:t>
+            </a:r>
+            <a:r>
+              <a:rPr lang="en-US" sz="1500">
+                <a:solidFill>
+                  <a:schemeClr val="lt1"/>
+                </a:solidFill>
+              </a:rPr>
+              <a:t>, se propone una solución capaz de centralizar las ventas, mejorar la gestión del inventario y anticipar posibles quiebres de stock.</a:t>
+            </a:r>
+            <a:endParaRPr sz="1500">
+              <a:solidFill>
+                <a:schemeClr val="lt1"/>
+              </a:solidFill>
+            </a:endParaRPr>
+          </a:p>
+          <a:p>
+            <a:pPr indent="0" lvl="0" marL="0" rtl="0" algn="l">
+              <a:lnSpc>
+                <a:spcPct val="115000"/>
+              </a:lnSpc>
+              <a:spcBef>
+                <a:spcPts val="1200"/>
+              </a:spcBef>
+              <a:spcAft>
+                <a:spcPts val="0"/>
+              </a:spcAft>
+              <a:buClr>
+                <a:schemeClr val="dk1"/>
+              </a:buClr>
+              <a:buSzPts val="1100"/>
+              <a:buFont typeface="Arial"/>
+              <a:buNone/>
+            </a:pPr>
+            <a:r>
+              <a:rPr lang="en-US" sz="1500">
+                <a:solidFill>
+                  <a:schemeClr val="lt1"/>
+                </a:solidFill>
+              </a:rPr>
+              <a:t>De esta manera, el sistema no solo busca recuperar ventas que actualmente se pierden por falta de tallas disponibles, sino también optimizar las compras y reducir el capital inmovilizado en productos de baja rotación.</a:t>
+            </a:r>
+            <a:endParaRPr sz="1500">
+              <a:solidFill>
+                <a:schemeClr val="lt1"/>
+              </a:solidFill>
+            </a:endParaRPr>
+          </a:p>
+          <a:p>
+            <a:pPr indent="0" lvl="0" marL="0" rtl="0" algn="l">
+              <a:lnSpc>
+                <a:spcPct val="115000"/>
+              </a:lnSpc>
+              <a:spcBef>
+                <a:spcPts val="1200"/>
+              </a:spcBef>
+              <a:spcAft>
+                <a:spcPts val="0"/>
+              </a:spcAft>
+              <a:buClr>
+                <a:schemeClr val="dk1"/>
+              </a:buClr>
+              <a:buSzPts val="1100"/>
+              <a:buFont typeface="Arial"/>
+              <a:buNone/>
+            </a:pPr>
+            <a:r>
+              <a:rPr lang="en-US" sz="1500">
+                <a:solidFill>
+                  <a:schemeClr val="lt1"/>
+                </a:solidFill>
+              </a:rPr>
+              <a:t>En conclusión, </a:t>
+            </a:r>
+            <a:r>
+              <a:rPr b="1" lang="en-US" sz="1500">
+                <a:solidFill>
+                  <a:schemeClr val="lt1"/>
+                </a:solidFill>
+              </a:rPr>
+              <a:t>Zapatillas Duoc entrega una solución tecnológica escalable, orientada a la toma de decisiones basada en datos y con un impacto comercial concreto</a:t>
+            </a:r>
+            <a:r>
+              <a:rPr lang="en-US" sz="1500">
+                <a:solidFill>
+                  <a:schemeClr val="lt1"/>
+                </a:solidFill>
+              </a:rPr>
+              <a:t>, demostrando el valor de la Ingeniería en Informática para resolver necesidades reales de una empresa.</a:t>
+            </a:r>
+            <a:endParaRPr sz="1500">
+              <a:solidFill>
+                <a:schemeClr val="lt1"/>
+              </a:solidFill>
+            </a:endParaRPr>
+          </a:p>
+          <a:p>
             <a:pPr indent="0" lvl="0" marL="0" marR="0" rtl="0" algn="l">
               <a:lnSpc>
                 <a:spcPct val="159921"/>
               </a:lnSpc>
               <a:spcBef>
-                <a:spcPts val="0"/>
+                <a:spcPts val="1200"/>
               </a:spcBef>
               <a:spcAft>
                 <a:spcPts val="0"/>
@@ -22343,66 +22810,75 @@
               <a:buNone/>
             </a:pPr>
             <a:r>
-              <a:rPr b="0" i="0" lang="en-US" sz="1275" u="none" cap="none" strike="noStrike">
-                <a:solidFill>
-                  <a:srgbClr val="94A3B8"/>
-                </a:solidFill>
-                <a:latin typeface="Plus Jakarta Sans"/>
-                <a:ea typeface="Plus Jakarta Sans"/>
-                <a:cs typeface="Plus Jakarta Sans"/>
-                <a:sym typeface="Plus Jakarta Sans"/>
+              <a:t/>
+            </a:r>
+            <a:endParaRPr sz="1675">
+              <a:solidFill>
+                <a:schemeClr val="lt1"/>
+              </a:solidFill>
+              <a:latin typeface="Plus Jakarta Sans"/>
+              <a:ea typeface="Plus Jakarta Sans"/>
+              <a:cs typeface="Plus Jakarta Sans"/>
+              <a:sym typeface="Plus Jakarta Sans"/>
+            </a:endParaRPr>
+          </a:p>
+        </p:txBody>
+      </p:sp>
+      <p:sp>
+        <p:nvSpPr>
+          <p:cNvPr id="353" name="Google Shape;353;g3fa4490e163_0_3"/>
+          <p:cNvSpPr txBox="1"/>
+          <p:nvPr/>
+        </p:nvSpPr>
+        <p:spPr>
+          <a:xfrm>
+            <a:off x="581025" y="485775"/>
+            <a:ext cx="11581500" cy="477300"/>
+          </a:xfrm>
+          <a:prstGeom prst="rect">
+            <a:avLst/>
+          </a:prstGeom>
+          <a:noFill/>
+          <a:ln>
+            <a:noFill/>
+          </a:ln>
+        </p:spPr>
+        <p:txBody>
+          <a:bodyPr anchorCtr="0" anchor="ctr" bIns="0" lIns="0" spcFirstLastPara="1" rIns="0" wrap="square" tIns="0">
+            <a:spAutoFit/>
+          </a:bodyPr>
+          <a:lstStyle/>
+          <a:p>
+            <a:pPr indent="0" lvl="0" marL="0" marR="0" rtl="0" algn="l">
+              <a:lnSpc>
+                <a:spcPct val="100000"/>
+              </a:lnSpc>
+              <a:spcBef>
+                <a:spcPts val="0"/>
+              </a:spcBef>
+              <a:spcAft>
+                <a:spcPts val="0"/>
+              </a:spcAft>
+              <a:buClr>
+                <a:srgbClr val="000000"/>
+              </a:buClr>
+              <a:buSzPts val="2700"/>
+              <a:buFont typeface="Arial"/>
+              <a:buNone/>
+            </a:pPr>
+            <a:r>
+              <a:rPr b="1" lang="en-US" sz="3100">
+                <a:solidFill>
+                  <a:srgbClr val="F8FAFC"/>
+                </a:solidFill>
+                <a:latin typeface="Space Grotesk"/>
+                <a:ea typeface="Space Grotesk"/>
+                <a:cs typeface="Space Grotesk"/>
+                <a:sym typeface="Space Grotesk"/>
               </a:rPr>
-              <a:t>Con una inversión inicial acotada de </a:t>
+              <a:t>Conclusión</a:t>
             </a:r>
-            <a:r>
-              <a:rPr b="1" i="0" lang="en-US" sz="1275" u="none" cap="none" strike="noStrike">
-                <a:solidFill>
-                  <a:srgbClr val="00D2FF"/>
-                </a:solidFill>
-                <a:latin typeface="Plus Jakarta Sans"/>
-                <a:ea typeface="Plus Jakarta Sans"/>
-                <a:cs typeface="Plus Jakarta Sans"/>
-                <a:sym typeface="Plus Jakarta Sans"/>
-              </a:rPr>
-              <a:t>$3.200.000 CLP</a:t>
-            </a:r>
-            <a:r>
-              <a:rPr b="0" i="0" lang="en-US" sz="1275" u="none" cap="none" strike="noStrike">
-                <a:solidFill>
-                  <a:srgbClr val="94A3B8"/>
-                </a:solidFill>
-                <a:latin typeface="Plus Jakarta Sans"/>
-                <a:ea typeface="Plus Jakarta Sans"/>
-                <a:cs typeface="Plus Jakarta Sans"/>
-                <a:sym typeface="Plus Jakarta Sans"/>
-              </a:rPr>
-              <a:t>, el sistema recupera más de </a:t>
-            </a:r>
-            <a:r>
-              <a:rPr b="1" i="0" lang="en-US" sz="1275" u="none" cap="none" strike="noStrike">
-                <a:solidFill>
-                  <a:srgbClr val="00D2FF"/>
-                </a:solidFill>
-                <a:latin typeface="Plus Jakarta Sans"/>
-                <a:ea typeface="Plus Jakarta Sans"/>
-                <a:cs typeface="Plus Jakarta Sans"/>
-                <a:sym typeface="Plus Jakarta Sans"/>
-              </a:rPr>
-              <a:t>$1.100.000 CLP mensuales</a:t>
-            </a:r>
-            <a:r>
-              <a:rPr b="0" i="0" lang="en-US" sz="1275" u="none" cap="none" strike="noStrike">
-                <a:solidFill>
-                  <a:srgbClr val="94A3B8"/>
-                </a:solidFill>
-                <a:latin typeface="Plus Jakarta Sans"/>
-                <a:ea typeface="Plus Jakarta Sans"/>
-                <a:cs typeface="Plus Jakarta Sans"/>
-                <a:sym typeface="Plus Jakarta Sans"/>
-              </a:rPr>
-              <a:t> en ventas anteriormente perdidas por falta de stock.</a:t>
-            </a:r>
-            <a:endParaRPr b="0" i="0" sz="1400" u="none" cap="none" strike="noStrike">
+            <a:endParaRPr b="0" i="0" sz="1800" u="none" cap="none" strike="noStrike">
               <a:solidFill>
                 <a:srgbClr val="000000"/>
               </a:solidFill>
@@ -22416,170 +22892,14 @@
       </p:sp>
       <p:sp>
         <p:nvSpPr>
-          <p:cNvPr id="348" name="Google Shape;348;p15"/>
-          <p:cNvSpPr txBox="1"/>
-          <p:nvPr/>
-        </p:nvSpPr>
-        <p:spPr>
-          <a:xfrm>
-            <a:off x="6262687" y="4234755"/>
-            <a:ext cx="5348287" cy="517921"/>
-          </a:xfrm>
-          <a:prstGeom prst="rect">
-            <a:avLst/>
-          </a:prstGeom>
-          <a:noFill/>
-          <a:ln>
-            <a:noFill/>
-          </a:ln>
-        </p:spPr>
-        <p:txBody>
-          <a:bodyPr anchorCtr="0" anchor="t" bIns="0" lIns="0" spcFirstLastPara="1" rIns="0" wrap="square" tIns="0">
-            <a:spAutoFit/>
-          </a:bodyPr>
-          <a:lstStyle/>
-          <a:p>
-            <a:pPr indent="0" lvl="0" marL="0" marR="0" rtl="0" algn="l">
-              <a:lnSpc>
-                <a:spcPct val="159921"/>
-              </a:lnSpc>
-              <a:spcBef>
-                <a:spcPts val="0"/>
-              </a:spcBef>
-              <a:spcAft>
-                <a:spcPts val="0"/>
-              </a:spcAft>
-              <a:buClr>
-                <a:srgbClr val="000000"/>
-              </a:buClr>
-              <a:buSzPts val="1275"/>
-              <a:buFont typeface="Arial"/>
-              <a:buNone/>
-            </a:pPr>
-            <a:r>
-              <a:rPr b="0" i="0" lang="en-US" sz="1275" u="none" cap="none" strike="noStrike">
-                <a:solidFill>
-                  <a:srgbClr val="94A3B8"/>
-                </a:solidFill>
-                <a:latin typeface="Plus Jakarta Sans"/>
-                <a:ea typeface="Plus Jakarta Sans"/>
-                <a:cs typeface="Plus Jakarta Sans"/>
-                <a:sym typeface="Plus Jakarta Sans"/>
-              </a:rPr>
-              <a:t>Además, libera </a:t>
-            </a:r>
-            <a:r>
-              <a:rPr b="1" i="0" lang="en-US" sz="1275" u="none" cap="none" strike="noStrike">
-                <a:solidFill>
-                  <a:srgbClr val="00D2FF"/>
-                </a:solidFill>
-                <a:latin typeface="Plus Jakarta Sans"/>
-                <a:ea typeface="Plus Jakarta Sans"/>
-                <a:cs typeface="Plus Jakarta Sans"/>
-                <a:sym typeface="Plus Jakarta Sans"/>
-              </a:rPr>
-              <a:t>$3.500.000 CLP</a:t>
-            </a:r>
-            <a:r>
-              <a:rPr b="0" i="0" lang="en-US" sz="1275" u="none" cap="none" strike="noStrike">
-                <a:solidFill>
-                  <a:srgbClr val="94A3B8"/>
-                </a:solidFill>
-                <a:latin typeface="Plus Jakarta Sans"/>
-                <a:ea typeface="Plus Jakarta Sans"/>
-                <a:cs typeface="Plus Jakarta Sans"/>
-                <a:sym typeface="Plus Jakarta Sans"/>
-              </a:rPr>
-              <a:t> de capital de trabajo inmovilizado en compras ineficientes durante los primeros 6 meses.</a:t>
-            </a:r>
-            <a:endParaRPr b="0" i="0" sz="1400" u="none" cap="none" strike="noStrike">
-              <a:solidFill>
-                <a:srgbClr val="000000"/>
-              </a:solidFill>
-              <a:latin typeface="Arial"/>
-              <a:ea typeface="Arial"/>
-              <a:cs typeface="Arial"/>
-              <a:sym typeface="Arial"/>
-            </a:endParaRPr>
-          </a:p>
-        </p:txBody>
-      </p:sp>
-      <p:sp>
-        <p:nvSpPr>
-          <p:cNvPr id="349" name="Google Shape;349;p15"/>
-          <p:cNvSpPr txBox="1"/>
-          <p:nvPr/>
-        </p:nvSpPr>
-        <p:spPr>
-          <a:xfrm>
-            <a:off x="581025" y="485775"/>
-            <a:ext cx="11581447" cy="438150"/>
-          </a:xfrm>
-          <a:prstGeom prst="rect">
-            <a:avLst/>
-          </a:prstGeom>
-          <a:noFill/>
-          <a:ln>
-            <a:noFill/>
-          </a:ln>
-        </p:spPr>
-        <p:txBody>
-          <a:bodyPr anchorCtr="0" anchor="ctr" bIns="0" lIns="0" spcFirstLastPara="1" rIns="0" wrap="square" tIns="0">
-            <a:spAutoFit/>
-          </a:bodyPr>
-          <a:lstStyle/>
-          <a:p>
-            <a:pPr indent="0" lvl="0" marL="0" marR="0" rtl="0" algn="l">
-              <a:lnSpc>
-                <a:spcPct val="100000"/>
-              </a:lnSpc>
-              <a:spcBef>
-                <a:spcPts val="0"/>
-              </a:spcBef>
-              <a:spcAft>
-                <a:spcPts val="0"/>
-              </a:spcAft>
-              <a:buClr>
-                <a:srgbClr val="000000"/>
-              </a:buClr>
-              <a:buSzPts val="2700"/>
-              <a:buFont typeface="Arial"/>
-              <a:buNone/>
-            </a:pPr>
-            <a:r>
-              <a:rPr b="1" i="0" lang="en-US" sz="2700" u="none" cap="none" strike="noStrike">
-                <a:solidFill>
-                  <a:srgbClr val="F8FAFC"/>
-                </a:solidFill>
-                <a:latin typeface="Space Grotesk"/>
-                <a:ea typeface="Space Grotesk"/>
-                <a:cs typeface="Space Grotesk"/>
-                <a:sym typeface="Space Grotesk"/>
-              </a:rPr>
-              <a:t>Impacto Financiero Prometido</a:t>
-            </a:r>
-            <a:endParaRPr b="0" i="0" sz="1400" u="none" cap="none" strike="noStrike">
-              <a:solidFill>
-                <a:srgbClr val="000000"/>
-              </a:solidFill>
-              <a:latin typeface="Arial"/>
-              <a:ea typeface="Arial"/>
-              <a:cs typeface="Arial"/>
-              <a:sym typeface="Arial"/>
-            </a:endParaRPr>
-          </a:p>
-        </p:txBody>
-      </p:sp>
-      <p:sp>
-        <p:nvSpPr>
-          <p:cNvPr id="350" name="Google Shape;350;p15"/>
+          <p:cNvPr id="354" name="Google Shape;354;g3fa4490e163_0_3"/>
           <p:cNvSpPr/>
           <p:nvPr/>
         </p:nvSpPr>
         <p:spPr>
           <a:xfrm>
             <a:off x="581025" y="923925"/>
-            <a:ext cx="57150" cy="304800"/>
+            <a:ext cx="57300" cy="304800"/>
           </a:xfrm>
           <a:prstGeom prst="roundRect">
             <a:avLst>
@@ -23889,7 +24209,7 @@
         </p:blipFill>
         <p:spPr>
           <a:xfrm>
-            <a:off x="0" y="0"/>
+            <a:off x="0" y="10391"/>
             <a:ext cx="12192000" cy="6858000"/>
           </a:xfrm>
           <a:prstGeom prst="rect">
@@ -23936,8 +24256,8 @@
         </p:nvSpPr>
         <p:spPr>
           <a:xfrm>
-            <a:off x="581025" y="1981200"/>
-            <a:ext cx="5348287" cy="609600"/>
+            <a:off x="581025" y="1621200"/>
+            <a:ext cx="5348400" cy="969600"/>
           </a:xfrm>
           <a:prstGeom prst="rect">
             <a:avLst/>
@@ -28677,6 +28997,285 @@
 </file>
 
 <file path=ppt/theme/theme1.xml><?xml version="1.0" encoding="utf-8"?>
+<a:theme xmlns:a="http://schemas.openxmlformats.org/drawingml/2006/main" xmlns:r="http://schemas.openxmlformats.org/officeDocument/2006/relationships" name="Office Theme">
+  <a:themeElements>
+    <a:clrScheme name="Office">
+      <a:dk1>
+        <a:srgbClr val="000000"/>
+      </a:dk1>
+      <a:lt1>
+        <a:srgbClr val="FFFFFF"/>
+      </a:lt1>
+      <a:dk2>
+        <a:srgbClr val="1F497D"/>
+      </a:dk2>
+      <a:lt2>
+        <a:srgbClr val="EEECE1"/>
+      </a:lt2>
+      <a:accent1>
+        <a:srgbClr val="4F81BD"/>
+      </a:accent1>
+      <a:accent2>
+        <a:srgbClr val="C0504D"/>
+      </a:accent2>
+      <a:accent3>
+        <a:srgbClr val="9BBB59"/>
+      </a:accent3>
+      <a:accent4>
+        <a:srgbClr val="8064A2"/>
+      </a:accent4>
+      <a:accent5>
+        <a:srgbClr val="4BACC6"/>
+      </a:accent5>
+      <a:accent6>
+        <a:srgbClr val="F79646"/>
+      </a:accent6>
+      <a:hlink>
+        <a:srgbClr val="0000FF"/>
+      </a:hlink>
+      <a:folHlink>
+        <a:srgbClr val="800080"/>
+      </a:folHlink>
+    </a:clrScheme>
+    <a:fontScheme name="Office">
+      <a:majorFont>
+        <a:latin typeface="Arial"/>
+        <a:ea typeface=""/>
+        <a:cs typeface=""/>
+        <a:font script="Jpan" typeface="ＭＳ Ｐゴシック"/>
+        <a:font script="Hang" typeface="맑은 고딕"/>
+        <a:font script="Hans" typeface="宋体"/>
+        <a:font script="Hant" typeface="新細明體"/>
+        <a:font script="Arab" typeface="Times New Roman"/>
+        <a:font script="Hebr" typeface="Times New Roman"/>
+        <a:font script="Thai" typeface="Angsana New"/>
+        <a:font script="Ethi" typeface="Nyala"/>
+        <a:font script="Beng" typeface="Vrinda"/>
+        <a:font script="Gujr" typeface="Shruti"/>
+        <a:font script="Khmr" typeface="MoolBoran"/>
+        <a:font script="Knda" typeface="Tunga"/>
+        <a:font script="Guru" typeface="Raavi"/>
+        <a:font script="Cans" typeface="Euphemia"/>
+        <a:font script="Cher" typeface="Plantagenet Cherokee"/>
+        <a:font script="Yiii" typeface="Microsoft Yi Baiti"/>
+        <a:font script="Tibt" typeface="Microsoft Himalaya"/>
+        <a:font script="Thaa" typeface="MV Boli"/>
+        <a:font script="Deva" typeface="Mangal"/>
+        <a:font script="Telu" typeface="Gautami"/>
+        <a:font script="Taml" typeface="Latha"/>
+        <a:font script="Syrc" typeface="Estrangelo Edessa"/>
+        <a:font script="Orya" typeface="Kalinga"/>
+        <a:font script="Mlym" typeface="Kartika"/>
+        <a:font script="Laoo" typeface="DokChampa"/>
+        <a:font script="Sinh" typeface="Iskoola Pota"/>
+        <a:font script="Mong" typeface="Mongolian Baiti"/>
+        <a:font script="Viet" typeface="Times New Roman"/>
+        <a:font script="Uigh" typeface="Microsoft Uighur"/>
+        <a:font script="Geor" typeface="Sylfaen"/>
+      </a:majorFont>
+      <a:minorFont>
+        <a:latin typeface="Arial"/>
+        <a:ea typeface=""/>
+        <a:cs typeface=""/>
+        <a:font script="Jpan" typeface="ＭＳ Ｐゴシック"/>
+        <a:font script="Hang" typeface="맑은 고딕"/>
+        <a:font script="Hans" typeface="宋体"/>
+        <a:font script="Hant" typeface="新細明體"/>
+        <a:font script="Arab" typeface="Arial"/>
+        <a:font script="Hebr" typeface="Arial"/>
+        <a:font script="Thai" typeface="Cordia New"/>
+        <a:font script="Ethi" typeface="Nyala"/>
+        <a:font script="Beng" typeface="Vrinda"/>
+        <a:font script="Gujr" typeface="Shruti"/>
+        <a:font script="Khmr" typeface="DaunPenh"/>
+        <a:font script="Knda" typeface="Tunga"/>
+        <a:font script="Guru" typeface="Raavi"/>
+        <a:font script="Cans" typeface="Euphemia"/>
+        <a:font script="Cher" typeface="Plantagenet Cherokee"/>
+        <a:font script="Yiii" typeface="Microsoft Yi Baiti"/>
+        <a:font script="Tibt" typeface="Microsoft Himalaya"/>
+        <a:font script="Thaa" typeface="MV Boli"/>
+        <a:font script="Deva" typeface="Mangal"/>
+        <a:font script="Telu" typeface="Gautami"/>
+        <a:font script="Taml" typeface="Latha"/>
+        <a:font script="Syrc" typeface="Estrangelo Edessa"/>
+        <a:font script="Orya" typeface="Kalinga"/>
+        <a:font script="Mlym" typeface="Kartika"/>
+        <a:font script="Laoo" typeface="DokChampa"/>
+        <a:font script="Sinh" typeface="Iskoola Pota"/>
+        <a:font script="Mong" typeface="Mongolian Baiti"/>
+        <a:font script="Viet" typeface="Arial"/>
+        <a:font script="Uigh" typeface="Microsoft Uighur"/>
+        <a:font script="Geor" typeface="Sylfaen"/>
+      </a:minorFont>
+    </a:fontScheme>
+    <a:fmtScheme name="Office">
+      <a:fillStyleLst>
+        <a:solidFill>
+          <a:schemeClr val="phClr"/>
+        </a:solidFill>
+        <a:gradFill rotWithShape="1">
+          <a:gsLst>
+            <a:gs pos="0">
+              <a:schemeClr val="phClr">
+                <a:tint val="50000"/>
+                <a:satMod val="300000"/>
+              </a:schemeClr>
+            </a:gs>
+            <a:gs pos="35000">
+              <a:schemeClr val="phClr">
+                <a:tint val="37000"/>
+                <a:satMod val="300000"/>
+              </a:schemeClr>
+            </a:gs>
+            <a:gs pos="100000">
+              <a:schemeClr val="phClr">
+                <a:tint val="15000"/>
+                <a:satMod val="350000"/>
+              </a:schemeClr>
+            </a:gs>
+          </a:gsLst>
+          <a:lin ang="16200000" scaled="1"/>
+        </a:gradFill>
+        <a:gradFill rotWithShape="1">
+          <a:gsLst>
+            <a:gs pos="0">
+              <a:schemeClr val="phClr">
+                <a:tint val="100000"/>
+                <a:shade val="100000"/>
+                <a:satMod val="130000"/>
+              </a:schemeClr>
+            </a:gs>
+            <a:gs pos="100000">
+              <a:schemeClr val="phClr">
+                <a:tint val="50000"/>
+                <a:shade val="100000"/>
+                <a:satMod val="350000"/>
+              </a:schemeClr>
+            </a:gs>
+          </a:gsLst>
+          <a:lin ang="16200000" scaled="0"/>
+        </a:gradFill>
+      </a:fillStyleLst>
+      <a:lnStyleLst>
+        <a:ln w="9525" cap="flat" cmpd="sng" algn="ctr">
+          <a:solidFill>
+            <a:schemeClr val="phClr">
+              <a:shade val="95000"/>
+              <a:satMod val="105000"/>
+            </a:schemeClr>
+          </a:solidFill>
+          <a:prstDash val="solid"/>
+        </a:ln>
+        <a:ln w="25400" cap="flat" cmpd="sng" algn="ctr">
+          <a:solidFill>
+            <a:schemeClr val="phClr"/>
+          </a:solidFill>
+          <a:prstDash val="solid"/>
+        </a:ln>
+        <a:ln w="38100" cap="flat" cmpd="sng" algn="ctr">
+          <a:solidFill>
+            <a:schemeClr val="phClr"/>
+          </a:solidFill>
+          <a:prstDash val="solid"/>
+        </a:ln>
+      </a:lnStyleLst>
+      <a:effectStyleLst>
+        <a:effectStyle>
+          <a:effectLst>
+            <a:outerShdw blurRad="40000" dist="20000" dir="5400000" rotWithShape="0">
+              <a:srgbClr val="000000">
+                <a:alpha val="38000"/>
+              </a:srgbClr>
+            </a:outerShdw>
+          </a:effectLst>
+        </a:effectStyle>
+        <a:effectStyle>
+          <a:effectLst>
+            <a:outerShdw blurRad="40000" dist="23000" dir="5400000" rotWithShape="0">
+              <a:srgbClr val="000000">
+                <a:alpha val="35000"/>
+              </a:srgbClr>
+            </a:outerShdw>
+          </a:effectLst>
+        </a:effectStyle>
+        <a:effectStyle>
+          <a:effectLst>
+            <a:outerShdw blurRad="40000" dist="23000" dir="5400000" rotWithShape="0">
+              <a:srgbClr val="000000">
+                <a:alpha val="35000"/>
+              </a:srgbClr>
+            </a:outerShdw>
+          </a:effectLst>
+          <a:scene3d>
+            <a:camera prst="orthographicFront">
+              <a:rot lat="0" lon="0" rev="0"/>
+            </a:camera>
+            <a:lightRig rig="threePt" dir="t">
+              <a:rot lat="0" lon="0" rev="1200000"/>
+            </a:lightRig>
+          </a:scene3d>
+          <a:sp3d>
+            <a:bevelT w="63500" h="25400"/>
+          </a:sp3d>
+        </a:effectStyle>
+      </a:effectStyleLst>
+      <a:bgFillStyleLst>
+        <a:solidFill>
+          <a:schemeClr val="phClr"/>
+        </a:solidFill>
+        <a:gradFill rotWithShape="1">
+          <a:gsLst>
+            <a:gs pos="0">
+              <a:schemeClr val="phClr">
+                <a:tint val="40000"/>
+                <a:satMod val="350000"/>
+              </a:schemeClr>
+            </a:gs>
+            <a:gs pos="40000">
+              <a:schemeClr val="phClr">
+                <a:tint val="45000"/>
+                <a:shade val="99000"/>
+                <a:satMod val="350000"/>
+              </a:schemeClr>
+            </a:gs>
+            <a:gs pos="100000">
+              <a:schemeClr val="phClr">
+                <a:shade val="20000"/>
+                <a:satMod val="255000"/>
+              </a:schemeClr>
+            </a:gs>
+          </a:gsLst>
+          <a:path path="circle">
+            <a:fillToRect l="50000" t="-80000" r="50000" b="180000"/>
+          </a:path>
+        </a:gradFill>
+        <a:gradFill rotWithShape="1">
+          <a:gsLst>
+            <a:gs pos="0">
+              <a:schemeClr val="phClr">
+                <a:tint val="80000"/>
+                <a:satMod val="300000"/>
+              </a:schemeClr>
+            </a:gs>
+            <a:gs pos="100000">
+              <a:schemeClr val="phClr">
+                <a:shade val="30000"/>
+                <a:satMod val="200000"/>
+              </a:schemeClr>
+            </a:gs>
+          </a:gsLst>
+          <a:path path="circle">
+            <a:fillToRect l="50000" t="50000" r="50000" b="50000"/>
+          </a:path>
+        </a:gradFill>
+      </a:bgFillStyleLst>
+    </a:fmtScheme>
+  </a:themeElements>
+</a:theme>
+</file>
+
+<file path=ppt/theme/theme2.xml><?xml version="1.0" encoding="utf-8"?>
 <a:theme xmlns:a="http://schemas.openxmlformats.org/drawingml/2006/main" xmlns:r="http://schemas.openxmlformats.org/officeDocument/2006/relationships">
   <a:themeElements>
     <a:clrScheme name="Default">
@@ -28953,283 +29552,4 @@
     </a:fmtScheme>
   </a:themeElements>
 </a:theme>
-</file>
-
-<file path=ppt/theme/theme2.xml><?xml version="1.0" encoding="utf-8"?>
-<a:theme xmlns:a="http://schemas.openxmlformats.org/drawingml/2006/main" xmlns:r="http://schemas.openxmlformats.org/officeDocument/2006/relationships" name="Office Theme">
-  <a:themeElements>
-    <a:clrScheme name="Office">
-      <a:dk1>
-        <a:srgbClr val="000000"/>
-      </a:dk1>
-      <a:lt1>
-        <a:srgbClr val="FFFFFF"/>
-      </a:lt1>
-      <a:dk2>
-        <a:srgbClr val="1F497D"/>
-      </a:dk2>
-      <a:lt2>
-        <a:srgbClr val="EEECE1"/>
-      </a:lt2>
-      <a:accent1>
-        <a:srgbClr val="4F81BD"/>
-      </a:accent1>
-      <a:accent2>
-        <a:srgbClr val="C0504D"/>
-      </a:accent2>
-      <a:accent3>
-        <a:srgbClr val="9BBB59"/>
-      </a:accent3>
-      <a:accent4>
-        <a:srgbClr val="8064A2"/>
-      </a:accent4>
-      <a:accent5>
-        <a:srgbClr val="4BACC6"/>
-      </a:accent5>
-      <a:accent6>
-        <a:srgbClr val="F79646"/>
-      </a:accent6>
-      <a:hlink>
-        <a:srgbClr val="0000FF"/>
-      </a:hlink>
-      <a:folHlink>
-        <a:srgbClr val="800080"/>
-      </a:folHlink>
-    </a:clrScheme>
-    <a:fontScheme name="Office">
-      <a:majorFont>
-        <a:latin typeface="Arial"/>
-        <a:ea typeface=""/>
-        <a:cs typeface=""/>
-        <a:font script="Jpan" typeface="ＭＳ Ｐゴシック"/>
-        <a:font script="Hang" typeface="맑은 고딕"/>
-        <a:font script="Hans" typeface="宋体"/>
-        <a:font script="Hant" typeface="新細明體"/>
-        <a:font script="Arab" typeface="Times New Roman"/>
-        <a:font script="Hebr" typeface="Times New Roman"/>
-        <a:font script="Thai" typeface="Angsana New"/>
-        <a:font script="Ethi" typeface="Nyala"/>
-        <a:font script="Beng" typeface="Vrinda"/>
-        <a:font script="Gujr" typeface="Shruti"/>
-        <a:font script="Khmr" typeface="MoolBoran"/>
-        <a:font script="Knda" typeface="Tunga"/>
-        <a:font script="Guru" typeface="Raavi"/>
-        <a:font script="Cans" typeface="Euphemia"/>
-        <a:font script="Cher" typeface="Plantagenet Cherokee"/>
-        <a:font script="Yiii" typeface="Microsoft Yi Baiti"/>
-        <a:font script="Tibt" typeface="Microsoft Himalaya"/>
-        <a:font script="Thaa" typeface="MV Boli"/>
-        <a:font script="Deva" typeface="Mangal"/>
-        <a:font script="Telu" typeface="Gautami"/>
-        <a:font script="Taml" typeface="Latha"/>
-        <a:font script="Syrc" typeface="Estrangelo Edessa"/>
-        <a:font script="Orya" typeface="Kalinga"/>
-        <a:font script="Mlym" typeface="Kartika"/>
-        <a:font script="Laoo" typeface="DokChampa"/>
-        <a:font script="Sinh" typeface="Iskoola Pota"/>
-        <a:font script="Mong" typeface="Mongolian Baiti"/>
-        <a:font script="Viet" typeface="Times New Roman"/>
-        <a:font script="Uigh" typeface="Microsoft Uighur"/>
-        <a:font script="Geor" typeface="Sylfaen"/>
-      </a:majorFont>
-      <a:minorFont>
-        <a:latin typeface="Arial"/>
-        <a:ea typeface=""/>
-        <a:cs typeface=""/>
-        <a:font script="Jpan" typeface="ＭＳ Ｐゴシック"/>
-        <a:font script="Hang" typeface="맑은 고딕"/>
-        <a:font script="Hans" typeface="宋体"/>
-        <a:font script="Hant" typeface="新細明體"/>
-        <a:font script="Arab" typeface="Arial"/>
-        <a:font script="Hebr" typeface="Arial"/>
-        <a:font script="Thai" typeface="Cordia New"/>
-        <a:font script="Ethi" typeface="Nyala"/>
-        <a:font script="Beng" typeface="Vrinda"/>
-        <a:font script="Gujr" typeface="Shruti"/>
-        <a:font script="Khmr" typeface="DaunPenh"/>
-        <a:font script="Knda" typeface="Tunga"/>
-        <a:font script="Guru" typeface="Raavi"/>
-        <a:font script="Cans" typeface="Euphemia"/>
-        <a:font script="Cher" typeface="Plantagenet Cherokee"/>
-        <a:font script="Yiii" typeface="Microsoft Yi Baiti"/>
-        <a:font script="Tibt" typeface="Microsoft Himalaya"/>
-        <a:font script="Thaa" typeface="MV Boli"/>
-        <a:font script="Deva" typeface="Mangal"/>
-        <a:font script="Telu" typeface="Gautami"/>
-        <a:font script="Taml" typeface="Latha"/>
-        <a:font script="Syrc" typeface="Estrangelo Edessa"/>
-        <a:font script="Orya" typeface="Kalinga"/>
-        <a:font script="Mlym" typeface="Kartika"/>
-        <a:font script="Laoo" typeface="DokChampa"/>
-        <a:font script="Sinh" typeface="Iskoola Pota"/>
-        <a:font script="Mong" typeface="Mongolian Baiti"/>
-        <a:font script="Viet" typeface="Arial"/>
-        <a:font script="Uigh" typeface="Microsoft Uighur"/>
-        <a:font script="Geor" typeface="Sylfaen"/>
-      </a:minorFont>
-    </a:fontScheme>
-    <a:fmtScheme name="Office">
-      <a:fillStyleLst>
-        <a:solidFill>
-          <a:schemeClr val="phClr"/>
-        </a:solidFill>
-        <a:gradFill rotWithShape="1">
-          <a:gsLst>
-            <a:gs pos="0">
-              <a:schemeClr val="phClr">
-                <a:tint val="50000"/>
-                <a:satMod val="300000"/>
-              </a:schemeClr>
-            </a:gs>
-            <a:gs pos="35000">
-              <a:schemeClr val="phClr">
-                <a:tint val="37000"/>
-                <a:satMod val="300000"/>
-              </a:schemeClr>
-            </a:gs>
-            <a:gs pos="100000">
-              <a:schemeClr val="phClr">
-                <a:tint val="15000"/>
-                <a:satMod val="350000"/>
-              </a:schemeClr>
-            </a:gs>
-          </a:gsLst>
-          <a:lin ang="16200000" scaled="1"/>
-        </a:gradFill>
-        <a:gradFill rotWithShape="1">
-          <a:gsLst>
-            <a:gs pos="0">
-              <a:schemeClr val="phClr">
-                <a:tint val="100000"/>
-                <a:shade val="100000"/>
-                <a:satMod val="130000"/>
-              </a:schemeClr>
-            </a:gs>
-            <a:gs pos="100000">
-              <a:schemeClr val="phClr">
-                <a:tint val="50000"/>
-                <a:shade val="100000"/>
-                <a:satMod val="350000"/>
-              </a:schemeClr>
-            </a:gs>
-          </a:gsLst>
-          <a:lin ang="16200000" scaled="0"/>
-        </a:gradFill>
-      </a:fillStyleLst>
-      <a:lnStyleLst>
-        <a:ln w="9525" cap="flat" cmpd="sng" algn="ctr">
-          <a:solidFill>
-            <a:schemeClr val="phClr">
-              <a:shade val="95000"/>
-              <a:satMod val="105000"/>
-            </a:schemeClr>
-          </a:solidFill>
-          <a:prstDash val="solid"/>
-        </a:ln>
-        <a:ln w="25400" cap="flat" cmpd="sng" algn="ctr">
-          <a:solidFill>
-            <a:schemeClr val="phClr"/>
-          </a:solidFill>
-          <a:prstDash val="solid"/>
-        </a:ln>
-        <a:ln w="38100" cap="flat" cmpd="sng" algn="ctr">
-          <a:solidFill>
-            <a:schemeClr val="phClr"/>
-          </a:solidFill>
-          <a:prstDash val="solid"/>
-        </a:ln>
-      </a:lnStyleLst>
-      <a:effectStyleLst>
-        <a:effectStyle>
-          <a:effectLst>
-            <a:outerShdw blurRad="40000" dist="20000" dir="5400000" rotWithShape="0">
-              <a:srgbClr val="000000">
-                <a:alpha val="38000"/>
-              </a:srgbClr>
-            </a:outerShdw>
-          </a:effectLst>
-        </a:effectStyle>
-        <a:effectStyle>
-          <a:effectLst>
-            <a:outerShdw blurRad="40000" dist="23000" dir="5400000" rotWithShape="0">
-              <a:srgbClr val="000000">
-                <a:alpha val="35000"/>
-              </a:srgbClr>
-            </a:outerShdw>
-          </a:effectLst>
-        </a:effectStyle>
-        <a:effectStyle>
-          <a:effectLst>
-            <a:outerShdw blurRad="40000" dist="23000" dir="5400000" rotWithShape="0">
-              <a:srgbClr val="000000">
-                <a:alpha val="35000"/>
-              </a:srgbClr>
-            </a:outerShdw>
-          </a:effectLst>
-          <a:scene3d>
-            <a:camera prst="orthographicFront">
-              <a:rot lat="0" lon="0" rev="0"/>
-            </a:camera>
-            <a:lightRig rig="threePt" dir="t">
-              <a:rot lat="0" lon="0" rev="1200000"/>
-            </a:lightRig>
-          </a:scene3d>
-          <a:sp3d>
-            <a:bevelT w="63500" h="25400"/>
-          </a:sp3d>
-        </a:effectStyle>
-      </a:effectStyleLst>
-      <a:bgFillStyleLst>
-        <a:solidFill>
-          <a:schemeClr val="phClr"/>
-        </a:solidFill>
-        <a:gradFill rotWithShape="1">
-          <a:gsLst>
-            <a:gs pos="0">
-              <a:schemeClr val="phClr">
-                <a:tint val="40000"/>
-                <a:satMod val="350000"/>
-              </a:schemeClr>
-            </a:gs>
-            <a:gs pos="40000">
-              <a:schemeClr val="phClr">
-                <a:tint val="45000"/>
-                <a:shade val="99000"/>
-                <a:satMod val="350000"/>
-              </a:schemeClr>
-            </a:gs>
-            <a:gs pos="100000">
-              <a:schemeClr val="phClr">
-                <a:shade val="20000"/>
-                <a:satMod val="255000"/>
-              </a:schemeClr>
-            </a:gs>
-          </a:gsLst>
-          <a:path path="circle">
-            <a:fillToRect l="50000" t="-80000" r="50000" b="180000"/>
-          </a:path>
-        </a:gradFill>
-        <a:gradFill rotWithShape="1">
-          <a:gsLst>
-            <a:gs pos="0">
-              <a:schemeClr val="phClr">
-                <a:tint val="80000"/>
-                <a:satMod val="300000"/>
-              </a:schemeClr>
-            </a:gs>
-            <a:gs pos="100000">
-              <a:schemeClr val="phClr">
-                <a:shade val="30000"/>
-                <a:satMod val="200000"/>
-              </a:schemeClr>
-            </a:gs>
-          </a:gsLst>
-          <a:path path="circle">
-            <a:fillToRect l="50000" t="50000" r="50000" b="50000"/>
-          </a:path>
-        </a:gradFill>
-      </a:bgFillStyleLst>
-    </a:fmtScheme>
-  </a:themeElements>
-</a:theme>
 </file>
--- a/Grupo 3/Fase 1/Evidencias Grupales/Presentación Capstone Zapatillas Duoc.pptx
+++ b/Grupo 3/Fase 1/Evidencias Grupales/Presentación Capstone Zapatillas Duoc.pptx
@@ -18267,7 +18267,7 @@
             <a:tbl>
               <a:tblPr bandRow="1" firstRow="1">
                 <a:noFill/>
-                <a:tableStyleId>{5B575228-F79E-496A-A8C0-7297307BC0E4}</a:tableStyleId>
+                <a:tableStyleId>{92681647-0AE0-4264-A6B2-FEEDBBA2D8E6}</a:tableStyleId>
               </a:tblPr>
               <a:tblGrid>
                 <a:gridCol w="6495300"/>
@@ -24209,7 +24209,7 @@
         </p:blipFill>
         <p:spPr>
           <a:xfrm>
-            <a:off x="0" y="10391"/>
+            <a:off x="0" y="31173"/>
             <a:ext cx="12192000" cy="6858000"/>
           </a:xfrm>
           <a:prstGeom prst="rect">
@@ -24324,7 +24324,31 @@
                 <a:cs typeface="Plus Jakarta Sans"/>
                 <a:sym typeface="Plus Jakarta Sans"/>
               </a:rPr>
-              <a:t>, integrando dos componentes estratégicos:</a:t>
+              <a:t>, integrando </a:t>
+            </a:r>
+            <a:r>
+              <a:rPr lang="en-US" sz="1500">
+                <a:solidFill>
+                  <a:srgbClr val="F8FAFC"/>
+                </a:solidFill>
+                <a:latin typeface="Plus Jakarta Sans"/>
+                <a:ea typeface="Plus Jakarta Sans"/>
+                <a:cs typeface="Plus Jakarta Sans"/>
+                <a:sym typeface="Plus Jakarta Sans"/>
+              </a:rPr>
+              <a:t>dos</a:t>
+            </a:r>
+            <a:r>
+              <a:rPr b="0" i="0" lang="en-US" sz="1500" u="none" cap="none" strike="noStrike">
+                <a:solidFill>
+                  <a:srgbClr val="F8FAFC"/>
+                </a:solidFill>
+                <a:latin typeface="Plus Jakarta Sans"/>
+                <a:ea typeface="Plus Jakarta Sans"/>
+                <a:cs typeface="Plus Jakarta Sans"/>
+                <a:sym typeface="Plus Jakarta Sans"/>
+              </a:rPr>
+              <a:t> componentes estratégicos:</a:t>
             </a:r>
             <a:endParaRPr b="0" i="0" sz="1400" u="none" cap="none" strike="noStrike">
               <a:solidFill>
@@ -24530,7 +24554,7 @@
         <p:spPr>
           <a:xfrm>
             <a:off x="1009650" y="4259460"/>
-            <a:ext cx="4919662" cy="548580"/>
+            <a:ext cx="4919700" cy="872700"/>
           </a:xfrm>
           <a:prstGeom prst="rect">
             <a:avLst/>
@@ -24564,7 +24588,7 @@
               <a:buNone/>
             </a:pPr>
             <a:r>
-              <a:rPr b="1" i="0" lang="en-US" sz="1350" u="none" cap="none" strike="noStrike">
+              <a:rPr b="1" lang="en-US" sz="1350">
                 <a:solidFill>
                   <a:srgbClr val="F8FAFC"/>
                 </a:solidFill>
@@ -24573,19 +24597,67 @@
                 <a:cs typeface="Plus Jakarta Sans"/>
                 <a:sym typeface="Plus Jakarta Sans"/>
               </a:rPr>
-              <a:t>Alertas de Reabastecimiento:</a:t>
+              <a:t>Dashboard HQ Admin</a:t>
             </a:r>
             <a:r>
-              <a:rPr b="0" i="0" lang="en-US" sz="1350" u="none" cap="none" strike="noStrike">
-                <a:solidFill>
-                  <a:srgbClr val="94A3B8"/>
+              <a:rPr b="1" i="0" lang="en-US" sz="1350" u="none" cap="none" strike="noStrike">
+                <a:solidFill>
+                  <a:srgbClr val="F8FAFC"/>
                 </a:solidFill>
                 <a:latin typeface="Plus Jakarta Sans"/>
                 <a:ea typeface="Plus Jakarta Sans"/>
                 <a:cs typeface="Plus Jakarta Sans"/>
                 <a:sym typeface="Plus Jakarta Sans"/>
               </a:rPr>
-              <a:t> Notificaciones automáticas previas al quiebre de stock en modelos top ventas.</a:t>
+              <a:t>:</a:t>
+            </a:r>
+            <a:r>
+              <a:rPr b="0" i="0" lang="en-US" sz="1350" u="none" cap="none" strike="noStrike">
+                <a:solidFill>
+                  <a:srgbClr val="94A3B8"/>
+                </a:solidFill>
+                <a:latin typeface="Plus Jakarta Sans"/>
+                <a:ea typeface="Plus Jakarta Sans"/>
+                <a:cs typeface="Plus Jakarta Sans"/>
+                <a:sym typeface="Plus Jakarta Sans"/>
+              </a:rPr>
+              <a:t> Notificaciones automáticas previas al quiebre de stock en modelos top ventas</a:t>
+            </a:r>
+            <a:r>
+              <a:rPr lang="en-US" sz="1350">
+                <a:solidFill>
+                  <a:srgbClr val="94A3B8"/>
+                </a:solidFill>
+                <a:latin typeface="Plus Jakarta Sans"/>
+                <a:ea typeface="Plus Jakarta Sans"/>
+                <a:cs typeface="Plus Jakarta Sans"/>
+                <a:sym typeface="Plus Jakarta Sans"/>
+              </a:rPr>
+              <a:t> y </a:t>
+            </a:r>
+            <a:r>
+              <a:rPr lang="en-US" sz="1350">
+                <a:solidFill>
+                  <a:srgbClr val="94A3B8"/>
+                </a:solidFill>
+                <a:latin typeface="Plus Jakarta Sans"/>
+                <a:ea typeface="Plus Jakarta Sans"/>
+                <a:cs typeface="Plus Jakarta Sans"/>
+                <a:sym typeface="Plus Jakarta Sans"/>
+              </a:rPr>
+              <a:t>métricas</a:t>
+            </a:r>
+            <a:r>
+              <a:rPr lang="en-US" sz="1350">
+                <a:solidFill>
+                  <a:srgbClr val="94A3B8"/>
+                </a:solidFill>
+                <a:latin typeface="Plus Jakarta Sans"/>
+                <a:ea typeface="Plus Jakarta Sans"/>
+                <a:cs typeface="Plus Jakarta Sans"/>
+                <a:sym typeface="Plus Jakarta Sans"/>
+              </a:rPr>
+              <a:t> claves de ventas.</a:t>
             </a:r>
             <a:endParaRPr b="0" i="0" sz="1400" u="none" cap="none" strike="noStrike">
               <a:solidFill>
@@ -28997,6 +29069,285 @@
 </file>
 
 <file path=ppt/theme/theme1.xml><?xml version="1.0" encoding="utf-8"?>
+<a:theme xmlns:a="http://schemas.openxmlformats.org/drawingml/2006/main" xmlns:r="http://schemas.openxmlformats.org/officeDocument/2006/relationships">
+  <a:themeElements>
+    <a:clrScheme name="Default">
+      <a:dk1>
+        <a:srgbClr val="000000"/>
+      </a:dk1>
+      <a:lt1>
+        <a:srgbClr val="FFFFFF"/>
+      </a:lt1>
+      <a:dk2>
+        <a:srgbClr val="158158"/>
+      </a:dk2>
+      <a:lt2>
+        <a:srgbClr val="F3F3F3"/>
+      </a:lt2>
+      <a:accent1>
+        <a:srgbClr val="058DC7"/>
+      </a:accent1>
+      <a:accent2>
+        <a:srgbClr val="50B432"/>
+      </a:accent2>
+      <a:accent3>
+        <a:srgbClr val="ED561B"/>
+      </a:accent3>
+      <a:accent4>
+        <a:srgbClr val="EDEF00"/>
+      </a:accent4>
+      <a:accent5>
+        <a:srgbClr val="24CBE5"/>
+      </a:accent5>
+      <a:accent6>
+        <a:srgbClr val="64E572"/>
+      </a:accent6>
+      <a:hlink>
+        <a:srgbClr val="2200CC"/>
+      </a:hlink>
+      <a:folHlink>
+        <a:srgbClr val="551A8B"/>
+      </a:folHlink>
+    </a:clrScheme>
+    <a:fontScheme name="Office">
+      <a:majorFont>
+        <a:latin typeface="Arial"/>
+        <a:ea typeface=""/>
+        <a:cs typeface=""/>
+        <a:font script="Jpan" typeface="ＭＳ Ｐゴシック"/>
+        <a:font script="Hang" typeface="맑은 고딕"/>
+        <a:font script="Hans" typeface="宋体"/>
+        <a:font script="Hant" typeface="新細明體"/>
+        <a:font script="Arab" typeface="Times New Roman"/>
+        <a:font script="Hebr" typeface="Times New Roman"/>
+        <a:font script="Thai" typeface="Angsana New"/>
+        <a:font script="Ethi" typeface="Nyala"/>
+        <a:font script="Beng" typeface="Vrinda"/>
+        <a:font script="Gujr" typeface="Shruti"/>
+        <a:font script="Khmr" typeface="MoolBoran"/>
+        <a:font script="Knda" typeface="Tunga"/>
+        <a:font script="Guru" typeface="Raavi"/>
+        <a:font script="Cans" typeface="Euphemia"/>
+        <a:font script="Cher" typeface="Plantagenet Cherokee"/>
+        <a:font script="Yiii" typeface="Microsoft Yi Baiti"/>
+        <a:font script="Tibt" typeface="Microsoft Himalaya"/>
+        <a:font script="Thaa" typeface="MV Boli"/>
+        <a:font script="Deva" typeface="Mangal"/>
+        <a:font script="Telu" typeface="Gautami"/>
+        <a:font script="Taml" typeface="Latha"/>
+        <a:font script="Syrc" typeface="Estrangelo Edessa"/>
+        <a:font script="Orya" typeface="Kalinga"/>
+        <a:font script="Mlym" typeface="Kartika"/>
+        <a:font script="Laoo" typeface="DokChampa"/>
+        <a:font script="Sinh" typeface="Iskoola Pota"/>
+        <a:font script="Mong" typeface="Mongolian Baiti"/>
+        <a:font script="Viet" typeface="Times New Roman"/>
+        <a:font script="Uigh" typeface="Microsoft Uighur"/>
+        <a:font script="Geor" typeface="Sylfaen"/>
+      </a:majorFont>
+      <a:minorFont>
+        <a:latin typeface="Arial"/>
+        <a:ea typeface=""/>
+        <a:cs typeface=""/>
+        <a:font script="Jpan" typeface="ＭＳ Ｐゴシック"/>
+        <a:font script="Hang" typeface="맑은 고딕"/>
+        <a:font script="Hans" typeface="宋体"/>
+        <a:font script="Hant" typeface="新細明體"/>
+        <a:font script="Arab" typeface="Arial"/>
+        <a:font script="Hebr" typeface="Arial"/>
+        <a:font script="Thai" typeface="Cordia New"/>
+        <a:font script="Ethi" typeface="Nyala"/>
+        <a:font script="Beng" typeface="Vrinda"/>
+        <a:font script="Gujr" typeface="Shruti"/>
+        <a:font script="Khmr" typeface="DaunPenh"/>
+        <a:font script="Knda" typeface="Tunga"/>
+        <a:font script="Guru" typeface="Raavi"/>
+        <a:font script="Cans" typeface="Euphemia"/>
+        <a:font script="Cher" typeface="Plantagenet Cherokee"/>
+        <a:font script="Yiii" typeface="Microsoft Yi Baiti"/>
+        <a:font script="Tibt" typeface="Microsoft Himalaya"/>
+        <a:font script="Thaa" typeface="MV Boli"/>
+        <a:font script="Deva" typeface="Mangal"/>
+        <a:font script="Telu" typeface="Gautami"/>
+        <a:font script="Taml" typeface="Latha"/>
+        <a:font script="Syrc" typeface="Estrangelo Edessa"/>
+        <a:font script="Orya" typeface="Kalinga"/>
+        <a:font script="Mlym" typeface="Kartika"/>
+        <a:font script="Laoo" typeface="DokChampa"/>
+        <a:font script="Sinh" typeface="Iskoola Pota"/>
+        <a:font script="Mong" typeface="Mongolian Baiti"/>
+        <a:font script="Viet" typeface="Arial"/>
+        <a:font script="Uigh" typeface="Microsoft Uighur"/>
+        <a:font script="Geor" typeface="Sylfaen"/>
+      </a:minorFont>
+    </a:fontScheme>
+    <a:fmtScheme name="Office">
+      <a:fillStyleLst>
+        <a:solidFill>
+          <a:schemeClr val="phClr"/>
+        </a:solidFill>
+        <a:gradFill rotWithShape="1">
+          <a:gsLst>
+            <a:gs pos="0">
+              <a:schemeClr val="phClr">
+                <a:tint val="50000"/>
+                <a:satMod val="300000"/>
+              </a:schemeClr>
+            </a:gs>
+            <a:gs pos="35000">
+              <a:schemeClr val="phClr">
+                <a:tint val="37000"/>
+                <a:satMod val="300000"/>
+              </a:schemeClr>
+            </a:gs>
+            <a:gs pos="100000">
+              <a:schemeClr val="phClr">
+                <a:tint val="15000"/>
+                <a:satMod val="350000"/>
+              </a:schemeClr>
+            </a:gs>
+          </a:gsLst>
+          <a:lin ang="16200000" scaled="1"/>
+        </a:gradFill>
+        <a:gradFill rotWithShape="1">
+          <a:gsLst>
+            <a:gs pos="0">
+              <a:schemeClr val="phClr">
+                <a:tint val="100000"/>
+                <a:shade val="100000"/>
+                <a:satMod val="130000"/>
+              </a:schemeClr>
+            </a:gs>
+            <a:gs pos="100000">
+              <a:schemeClr val="phClr">
+                <a:tint val="50000"/>
+                <a:shade val="100000"/>
+                <a:satMod val="350000"/>
+              </a:schemeClr>
+            </a:gs>
+          </a:gsLst>
+          <a:lin ang="16200000" scaled="0"/>
+        </a:gradFill>
+      </a:fillStyleLst>
+      <a:lnStyleLst>
+        <a:ln w="9525" cap="flat" cmpd="sng" algn="ctr">
+          <a:solidFill>
+            <a:schemeClr val="phClr">
+              <a:shade val="95000"/>
+              <a:satMod val="105000"/>
+            </a:schemeClr>
+          </a:solidFill>
+          <a:prstDash val="solid"/>
+        </a:ln>
+        <a:ln w="25400" cap="flat" cmpd="sng" algn="ctr">
+          <a:solidFill>
+            <a:schemeClr val="phClr"/>
+          </a:solidFill>
+          <a:prstDash val="solid"/>
+        </a:ln>
+        <a:ln w="38100" cap="flat" cmpd="sng" algn="ctr">
+          <a:solidFill>
+            <a:schemeClr val="phClr"/>
+          </a:solidFill>
+          <a:prstDash val="solid"/>
+        </a:ln>
+      </a:lnStyleLst>
+      <a:effectStyleLst>
+        <a:effectStyle>
+          <a:effectLst>
+            <a:outerShdw blurRad="40000" dist="20000" dir="5400000" rotWithShape="0">
+              <a:srgbClr val="000000">
+                <a:alpha val="38000"/>
+              </a:srgbClr>
+            </a:outerShdw>
+          </a:effectLst>
+        </a:effectStyle>
+        <a:effectStyle>
+          <a:effectLst>
+            <a:outerShdw blurRad="40000" dist="23000" dir="5400000" rotWithShape="0">
+              <a:srgbClr val="000000">
+                <a:alpha val="35000"/>
+              </a:srgbClr>
+            </a:outerShdw>
+          </a:effectLst>
+        </a:effectStyle>
+        <a:effectStyle>
+          <a:effectLst>
+            <a:outerShdw blurRad="40000" dist="23000" dir="5400000" rotWithShape="0">
+              <a:srgbClr val="000000">
+                <a:alpha val="35000"/>
+              </a:srgbClr>
+            </a:outerShdw>
+          </a:effectLst>
+          <a:scene3d>
+            <a:camera prst="orthographicFront">
+              <a:rot lat="0" lon="0" rev="0"/>
+            </a:camera>
+            <a:lightRig rig="threePt" dir="t">
+              <a:rot lat="0" lon="0" rev="1200000"/>
+            </a:lightRig>
+          </a:scene3d>
+          <a:sp3d>
+            <a:bevelT w="63500" h="25400"/>
+          </a:sp3d>
+        </a:effectStyle>
+      </a:effectStyleLst>
+      <a:bgFillStyleLst>
+        <a:solidFill>
+          <a:schemeClr val="phClr"/>
+        </a:solidFill>
+        <a:gradFill rotWithShape="1">
+          <a:gsLst>
+            <a:gs pos="0">
+              <a:schemeClr val="phClr">
+                <a:tint val="40000"/>
+                <a:satMod val="350000"/>
+              </a:schemeClr>
+            </a:gs>
+            <a:gs pos="40000">
+              <a:schemeClr val="phClr">
+                <a:tint val="45000"/>
+                <a:shade val="99000"/>
+                <a:satMod val="350000"/>
+              </a:schemeClr>
+            </a:gs>
+            <a:gs pos="100000">
+              <a:schemeClr val="phClr">
+                <a:shade val="20000"/>
+                <a:satMod val="255000"/>
+              </a:schemeClr>
+            </a:gs>
+          </a:gsLst>
+          <a:path path="circle">
+            <a:fillToRect l="50000" t="-80000" r="50000" b="180000"/>
+          </a:path>
+        </a:gradFill>
+        <a:gradFill rotWithShape="1">
+          <a:gsLst>
+            <a:gs pos="0">
+              <a:schemeClr val="phClr">
+                <a:tint val="80000"/>
+                <a:satMod val="300000"/>
+              </a:schemeClr>
+            </a:gs>
+            <a:gs pos="100000">
+              <a:schemeClr val="phClr">
+                <a:shade val="30000"/>
+                <a:satMod val="200000"/>
+              </a:schemeClr>
+            </a:gs>
+          </a:gsLst>
+          <a:path path="circle">
+            <a:fillToRect l="50000" t="50000" r="50000" b="50000"/>
+          </a:path>
+        </a:gradFill>
+      </a:bgFillStyleLst>
+    </a:fmtScheme>
+  </a:themeElements>
+</a:theme>
+</file>
+
+<file path=ppt/theme/theme2.xml><?xml version="1.0" encoding="utf-8"?>
 <a:theme xmlns:a="http://schemas.openxmlformats.org/drawingml/2006/main" xmlns:r="http://schemas.openxmlformats.org/officeDocument/2006/relationships" name="Office Theme">
   <a:themeElements>
     <a:clrScheme name="Office">
@@ -29273,283 +29624,4 @@
     </a:fmtScheme>
   </a:themeElements>
 </a:theme>
-</file>
-
-<file path=ppt/theme/theme2.xml><?xml version="1.0" encoding="utf-8"?>
-<a:theme xmlns:a="http://schemas.openxmlformats.org/drawingml/2006/main" xmlns:r="http://schemas.openxmlformats.org/officeDocument/2006/relationships">
-  <a:themeElements>
-    <a:clrScheme name="Default">
-      <a:dk1>
-        <a:srgbClr val="000000"/>
-      </a:dk1>
-      <a:lt1>
-        <a:srgbClr val="FFFFFF"/>
-      </a:lt1>
-      <a:dk2>
-        <a:srgbClr val="158158"/>
-      </a:dk2>
-      <a:lt2>
-        <a:srgbClr val="F3F3F3"/>
-      </a:lt2>
-      <a:accent1>
-        <a:srgbClr val="058DC7"/>
-      </a:accent1>
-      <a:accent2>
-        <a:srgbClr val="50B432"/>
-      </a:accent2>
-      <a:accent3>
-        <a:srgbClr val="ED561B"/>
-      </a:accent3>
-      <a:accent4>
-        <a:srgbClr val="EDEF00"/>
-      </a:accent4>
-      <a:accent5>
-        <a:srgbClr val="24CBE5"/>
-      </a:accent5>
-      <a:accent6>
-        <a:srgbClr val="64E572"/>
-      </a:accent6>
-      <a:hlink>
-        <a:srgbClr val="2200CC"/>
-      </a:hlink>
-      <a:folHlink>
-        <a:srgbClr val="551A8B"/>
-      </a:folHlink>
-    </a:clrScheme>
-    <a:fontScheme name="Office">
-      <a:majorFont>
-        <a:latin typeface="Arial"/>
-        <a:ea typeface=""/>
-        <a:cs typeface=""/>
-        <a:font script="Jpan" typeface="ＭＳ Ｐゴシック"/>
-        <a:font script="Hang" typeface="맑은 고딕"/>
-        <a:font script="Hans" typeface="宋体"/>
-        <a:font script="Hant" typeface="新細明體"/>
-        <a:font script="Arab" typeface="Times New Roman"/>
-        <a:font script="Hebr" typeface="Times New Roman"/>
-        <a:font script="Thai" typeface="Angsana New"/>
-        <a:font script="Ethi" typeface="Nyala"/>
-        <a:font script="Beng" typeface="Vrinda"/>
-        <a:font script="Gujr" typeface="Shruti"/>
-        <a:font script="Khmr" typeface="MoolBoran"/>
-        <a:font script="Knda" typeface="Tunga"/>
-        <a:font script="Guru" typeface="Raavi"/>
-        <a:font script="Cans" typeface="Euphemia"/>
-        <a:font script="Cher" typeface="Plantagenet Cherokee"/>
-        <a:font script="Yiii" typeface="Microsoft Yi Baiti"/>
-        <a:font script="Tibt" typeface="Microsoft Himalaya"/>
-        <a:font script="Thaa" typeface="MV Boli"/>
-        <a:font script="Deva" typeface="Mangal"/>
-        <a:font script="Telu" typeface="Gautami"/>
-        <a:font script="Taml" typeface="Latha"/>
-        <a:font script="Syrc" typeface="Estrangelo Edessa"/>
-        <a:font script="Orya" typeface="Kalinga"/>
-        <a:font script="Mlym" typeface="Kartika"/>
-        <a:font script="Laoo" typeface="DokChampa"/>
-        <a:font script="Sinh" typeface="Iskoola Pota"/>
-        <a:font script="Mong" typeface="Mongolian Baiti"/>
-        <a:font script="Viet" typeface="Times New Roman"/>
-        <a:font script="Uigh" typeface="Microsoft Uighur"/>
-        <a:font script="Geor" typeface="Sylfaen"/>
-      </a:majorFont>
-      <a:minorFont>
-        <a:latin typeface="Arial"/>
-        <a:ea typeface=""/>
-        <a:cs typeface=""/>
-        <a:font script="Jpan" typeface="ＭＳ Ｐゴシック"/>
-        <a:font script="Hang" typeface="맑은 고딕"/>
-        <a:font script="Hans" typeface="宋体"/>
-        <a:font script="Hant" typeface="新細明體"/>
-        <a:font script="Arab" typeface="Arial"/>
-        <a:font script="Hebr" typeface="Arial"/>
-        <a:font script="Thai" typeface="Cordia New"/>
-        <a:font script="Ethi" typeface="Nyala"/>
-        <a:font script="Beng" typeface="Vrinda"/>
-        <a:font script="Gujr" typeface="Shruti"/>
-        <a:font script="Khmr" typeface="DaunPenh"/>
-        <a:font script="Knda" typeface="Tunga"/>
-        <a:font script="Guru" typeface="Raavi"/>
-        <a:font script="Cans" typeface="Euphemia"/>
-        <a:font script="Cher" typeface="Plantagenet Cherokee"/>
-        <a:font script="Yiii" typeface="Microsoft Yi Baiti"/>
-        <a:font script="Tibt" typeface="Microsoft Himalaya"/>
-        <a:font script="Thaa" typeface="MV Boli"/>
-        <a:font script="Deva" typeface="Mangal"/>
-        <a:font script="Telu" typeface="Gautami"/>
-        <a:font script="Taml" typeface="Latha"/>
-        <a:font script="Syrc" typeface="Estrangelo Edessa"/>
-        <a:font script="Orya" typeface="Kalinga"/>
-        <a:font script="Mlym" typeface="Kartika"/>
-        <a:font script="Laoo" typeface="DokChampa"/>
-        <a:font script="Sinh" typeface="Iskoola Pota"/>
-        <a:font script="Mong" typeface="Mongolian Baiti"/>
-        <a:font script="Viet" typeface="Arial"/>
-        <a:font script="Uigh" typeface="Microsoft Uighur"/>
-        <a:font script="Geor" typeface="Sylfaen"/>
-      </a:minorFont>
-    </a:fontScheme>
-    <a:fmtScheme name="Office">
-      <a:fillStyleLst>
-        <a:solidFill>
-          <a:schemeClr val="phClr"/>
-        </a:solidFill>
-        <a:gradFill rotWithShape="1">
-          <a:gsLst>
-            <a:gs pos="0">
-              <a:schemeClr val="phClr">
-                <a:tint val="50000"/>
-                <a:satMod val="300000"/>
-              </a:schemeClr>
-            </a:gs>
-            <a:gs pos="35000">
-              <a:schemeClr val="phClr">
-                <a:tint val="37000"/>
-                <a:satMod val="300000"/>
-              </a:schemeClr>
-            </a:gs>
-            <a:gs pos="100000">
-              <a:schemeClr val="phClr">
-                <a:tint val="15000"/>
-                <a:satMod val="350000"/>
-              </a:schemeClr>
-            </a:gs>
-          </a:gsLst>
-          <a:lin ang="16200000" scaled="1"/>
-        </a:gradFill>
-        <a:gradFill rotWithShape="1">
-          <a:gsLst>
-            <a:gs pos="0">
-              <a:schemeClr val="phClr">
-                <a:tint val="100000"/>
-                <a:shade val="100000"/>
-                <a:satMod val="130000"/>
-              </a:schemeClr>
-            </a:gs>
-            <a:gs pos="100000">
-              <a:schemeClr val="phClr">
-                <a:tint val="50000"/>
-                <a:shade val="100000"/>
-                <a:satMod val="350000"/>
-              </a:schemeClr>
-            </a:gs>
-          </a:gsLst>
-          <a:lin ang="16200000" scaled="0"/>
-        </a:gradFill>
-      </a:fillStyleLst>
-      <a:lnStyleLst>
-        <a:ln w="9525" cap="flat" cmpd="sng" algn="ctr">
-          <a:solidFill>
-            <a:schemeClr val="phClr">
-              <a:shade val="95000"/>
-              <a:satMod val="105000"/>
-            </a:schemeClr>
-          </a:solidFill>
-          <a:prstDash val="solid"/>
-        </a:ln>
-        <a:ln w="25400" cap="flat" cmpd="sng" algn="ctr">
-          <a:solidFill>
-            <a:schemeClr val="phClr"/>
-          </a:solidFill>
-          <a:prstDash val="solid"/>
-        </a:ln>
-        <a:ln w="38100" cap="flat" cmpd="sng" algn="ctr">
-          <a:solidFill>
-            <a:schemeClr val="phClr"/>
-          </a:solidFill>
-          <a:prstDash val="solid"/>
-        </a:ln>
-      </a:lnStyleLst>
-      <a:effectStyleLst>
-        <a:effectStyle>
-          <a:effectLst>
-            <a:outerShdw blurRad="40000" dist="20000" dir="5400000" rotWithShape="0">
-              <a:srgbClr val="000000">
-                <a:alpha val="38000"/>
-              </a:srgbClr>
-            </a:outerShdw>
-          </a:effectLst>
-        </a:effectStyle>
-        <a:effectStyle>
-          <a:effectLst>
-            <a:outerShdw blurRad="40000" dist="23000" dir="5400000" rotWithShape="0">
-              <a:srgbClr val="000000">
-                <a:alpha val="35000"/>
-              </a:srgbClr>
-            </a:outerShdw>
-          </a:effectLst>
-        </a:effectStyle>
-        <a:effectStyle>
-          <a:effectLst>
-            <a:outerShdw blurRad="40000" dist="23000" dir="5400000" rotWithShape="0">
-              <a:srgbClr val="000000">
-                <a:alpha val="35000"/>
-              </a:srgbClr>
-            </a:outerShdw>
-          </a:effectLst>
-          <a:scene3d>
-            <a:camera prst="orthographicFront">
-              <a:rot lat="0" lon="0" rev="0"/>
-            </a:camera>
-            <a:lightRig rig="threePt" dir="t">
-              <a:rot lat="0" lon="0" rev="1200000"/>
-            </a:lightRig>
-          </a:scene3d>
-          <a:sp3d>
-            <a:bevelT w="63500" h="25400"/>
-          </a:sp3d>
-        </a:effectStyle>
-      </a:effectStyleLst>
-      <a:bgFillStyleLst>
-        <a:solidFill>
-          <a:schemeClr val="phClr"/>
-        </a:solidFill>
-        <a:gradFill rotWithShape="1">
-          <a:gsLst>
-            <a:gs pos="0">
-              <a:schemeClr val="phClr">
-                <a:tint val="40000"/>
-                <a:satMod val="350000"/>
-              </a:schemeClr>
-            </a:gs>
-            <a:gs pos="40000">
-              <a:schemeClr val="phClr">
-                <a:tint val="45000"/>
-                <a:shade val="99000"/>
-                <a:satMod val="350000"/>
-              </a:schemeClr>
-            </a:gs>
-            <a:gs pos="100000">
-              <a:schemeClr val="phClr">
-                <a:shade val="20000"/>
-                <a:satMod val="255000"/>
-              </a:schemeClr>
-            </a:gs>
-          </a:gsLst>
-          <a:path path="circle">
-            <a:fillToRect l="50000" t="-80000" r="50000" b="180000"/>
-          </a:path>
-        </a:gradFill>
-        <a:gradFill rotWithShape="1">
-          <a:gsLst>
-            <a:gs pos="0">
-              <a:schemeClr val="phClr">
-                <a:tint val="80000"/>
-                <a:satMod val="300000"/>
-              </a:schemeClr>
-            </a:gs>
-            <a:gs pos="100000">
-              <a:schemeClr val="phClr">
-                <a:shade val="30000"/>
-                <a:satMod val="200000"/>
-              </a:schemeClr>
-            </a:gs>
-          </a:gsLst>
-          <a:path path="circle">
-            <a:fillToRect l="50000" t="50000" r="50000" b="50000"/>
-          </a:path>
-        </a:gradFill>
-      </a:bgFillStyleLst>
-    </a:fmtScheme>
-  </a:themeElements>
-</a:theme>
 </file>
--- a/Grupo 3/Fase 1/Evidencias Grupales/Presentación Capstone Zapatillas Duoc.pptx
+++ b/Grupo 3/Fase 1/Evidencias Grupales/Presentación Capstone Zapatillas Duoc.pptx
@@ -18267,7 +18267,7 @@
             <a:tbl>
               <a:tblPr bandRow="1" firstRow="1">
                 <a:noFill/>
-                <a:tableStyleId>{92681647-0AE0-4264-A6B2-FEEDBBA2D8E6}</a:tableStyleId>
+                <a:tableStyleId>{A9867179-0F3D-4F5C-BA9B-6C2B68869D39}</a:tableStyleId>
               </a:tblPr>
               <a:tblGrid>
                 <a:gridCol w="6495300"/>
@@ -24300,7 +24300,31 @@
                 <a:cs typeface="Plus Jakarta Sans"/>
                 <a:sym typeface="Plus Jakarta Sans"/>
               </a:rPr>
-              <a:t>Sistema Web de Retail desarrollado a medida para </a:t>
+              <a:t>Sistema Web y </a:t>
+            </a:r>
+            <a:r>
+              <a:rPr lang="en-US" sz="1500">
+                <a:solidFill>
+                  <a:srgbClr val="F8FAFC"/>
+                </a:solidFill>
+                <a:latin typeface="Plus Jakarta Sans"/>
+                <a:ea typeface="Plus Jakarta Sans"/>
+                <a:cs typeface="Plus Jakarta Sans"/>
+                <a:sym typeface="Plus Jakarta Sans"/>
+              </a:rPr>
+              <a:t>Móvil</a:t>
+            </a:r>
+            <a:r>
+              <a:rPr b="0" i="0" lang="en-US" sz="1500" u="none" cap="none" strike="noStrike">
+                <a:solidFill>
+                  <a:srgbClr val="F8FAFC"/>
+                </a:solidFill>
+                <a:latin typeface="Plus Jakarta Sans"/>
+                <a:ea typeface="Plus Jakarta Sans"/>
+                <a:cs typeface="Plus Jakarta Sans"/>
+                <a:sym typeface="Plus Jakarta Sans"/>
+              </a:rPr>
+              <a:t> de Retail desarrollado a medida para </a:t>
             </a:r>
             <a:r>
               <a:rPr b="1" i="0" lang="en-US" sz="1500" u="none" cap="none" strike="noStrike">
